--- a/paper/slides/compiling-recurrent-agent-workflows-into-guarded-programs-detailed.pptx
+++ b/paper/slides/compiling-recurrent-agent-workflows-into-guarded-programs-detailed.pptx
@@ -26105,7 +26105,7 @@
                 <a:ea typeface="Calibri"/>
                 <a:cs typeface="Calibri"/>
               </a:rPr>
-              <a:t>On the sealed artifact every threshold below 0.14 admits nothing and every threshold at or above it admits all 92, with zero violations throughout. The score was fitted with zero positive examples over eight observations, so it behaves as an all-or-none support test, not a risk–coverage frontier.</a:t>
+              <a:t>On the sealed artifact every threshold below 0.14 admits nothing and above it admits all 92, zero violations throughout. A pre-registered study since ran a support-only comparator (alpha=1, otherwise identical) on four repositories, 240 held-out pairs, and found the same all-or-none threshold everywhere: confirmed, not resolved, and still not a risk-coverage frontier.</a:t>
             </a:r>
           </a:p>
         </p:txBody>

--- a/paper/slides/compiling-recurrent-agent-workflows-into-guarded-programs-detailed.pptx
+++ b/paper/slides/compiling-recurrent-agent-workflows-into-guarded-programs-detailed.pptx
@@ -4170,7 +4170,7 @@
                 <a:ea typeface="Cambria"/>
                 <a:cs typeface="Cambria"/>
               </a:rPr>
-              <a:t>From Traces to Guarded Programs: Evidence-Gated Compilation of Recurrent Agent Workflows</a:t>
+              <a:t>Compile or Retire: Evidence-Gated Specialization of Recurrent Agent Workflows</a:t>
             </a:r>
           </a:p>
         </p:txBody>
@@ -28290,7 +28290,7 @@
                 <a:ea typeface="Calibri"/>
                 <a:cs typeface="Calibri"/>
               </a:rPr>
-              <a:t>From Traces to Guarded Programs: Evidence-Gated Compilation of Recurrent Agent Workflows  ·  artifact includes pinned data snapshots, raw results, and an adversarial self-review</a:t>
+              <a:t>Compile or Retire: Evidence-Gated Specialization of Recurrent Agent Workflows  ·  artifact includes pinned data snapshots, raw results, and an adversarial self-review</a:t>
             </a:r>
           </a:p>
         </p:txBody>

--- a/paper/slides/compiling-recurrent-agent-workflows-into-guarded-programs-detailed.pptx
+++ b/paper/slides/compiling-recurrent-agent-workflows-into-guarded-programs-detailed.pptx
@@ -4170,7 +4170,7 @@
                 <a:ea typeface="Cambria"/>
                 <a:cs typeface="Cambria"/>
               </a:rPr>
-              <a:t>Compile or Retire: Evidence-Gated Specialization of Recurrent Agent Workflows</a:t>
+              <a:t>From Traces to Guarded Programs: Evidence-Gated Compilation of Recurrent Agent Workflows</a:t>
             </a:r>
           </a:p>
         </p:txBody>
@@ -28290,7 +28290,7 @@
                 <a:ea typeface="Calibri"/>
                 <a:cs typeface="Calibri"/>
               </a:rPr>
-              <a:t>Compile or Retire: Evidence-Gated Specialization of Recurrent Agent Workflows  ·  artifact includes pinned data snapshots, raw results, and an adversarial self-review</a:t>
+              <a:t>From Traces to Guarded Programs: Evidence-Gated Compilation of Recurrent Agent Workflows  ·  artifact includes pinned data snapshots, raw results, and an adversarial self-review</a:t>
             </a:r>
           </a:p>
         </p:txBody>

--- a/paper/slides/compiling-recurrent-agent-workflows-into-guarded-programs-detailed.pptx
+++ b/paper/slides/compiling-recurrent-agent-workflows-into-guarded-programs-detailed.pptx
@@ -28,6 +28,9 @@
     <p:sldId xmlns:r="http://schemas.openxmlformats.org/officeDocument/2006/relationships" id="273" r:id="Rgacsld18"/>
     <p:sldId xmlns:r="http://schemas.openxmlformats.org/officeDocument/2006/relationships" id="274" r:id="Rgacsld19"/>
     <p:sldId xmlns:r="http://schemas.openxmlformats.org/officeDocument/2006/relationships" id="275" r:id="Rgacsld20"/>
+    <p:sldId xmlns:r="http://schemas.openxmlformats.org/officeDocument/2006/relationships" id="282" r:id="Rgacsld27"/>
+    <p:sldId xmlns:r="http://schemas.openxmlformats.org/officeDocument/2006/relationships" id="283" r:id="Rgacsld28"/>
+    <p:sldId xmlns:r="http://schemas.openxmlformats.org/officeDocument/2006/relationships" id="284" r:id="Rgacsld29"/>
     <p:sldId xmlns:r="http://schemas.openxmlformats.org/officeDocument/2006/relationships" id="276" r:id="Rgacsld21"/>
     <p:sldId xmlns:r="http://schemas.openxmlformats.org/officeDocument/2006/relationships" id="277" r:id="Rgacsld22"/>
     <p:sldId xmlns:r="http://schemas.openxmlformats.org/officeDocument/2006/relationships" id="278" r:id="Rgacsld23"/>
@@ -3127,6 +3130,216 @@
           <a:p xmlns:a="http://schemas.openxmlformats.org/drawingml/2006/main">
             <a:r>
               <a:t>Close on the framing sentence from the paper's conclusion: an agent optimizer should be judged not only by what it compresses, but by whether it can explain and enforce when it must not compile.</a:t>
+            </a:r>
+          </a:p>
+        </p:txBody>
+      </p:sp>
+      <p:sp>
+        <p:nvSpPr>
+          <p:cNvPr id="4" name="Slide Number Placeholder 3"/>
+          <p:cNvSpPr>
+            <a:spLocks xmlns:a="http://schemas.openxmlformats.org/drawingml/2006/main" noGrp="1"/>
+          </p:cNvSpPr>
+          <p:nvPr>
+            <p:ph type="sldNum" idx="5"/>
+          </p:nvPr>
+        </p:nvSpPr>
+        <p:spPr/>
+        <p:txBody>
+          <a:bodyPr xmlns:a="http://schemas.openxmlformats.org/drawingml/2006/main"/>
+          <a:lstStyle xmlns:a="http://schemas.openxmlformats.org/drawingml/2006/main"/>
+          <a:p xmlns:a="http://schemas.openxmlformats.org/drawingml/2006/main"/>
+        </p:txBody>
+      </p:sp>
+    </p:spTree>
+  </p:cSld>
+  <p:clrMapOvr>
+    <a:masterClrMapping xmlns:a="http://schemas.openxmlformats.org/drawingml/2006/main"/>
+  </p:clrMapOvr>
+</p:notes>
+</file>
+
+<file path=ppt/notesSlides/notesSlide27.xml><?xml version="1.0" encoding="utf-8"?>
+<p:notes xmlns:p="http://schemas.openxmlformats.org/presentationml/2006/main">
+  <p:cSld>
+    <p:spTree>
+      <p:nvGrpSpPr>
+        <p:cNvPr id="1" name=""/>
+        <p:cNvGrpSpPr/>
+        <p:nvPr/>
+      </p:nvGrpSpPr>
+      <p:grpSpPr>
+        <a:xfrm xmlns:a="http://schemas.openxmlformats.org/drawingml/2006/main"/>
+      </p:grpSpPr>
+      <p:sp>
+        <p:nvSpPr>
+          <p:cNvPr id="2" name="Slide Image Placeholder 1"/>
+          <p:cNvSpPr>
+            <a:spLocks xmlns:a="http://schemas.openxmlformats.org/drawingml/2006/main" noGrp="1"/>
+          </p:cNvSpPr>
+          <p:nvPr>
+            <p:ph type="sldImg" idx="0"/>
+          </p:nvPr>
+        </p:nvSpPr>
+        <p:spPr/>
+      </p:sp>
+      <p:sp>
+        <p:nvSpPr>
+          <p:cNvPr id="3" name="Notes Placeholder 2"/>
+          <p:cNvSpPr>
+            <a:spLocks xmlns:a="http://schemas.openxmlformats.org/drawingml/2006/main" noGrp="1"/>
+          </p:cNvSpPr>
+          <p:nvPr>
+            <p:ph type="body" idx="1"/>
+          </p:nvPr>
+        </p:nvSpPr>
+        <p:spPr/>
+        <p:txBody>
+          <a:bodyPr xmlns:a="http://schemas.openxmlformats.org/drawingml/2006/main"/>
+          <a:lstStyle xmlns:a="http://schemas.openxmlformats.org/drawingml/2006/main"/>
+          <a:p xmlns:a="http://schemas.openxmlformats.org/drawingml/2006/main">
+            <a:r>
+              <a:t>BIRD is the public benchmark where GAC delivers a measured benefit. A schema-first SQL agent's opening (list the tables, read every schema) compiles on 26 of 31 databases with gpt-5.6-luna and on all five dev databases with gpt-6-luna; on 924 held-out questions there is no detected accuracy loss and model calls fall 45 to 50 percent. A standard agent that picks tables per question is refused everywhere, as is Claude Sonnet, which did not follow the schema-first instruction as a fixed step. Cost savings are modest (11 to 18 percent at uncached prices) because the removed calls are the shortest ones.</a:t>
+            </a:r>
+          </a:p>
+        </p:txBody>
+      </p:sp>
+      <p:sp>
+        <p:nvSpPr>
+          <p:cNvPr id="4" name="Slide Number Placeholder 3"/>
+          <p:cNvSpPr>
+            <a:spLocks xmlns:a="http://schemas.openxmlformats.org/drawingml/2006/main" noGrp="1"/>
+          </p:cNvSpPr>
+          <p:nvPr>
+            <p:ph type="sldNum" idx="5"/>
+          </p:nvPr>
+        </p:nvSpPr>
+        <p:spPr/>
+        <p:txBody>
+          <a:bodyPr xmlns:a="http://schemas.openxmlformats.org/drawingml/2006/main"/>
+          <a:lstStyle xmlns:a="http://schemas.openxmlformats.org/drawingml/2006/main"/>
+          <a:p xmlns:a="http://schemas.openxmlformats.org/drawingml/2006/main"/>
+        </p:txBody>
+      </p:sp>
+    </p:spTree>
+  </p:cSld>
+  <p:clrMapOvr>
+    <a:masterClrMapping xmlns:a="http://schemas.openxmlformats.org/drawingml/2006/main"/>
+  </p:clrMapOvr>
+</p:notes>
+</file>
+
+<file path=ppt/notesSlides/notesSlide28.xml><?xml version="1.0" encoding="utf-8"?>
+<p:notes xmlns:p="http://schemas.openxmlformats.org/presentationml/2006/main">
+  <p:cSld>
+    <p:spTree>
+      <p:nvGrpSpPr>
+        <p:cNvPr id="1" name=""/>
+        <p:cNvGrpSpPr/>
+        <p:nvPr/>
+      </p:nvGrpSpPr>
+      <p:grpSpPr>
+        <a:xfrm xmlns:a="http://schemas.openxmlformats.org/drawingml/2006/main"/>
+      </p:grpSpPr>
+      <p:sp>
+        <p:nvSpPr>
+          <p:cNvPr id="2" name="Slide Image Placeholder 1"/>
+          <p:cNvSpPr>
+            <a:spLocks xmlns:a="http://schemas.openxmlformats.org/drawingml/2006/main" noGrp="1"/>
+          </p:cNvSpPr>
+          <p:nvPr>
+            <p:ph type="sldImg" idx="0"/>
+          </p:nvPr>
+        </p:nvSpPr>
+        <p:spPr/>
+      </p:sp>
+      <p:sp>
+        <p:nvSpPr>
+          <p:cNvPr id="3" name="Notes Placeholder 2"/>
+          <p:cNvSpPr>
+            <a:spLocks xmlns:a="http://schemas.openxmlformats.org/drawingml/2006/main" noGrp="1"/>
+          </p:cNvSpPr>
+          <p:nvPr>
+            <p:ph type="body" idx="1"/>
+          </p:nvPr>
+        </p:nvSpPr>
+        <p:spPr/>
+        <p:txBody>
+          <a:bodyPr xmlns:a="http://schemas.openxmlformats.org/drawingml/2006/main"/>
+          <a:lstStyle xmlns:a="http://schemas.openxmlformats.org/drawingml/2006/main"/>
+          <a:p xmlns:a="http://schemas.openxmlformats.org/drawingml/2006/main">
+            <a:r>
+              <a:t>Two kinds of certificate. The primary GitHub certificates (92 of 92 zero-violation groups, bound 0.0498) bound a replay-contract event that cannot occur on these deterministic, pinned cohorts, so in practice they certify that enough independent examples were seen. The post-cutoff study certifies the end-to-end task contract instead: 0 misses on 132 fresh pull requests, bound 0.0173 under its single pre-registered rule and 0.035 under the primary grid, for open and merged pull requests only. Replications re-derive the same programs on a second model and provider; the continuation-graded drift study is adverse.</a:t>
+            </a:r>
+          </a:p>
+        </p:txBody>
+      </p:sp>
+      <p:sp>
+        <p:nvSpPr>
+          <p:cNvPr id="4" name="Slide Number Placeholder 3"/>
+          <p:cNvSpPr>
+            <a:spLocks xmlns:a="http://schemas.openxmlformats.org/drawingml/2006/main" noGrp="1"/>
+          </p:cNvSpPr>
+          <p:nvPr>
+            <p:ph type="sldNum" idx="5"/>
+          </p:nvPr>
+        </p:nvSpPr>
+        <p:spPr/>
+        <p:txBody>
+          <a:bodyPr xmlns:a="http://schemas.openxmlformats.org/drawingml/2006/main"/>
+          <a:lstStyle xmlns:a="http://schemas.openxmlformats.org/drawingml/2006/main"/>
+          <a:p xmlns:a="http://schemas.openxmlformats.org/drawingml/2006/main"/>
+        </p:txBody>
+      </p:sp>
+    </p:spTree>
+  </p:cSld>
+  <p:clrMapOvr>
+    <a:masterClrMapping xmlns:a="http://schemas.openxmlformats.org/drawingml/2006/main"/>
+  </p:clrMapOvr>
+</p:notes>
+</file>
+
+<file path=ppt/notesSlides/notesSlide29.xml><?xml version="1.0" encoding="utf-8"?>
+<p:notes xmlns:p="http://schemas.openxmlformats.org/presentationml/2006/main">
+  <p:cSld>
+    <p:spTree>
+      <p:nvGrpSpPr>
+        <p:cNvPr id="1" name=""/>
+        <p:cNvGrpSpPr/>
+        <p:nvPr/>
+      </p:nvGrpSpPr>
+      <p:grpSpPr>
+        <a:xfrm xmlns:a="http://schemas.openxmlformats.org/drawingml/2006/main"/>
+      </p:grpSpPr>
+      <p:sp>
+        <p:nvSpPr>
+          <p:cNvPr id="2" name="Slide Image Placeholder 1"/>
+          <p:cNvSpPr>
+            <a:spLocks xmlns:a="http://schemas.openxmlformats.org/drawingml/2006/main" noGrp="1"/>
+          </p:cNvSpPr>
+          <p:nvPr>
+            <p:ph type="sldImg" idx="0"/>
+          </p:nvPr>
+        </p:nvSpPr>
+        <p:spPr/>
+      </p:sp>
+      <p:sp>
+        <p:nvSpPr>
+          <p:cNvPr id="3" name="Notes Placeholder 2"/>
+          <p:cNvSpPr>
+            <a:spLocks xmlns:a="http://schemas.openxmlformats.org/drawingml/2006/main" noGrp="1"/>
+          </p:cNvSpPr>
+          <p:nvPr>
+            <p:ph type="body" idx="1"/>
+          </p:nvPr>
+        </p:nvSpPr>
+        <p:spPr/>
+        <p:txBody>
+          <a:bodyPr xmlns:a="http://schemas.openxmlformats.org/drawingml/2006/main"/>
+          <a:lstStyle xmlns:a="http://schemas.openxmlformats.org/drawingml/2006/main"/>
+          <a:p xmlns:a="http://schemas.openxmlformats.org/drawingml/2006/main">
+            <a:r>
+              <a:t>The two public benchmarks with no measured benefit, for two different reasons. NESTFUL is the largest trace corpus the compiler ingests, yet no workflow repeats more than 26 times against the 92 the gate needs, so every family retires; API-Bank and BFCL v4 retire the same way. AppWorld admits one small program, but almost no ReAct or plan-and-execute agent ever reaches it. No model runs on either benchmark, so neither supports an efficiency claim.</a:t>
             </a:r>
           </a:p>
         </p:txBody>
@@ -4322,7 +4535,7 @@
                 <a:ea typeface="Calibri"/>
                 <a:cs typeface="Calibri"/>
               </a:rPr>
-              <a:t>real workflow families with distinct tools and graders</a:t>
+              <a:t>GitHub workflow families, 90/90 held-out contracts</a:t>
             </a:r>
           </a:p>
         </p:txBody>
@@ -4367,7 +4580,7 @@
                 <a:ea typeface="Cambria"/>
                 <a:cs typeface="Cambria"/>
               </a:rPr>
-              <a:t>90</a:t>
+              <a:t>26</a:t>
             </a:r>
           </a:p>
         </p:txBody>
@@ -4415,7 +4628,7 @@
                 <a:ea typeface="Calibri"/>
                 <a:cs typeface="Calibri"/>
               </a:rPr>
-              <a:t>live-provider protocols on real public GitHub records</a:t>
+              <a:t>of 31 BIRD databases compiled, accuracy held</a:t>
             </a:r>
           </a:p>
         </p:txBody>
@@ -4460,7 +4673,7 @@
                 <a:ea typeface="Cambria"/>
                 <a:cs typeface="Cambria"/>
               </a:rPr>
-              <a:t>8</a:t>
+              <a:t>0</a:t>
             </a:r>
           </a:p>
         </p:txBody>
@@ -4508,7 +4721,7 @@
                 <a:ea typeface="Calibri"/>
                 <a:cs typeface="Calibri"/>
               </a:rPr>
-              <a:t>conditions in a controlled workflow-shape suite</a:t>
+              <a:t>end-to-end misses on 132 fresh pull requests</a:t>
             </a:r>
           </a:p>
         </p:txBody>
@@ -4553,7 +4766,7 @@
                 <a:ea typeface="Calibri"/>
                 <a:cs typeface="Calibri"/>
               </a:rPr>
-              <a:t>Prepared for engineering leadership  ·  JazzX AI  ·  August 2026</a:t>
+              <a:t>Prepared for engineering leadership  ·  JazzX AI  ·  October 2026</a:t>
             </a:r>
           </a:p>
         </p:txBody>
@@ -13316,7 +13529,7 @@
                 <a:ea typeface="Calibri"/>
                 <a:cs typeface="Calibri"/>
               </a:rPr>
-              <a:t>Three primary GitHub workflow families plus scoped ablations on a pinned snapshot</a:t>
+              <a:t>Three GitHub workflow families on a pinned snapshot, plus a live SQL agent on BIRD</a:t>
             </a:r>
           </a:p>
         </p:txBody>
@@ -13411,7 +13624,7 @@
                 <a:ea typeface="Calibri"/>
                 <a:cs typeface="Calibri"/>
               </a:rPr>
-              <a:t>One repository, one snapshot, one model configuration</a:t>
+              <a:t>GitHub: one snapshot; BIRD: 31 databases, two model families</a:t>
             </a:r>
           </a:p>
         </p:txBody>
@@ -14139,7 +14352,7 @@
                 <a:ea typeface="Calibri"/>
                 <a:cs typeface="Calibri"/>
               </a:rPr>
-              <a:t>45/45 tool replays; issue #6602 loses its Markdown URL.</a:t>
+              <a:t>45/45 calibration replays; issue #6602 loses its Markdown URL.</a:t>
             </a:r>
           </a:p>
         </p:txBody>
@@ -14245,7 +14458,7 @@
                 <a:ea typeface="Calibri"/>
                 <a:cs typeface="Calibri"/>
               </a:rPr>
-              <a:t>GAC: ungroundable comments limit → keep comments and rendering with the agent.</a:t>
+              <a:t> GAC: ungroundable comments limit → keep comments and rendering with the agent.</a:t>
             </a:r>
           </a:p>
         </p:txBody>
@@ -17370,7 +17583,7 @@
                 <a:ea typeface="Cambria"/>
                 <a:cs typeface="Cambria"/>
               </a:rPr>
-              <a:t>50%</a:t>
+              <a:t>−66.6%</a:t>
             </a:r>
           </a:p>
         </p:txBody>
@@ -17418,7 +17631,7 @@
                 <a:ea typeface="Calibri"/>
                 <a:cs typeface="Calibri"/>
               </a:rPr>
-              <a:t>fewer provider requests on 30 unseen real GitHub issues — with 30/30 task contracts held</a:t>
+              <a:t>provider requests on 90 held-out GitHub records in three workflows — 90/90 contracts held</a:t>
             </a:r>
           </a:p>
         </p:txBody>
@@ -17650,7 +17863,7 @@
                 <a:ea typeface="Cambria"/>
                 <a:cs typeface="Cambria"/>
               </a:rPr>
-              <a:t>96.3%</a:t>
+              <a:t>−45.9%</a:t>
             </a:r>
           </a:p>
         </p:txBody>
@@ -17698,7 +17911,7 @@
                 <a:ea typeface="Calibri"/>
                 <a:cs typeface="Calibri"/>
               </a:rPr>
-              <a:t>provenance candidate recall across 5,746 dependency slots — but only 80.7% resolve uniquely</a:t>
+              <a:t>model calls on BIRD, a public text-to-SQL benchmark: 26 of 31 databases compiled</a:t>
             </a:r>
           </a:p>
         </p:txBody>
@@ -17790,7 +18003,7 @@
                 <a:ea typeface="Cambria"/>
                 <a:cs typeface="Cambria"/>
               </a:rPr>
-              <a:t>+123%</a:t>
+              <a:t>0 / 132</a:t>
             </a:r>
           </a:p>
         </p:txBody>
@@ -17838,7 +18051,7 @@
                 <a:ea typeface="Calibri"/>
                 <a:cs typeface="Calibri"/>
               </a:rPr>
-              <a:t>cost on a −16.8% token saving: prompt-cache economics, not token count, decides the invoice</a:t>
+              <a:t>end-to-end misses on fresh post-cutoff pull requests: error rate below 2% at 90% confidence</a:t>
             </a:r>
           </a:p>
         </p:txBody>
@@ -17934,7 +18147,7 @@
                 <a:ea typeface="Calibri"/>
                 <a:cs typeface="Calibri"/>
               </a:rPr>
-              <a:t>The efficiency win is real but narrow: partial GRC removes model turns, not source reads.</a:t>
+              <a:t>The win replicates: two-thirds fewer model calls on GitHub, about half on 26 BIRD databases and two model families.</a:t>
             </a:r>
           </a:p>
           <a:p xmlns:a="http://schemas.openxmlformats.org/drawingml/2006/main">
@@ -17956,7 +18169,7 @@
                 <a:ea typeface="Calibri"/>
                 <a:cs typeface="Calibri"/>
               </a:rPr>
-              <a:t>Manual composition beats partial GRC; when both execute before request one, manual and GCS tie structurally at 6/6 exact quality.</a:t>
+              <a:t>GAC refuses where evidence is thin (NESTFUL) or the opening is a per-question choice (BIRD's standard agent; Claude Sonnet).</a:t>
             </a:r>
           </a:p>
           <a:p xmlns:a="http://schemas.openxmlformats.org/drawingml/2006/main">
@@ -17978,7 +18191,7 @@
                 <a:ea typeface="Calibri"/>
                 <a:cs typeface="Calibri"/>
               </a:rPr>
-              <a:t>Bounded official GEPA retains its seed. The contribution is guarded automatic specialization—not runtime dominance.</a:t>
+              <a:t>Limits: certificates mostly confirm sample size; savings hold within one snapshot; checks prevented no wrong answer under drift.</a:t>
             </a:r>
           </a:p>
         </p:txBody>
@@ -19439,7 +19652,7 @@
                 <a:ea typeface="Calibri"/>
                 <a:cs typeface="Calibri"/>
               </a:rPr>
-              <a:t>21</a:t>
+              <a:t>24</a:t>
             </a:r>
           </a:p>
         </p:txBody>
@@ -20141,7 +20354,7 @@
                 <a:ea typeface="Calibri"/>
                 <a:cs typeface="Calibri"/>
               </a:rPr>
-              <a:t>22</a:t>
+              <a:t>25</a:t>
             </a:r>
           </a:p>
         </p:txBody>
@@ -22408,7 +22621,7 @@
                 <a:ea typeface="Calibri"/>
                 <a:cs typeface="Calibri"/>
               </a:rPr>
-              <a:t>23</a:t>
+              <a:t>26</a:t>
             </a:r>
           </a:p>
         </p:txBody>
@@ -24653,7 +24866,7 @@
                 <a:ea typeface="Calibri"/>
                 <a:cs typeface="Calibri"/>
               </a:rPr>
-              <a:t>24</a:t>
+              <a:t>27</a:t>
             </a:r>
           </a:p>
         </p:txBody>
@@ -25789,7 +26002,7 @@
                 <a:ea typeface="Calibri"/>
                 <a:cs typeface="Calibri"/>
               </a:rPr>
-              <a:t>25</a:t>
+              <a:t>28</a:t>
             </a:r>
           </a:p>
         </p:txBody>
@@ -26105,7 +26318,7 @@
                 <a:ea typeface="Calibri"/>
                 <a:cs typeface="Calibri"/>
               </a:rPr>
-              <a:t>On the sealed artifact every threshold below 0.14 admits nothing and above it admits all 92, zero violations throughout. A pre-registered study since ran a support-only comparator (alpha=1, otherwise identical) on four repositories, 240 held-out pairs, and found the same all-or-none threshold everywhere: confirmed, not resolved, and still not a risk-coverage frontier.</a:t>
+              <a:t>Every threshold below 0.14 admits nothing and every one above admits all 92, with zero violations. A pre-registered support-only comparator on four repositories and 240 held-out pairs found the same all-or-none step: still not a risk–coverage frontier.</a:t>
             </a:r>
           </a:p>
         </p:txBody>
@@ -26961,7 +27174,7 @@
                 <a:ea typeface="Cambria"/>
                 <a:cs typeface="Cambria"/>
               </a:rPr>
-              <a:t>Latency is partly confounded</a:t>
+              <a:t>Guards showed no measured protection</a:t>
             </a:r>
           </a:p>
         </p:txBody>
@@ -27009,7 +27222,7 @@
                 <a:ea typeface="Calibri"/>
                 <a:cs typeface="Calibri"/>
               </a:rPr>
-              <a:t>The fixed-prefix harness ran the whole baseline batch before the whole compiled batch. Request-count reduction is structural and unaffected, but the −85.0% wall-latency figure should be read as an observation under that ordering.</a:t>
+              <a:t>Under tool-layer corruption both arms answered wrongly on 39 of 60 records: an emptied list lies inside the learned hull, so the verifier prevented no silent wrong answer. Two provider-free drift studies were null by construction.</a:t>
             </a:r>
           </a:p>
         </p:txBody>
@@ -27152,7 +27365,7 @@
                 <a:ea typeface="Calibri"/>
                 <a:cs typeface="Calibri"/>
               </a:rPr>
-              <a:t>No perturbation challenge ran on the primary live artifact</a:t>
+              <a:t>Certificates confirm sample size, not risk</a:t>
             </a:r>
           </a:p>
           <a:p xmlns:a="http://schemas.openxmlformats.org/drawingml/2006/main">
@@ -27240,7 +27453,7 @@
                 <a:ea typeface="Calibri"/>
                 <a:cs typeface="Calibri"/>
               </a:rPr>
-              <a:t>Break-even 181–411 episodes; part of the cost range is cache warmth</a:t>
+              <a:t>Break-even 181–411 episodes per snapshot</a:t>
             </a:r>
           </a:p>
         </p:txBody>
@@ -27359,7 +27572,7 @@
                 <a:ea typeface="Calibri"/>
                 <a:cs typeface="Calibri"/>
               </a:rPr>
-              <a:t>26</a:t>
+              <a:t>29</a:t>
             </a:r>
           </a:p>
         </p:txBody>
@@ -28299,6 +28512,4032 @@
     <p:extLst>
       <p:ext uri="{BB962C8B-B14F-4D97-AF65-F5344CB8AC3E}">
         <p14:creationId xmlns:p14="http://schemas.microsoft.com/office/powerpoint/2010/main" val="1289244142"/>
+      </p:ext>
+    </p:extLst>
+  </p:cSld>
+</p:sld>
+</file>
+
+<file path=ppt/slides/slide27.xml><?xml version="1.0" encoding="utf-8"?>
+<p:sld xmlns:p="http://schemas.openxmlformats.org/presentationml/2006/main">
+  <p:cSld>
+    <p:bg>
+      <p:bgPr>
+        <a:solidFill xmlns:a="http://schemas.openxmlformats.org/drawingml/2006/main">
+          <a:srgbClr val="FFFFFF"/>
+        </a:solidFill>
+      </p:bgPr>
+    </p:bg>
+    <p:spTree>
+      <p:nvGrpSpPr>
+        <p:cNvPr id="1" name=""/>
+        <p:cNvGrpSpPr/>
+        <p:nvPr/>
+      </p:nvGrpSpPr>
+      <p:grpSpPr>
+        <a:xfrm xmlns:a="http://schemas.openxmlformats.org/drawingml/2006/main"/>
+      </p:grpSpPr>
+      <p:sp>
+        <p:nvSpPr>
+          <p:cNvPr id="2" name="Text 0">
+            <a:extLst xmlns:a="http://schemas.openxmlformats.org/drawingml/2006/main">
+              <a:ext uri="{FF2B5EF4-FFF2-40B4-BE49-F238E27FC236}">
+                <a16:creationId xmlns:a16="http://schemas.microsoft.com/office/drawing/2014/main" id="{AE47B6A8-C54A-48F2-AF52-BB28FB3E879F}"/>
+              </a:ext>
+            </a:extLst>
+          </p:cNvPr>
+          <p:cNvSpPr>
+            <a:spLocks xmlns:a="http://schemas.openxmlformats.org/drawingml/2006/main" noGrp="1"/>
+          </p:cNvSpPr>
+          <p:nvPr/>
+        </p:nvSpPr>
+        <p:spPr>
+          <a:xfrm xmlns:a="http://schemas.openxmlformats.org/drawingml/2006/main">
+            <a:off x="640080" y="6345936"/>
+            <a:ext cx="5486400" cy="256032"/>
+          </a:xfrm>
+          <a:prstGeom xmlns:a="http://schemas.openxmlformats.org/drawingml/2006/main" prst="rect">
+            <a:avLst/>
+          </a:prstGeom>
+          <a:noFill xmlns:a="http://schemas.openxmlformats.org/drawingml/2006/main"/>
+        </p:spPr>
+        <p:txBody>
+          <a:bodyPr xmlns:a="http://schemas.openxmlformats.org/drawingml/2006/main" wrap="square" lIns="0" tIns="0" rIns="0" bIns="0" anchor="t"/>
+          <a:lstStyle xmlns:a="http://schemas.openxmlformats.org/drawingml/2006/main"/>
+          <a:p xmlns:a="http://schemas.openxmlformats.org/drawingml/2006/main">
+            <a:pPr marL="0" indent="0">
+              <a:buNone/>
+            </a:pPr>
+            <a:r>
+              <a:rPr sz="900" spc="100">
+                <a:solidFill>
+                  <a:srgbClr val="A3B2C4"/>
+                </a:solidFill>
+                <a:latin typeface="Calibri"/>
+                <a:ea typeface="Calibri"/>
+                <a:cs typeface="Calibri"/>
+              </a:rPr>
+              <a:t>Guarded Agentic Compaction</a:t>
+            </a:r>
+          </a:p>
+        </p:txBody>
+      </p:sp>
+      <p:sp>
+        <p:nvSpPr>
+          <p:cNvPr id="3" name="Text 1">
+            <a:extLst xmlns:a="http://schemas.openxmlformats.org/drawingml/2006/main">
+              <a:ext uri="{FF2B5EF4-FFF2-40B4-BE49-F238E27FC236}">
+                <a16:creationId xmlns:a16="http://schemas.microsoft.com/office/drawing/2014/main" id="{F33FCA74-061A-4D5D-AE36-35CFBE430BE6}"/>
+              </a:ext>
+            </a:extLst>
+          </p:cNvPr>
+          <p:cNvSpPr>
+            <a:spLocks xmlns:a="http://schemas.openxmlformats.org/drawingml/2006/main" noGrp="1"/>
+          </p:cNvSpPr>
+          <p:nvPr/>
+        </p:nvSpPr>
+        <p:spPr>
+          <a:xfrm xmlns:a="http://schemas.openxmlformats.org/drawingml/2006/main">
+            <a:off x="10637215" y="6345936"/>
+            <a:ext cx="914400" cy="256032"/>
+          </a:xfrm>
+          <a:prstGeom xmlns:a="http://schemas.openxmlformats.org/drawingml/2006/main" prst="rect">
+            <a:avLst/>
+          </a:prstGeom>
+          <a:noFill xmlns:a="http://schemas.openxmlformats.org/drawingml/2006/main"/>
+        </p:spPr>
+        <p:txBody>
+          <a:bodyPr xmlns:a="http://schemas.openxmlformats.org/drawingml/2006/main" wrap="square" lIns="0" tIns="0" rIns="0" bIns="0" anchor="t"/>
+          <a:lstStyle xmlns:a="http://schemas.openxmlformats.org/drawingml/2006/main"/>
+          <a:p xmlns:a="http://schemas.openxmlformats.org/drawingml/2006/main">
+            <a:pPr marL="0" indent="0" algn="r">
+              <a:buNone/>
+            </a:pPr>
+            <a:r>
+              <a:rPr sz="900">
+                <a:solidFill>
+                  <a:srgbClr val="A3B2C4"/>
+                </a:solidFill>
+                <a:latin typeface="Calibri"/>
+                <a:ea typeface="Calibri"/>
+                <a:cs typeface="Calibri"/>
+              </a:rPr>
+              <a:t>21</a:t>
+            </a:r>
+          </a:p>
+        </p:txBody>
+      </p:sp>
+      <p:sp>
+        <p:nvSpPr>
+          <p:cNvPr id="4" name="Text 2">
+            <a:extLst xmlns:a="http://schemas.openxmlformats.org/drawingml/2006/main">
+              <a:ext uri="{FF2B5EF4-FFF2-40B4-BE49-F238E27FC236}">
+                <a16:creationId xmlns:a16="http://schemas.microsoft.com/office/drawing/2014/main" id="{6AC227C5-2480-4274-800D-B03E803DBC12}"/>
+              </a:ext>
+            </a:extLst>
+          </p:cNvPr>
+          <p:cNvSpPr>
+            <a:spLocks xmlns:a="http://schemas.openxmlformats.org/drawingml/2006/main" noGrp="1"/>
+          </p:cNvSpPr>
+          <p:nvPr/>
+        </p:nvSpPr>
+        <p:spPr>
+          <a:xfrm xmlns:a="http://schemas.openxmlformats.org/drawingml/2006/main">
+            <a:off x="640080" y="384048"/>
+            <a:ext cx="10911535" cy="237744"/>
+          </a:xfrm>
+          <a:prstGeom xmlns:a="http://schemas.openxmlformats.org/drawingml/2006/main" prst="rect">
+            <a:avLst/>
+          </a:prstGeom>
+          <a:noFill xmlns:a="http://schemas.openxmlformats.org/drawingml/2006/main"/>
+        </p:spPr>
+        <p:txBody>
+          <a:bodyPr xmlns:a="http://schemas.openxmlformats.org/drawingml/2006/main" wrap="square" lIns="0" tIns="0" rIns="0" bIns="0" anchor="t"/>
+          <a:lstStyle xmlns:a="http://schemas.openxmlformats.org/drawingml/2006/main"/>
+          <a:p xmlns:a="http://schemas.openxmlformats.org/drawingml/2006/main">
+            <a:pPr marL="0" indent="0">
+              <a:buNone/>
+            </a:pPr>
+            <a:r>
+              <a:rPr sz="1050" b="1" spc="180">
+                <a:solidFill>
+                  <a:srgbClr val="1F8A99"/>
+                </a:solidFill>
+                <a:latin typeface="Calibri"/>
+                <a:ea typeface="Calibri"/>
+                <a:cs typeface="Calibri"/>
+              </a:rPr>
+              <a:t>RESULTS  ·  PUBLIC BENCHMARK  ·  BIRD TEXT-TO-SQL  ·  LIVE AGENT</a:t>
+            </a:r>
+          </a:p>
+        </p:txBody>
+      </p:sp>
+      <p:sp>
+        <p:nvSpPr>
+          <p:cNvPr id="5" name="Text 3">
+            <a:extLst xmlns:a="http://schemas.openxmlformats.org/drawingml/2006/main">
+              <a:ext uri="{FF2B5EF4-FFF2-40B4-BE49-F238E27FC236}">
+                <a16:creationId xmlns:a16="http://schemas.microsoft.com/office/drawing/2014/main" id="{BFAD9DD3-AA36-4893-A274-2A83980B4360}"/>
+              </a:ext>
+            </a:extLst>
+          </p:cNvPr>
+          <p:cNvSpPr>
+            <a:spLocks xmlns:a="http://schemas.openxmlformats.org/drawingml/2006/main" noGrp="1"/>
+          </p:cNvSpPr>
+          <p:nvPr/>
+        </p:nvSpPr>
+        <p:spPr>
+          <a:xfrm xmlns:a="http://schemas.openxmlformats.org/drawingml/2006/main">
+            <a:off x="640080" y="658368"/>
+            <a:ext cx="10911535" cy="502920"/>
+          </a:xfrm>
+          <a:prstGeom xmlns:a="http://schemas.openxmlformats.org/drawingml/2006/main" prst="rect">
+            <a:avLst/>
+          </a:prstGeom>
+          <a:noFill xmlns:a="http://schemas.openxmlformats.org/drawingml/2006/main"/>
+        </p:spPr>
+        <p:txBody>
+          <a:bodyPr xmlns:a="http://schemas.openxmlformats.org/drawingml/2006/main" wrap="square" lIns="0" tIns="0" rIns="0" bIns="0" anchor="t"/>
+          <a:lstStyle xmlns:a="http://schemas.openxmlformats.org/drawingml/2006/main"/>
+          <a:p xmlns:a="http://schemas.openxmlformats.org/drawingml/2006/main">
+            <a:pPr marL="0" indent="0">
+              <a:buNone/>
+            </a:pPr>
+            <a:r>
+              <a:rPr sz="2600" b="1">
+                <a:solidFill>
+                  <a:srgbClr val="0E1E3A"/>
+                </a:solidFill>
+                <a:latin typeface="Cambria"/>
+                <a:ea typeface="Cambria"/>
+                <a:cs typeface="Cambria"/>
+              </a:rPr>
+              <a:t>A public benchmark where GAC helps</a:t>
+            </a:r>
+          </a:p>
+        </p:txBody>
+      </p:sp>
+      <p:sp>
+        <p:nvSpPr>
+          <p:cNvPr id="6" name="Shape 4">
+            <a:extLst xmlns:a="http://schemas.openxmlformats.org/drawingml/2006/main">
+              <a:ext uri="{FF2B5EF4-FFF2-40B4-BE49-F238E27FC236}">
+                <a16:creationId xmlns:a16="http://schemas.microsoft.com/office/drawing/2014/main" id="{A7CCC68F-BA39-4940-B211-3362266BF39F}"/>
+              </a:ext>
+            </a:extLst>
+          </p:cNvPr>
+          <p:cNvSpPr>
+            <a:spLocks xmlns:a="http://schemas.openxmlformats.org/drawingml/2006/main" noGrp="1"/>
+          </p:cNvSpPr>
+          <p:nvPr/>
+        </p:nvSpPr>
+        <p:spPr>
+          <a:xfrm xmlns:a="http://schemas.openxmlformats.org/drawingml/2006/main">
+            <a:off x="640080" y="1389888"/>
+            <a:ext cx="5272888" cy="3200400"/>
+          </a:xfrm>
+          <a:prstGeom xmlns:a="http://schemas.openxmlformats.org/drawingml/2006/main" prst="roundRect">
+            <a:avLst>
+              <a:gd name="adj" fmla="val 1429"/>
+            </a:avLst>
+          </a:prstGeom>
+          <a:solidFill xmlns:a="http://schemas.openxmlformats.org/drawingml/2006/main">
+            <a:srgbClr val="F5F9FC"/>
+          </a:solidFill>
+          <a:ln xmlns:a="http://schemas.openxmlformats.org/drawingml/2006/main" w="9525">
+            <a:solidFill>
+              <a:srgbClr val="D5E0EB"/>
+            </a:solidFill>
+            <a:prstDash val="solid"/>
+          </a:ln>
+          <a:effectLst xmlns:a="http://schemas.openxmlformats.org/drawingml/2006/main">
+            <a:outerShdw blurRad="114300" dist="17780" dir="5400000" algn="bl" rotWithShape="0">
+              <a:srgbClr val="94A6BC">
+                <a:alpha val="16000"/>
+              </a:srgbClr>
+            </a:outerShdw>
+          </a:effectLst>
+        </p:spPr>
+        <p:txBody>
+          <a:bodyPr xmlns:a="http://schemas.openxmlformats.org/drawingml/2006/main"/>
+          <a:lstStyle xmlns:a="http://schemas.openxmlformats.org/drawingml/2006/main"/>
+          <a:p xmlns:a="http://schemas.openxmlformats.org/drawingml/2006/main"/>
+        </p:txBody>
+      </p:sp>
+      <p:sp>
+        <p:nvSpPr>
+          <p:cNvPr id="7" name="Text 5">
+            <a:extLst xmlns:a="http://schemas.openxmlformats.org/drawingml/2006/main">
+              <a:ext uri="{FF2B5EF4-FFF2-40B4-BE49-F238E27FC236}">
+                <a16:creationId xmlns:a16="http://schemas.microsoft.com/office/drawing/2014/main" id="{2FE5721D-EB4D-4AB2-AA8C-0C3F4706131C}"/>
+              </a:ext>
+            </a:extLst>
+          </p:cNvPr>
+          <p:cNvSpPr>
+            <a:spLocks xmlns:a="http://schemas.openxmlformats.org/drawingml/2006/main" noGrp="1"/>
+          </p:cNvSpPr>
+          <p:nvPr/>
+        </p:nvSpPr>
+        <p:spPr>
+          <a:xfrm xmlns:a="http://schemas.openxmlformats.org/drawingml/2006/main">
+            <a:off x="932688" y="1572768"/>
+            <a:ext cx="4687672" cy="365760"/>
+          </a:xfrm>
+          <a:prstGeom xmlns:a="http://schemas.openxmlformats.org/drawingml/2006/main" prst="rect">
+            <a:avLst/>
+          </a:prstGeom>
+          <a:noFill xmlns:a="http://schemas.openxmlformats.org/drawingml/2006/main"/>
+        </p:spPr>
+        <p:txBody>
+          <a:bodyPr xmlns:a="http://schemas.openxmlformats.org/drawingml/2006/main" wrap="square" lIns="0" tIns="0" rIns="0" bIns="0" anchor="ctr"/>
+          <a:lstStyle xmlns:a="http://schemas.openxmlformats.org/drawingml/2006/main"/>
+          <a:p xmlns:a="http://schemas.openxmlformats.org/drawingml/2006/main">
+            <a:pPr marL="0" indent="0">
+              <a:buNone/>
+            </a:pPr>
+            <a:r>
+              <a:rPr sz="1800" b="1">
+                <a:solidFill>
+                  <a:srgbClr val="0E1E3A"/>
+                </a:solidFill>
+                <a:latin typeface="Cambria"/>
+                <a:ea typeface="Cambria"/>
+                <a:cs typeface="Cambria"/>
+              </a:rPr>
+              <a:t>Schema-first agent</a:t>
+            </a:r>
+          </a:p>
+        </p:txBody>
+      </p:sp>
+      <p:sp>
+        <p:nvSpPr>
+          <p:cNvPr id="8" name="Text 6">
+            <a:extLst xmlns:a="http://schemas.openxmlformats.org/drawingml/2006/main">
+              <a:ext uri="{FF2B5EF4-FFF2-40B4-BE49-F238E27FC236}">
+                <a16:creationId xmlns:a16="http://schemas.microsoft.com/office/drawing/2014/main" id="{5A1F2CE0-A89F-4754-B59D-A9B10798FDED}"/>
+              </a:ext>
+            </a:extLst>
+          </p:cNvPr>
+          <p:cNvSpPr>
+            <a:spLocks xmlns:a="http://schemas.openxmlformats.org/drawingml/2006/main" noGrp="1"/>
+          </p:cNvSpPr>
+          <p:nvPr/>
+        </p:nvSpPr>
+        <p:spPr>
+          <a:xfrm xmlns:a="http://schemas.openxmlformats.org/drawingml/2006/main">
+            <a:off x="932688" y="1938528"/>
+            <a:ext cx="4687672" cy="256032"/>
+          </a:xfrm>
+          <a:prstGeom xmlns:a="http://schemas.openxmlformats.org/drawingml/2006/main" prst="rect">
+            <a:avLst/>
+          </a:prstGeom>
+          <a:noFill xmlns:a="http://schemas.openxmlformats.org/drawingml/2006/main"/>
+        </p:spPr>
+        <p:txBody>
+          <a:bodyPr xmlns:a="http://schemas.openxmlformats.org/drawingml/2006/main" wrap="square" lIns="0" tIns="0" rIns="0" bIns="0" anchor="ctr"/>
+          <a:lstStyle xmlns:a="http://schemas.openxmlformats.org/drawingml/2006/main"/>
+          <a:p xmlns:a="http://schemas.openxmlformats.org/drawingml/2006/main">
+            <a:pPr marL="0" indent="0">
+              <a:buNone/>
+            </a:pPr>
+            <a:r>
+              <a:rPr sz="1100" i="1">
+                <a:solidFill>
+                  <a:srgbClr val="5A6B84"/>
+                </a:solidFill>
+                <a:latin typeface="Calibri"/>
+                <a:ea typeface="Calibri"/>
+                <a:cs typeface="Calibri"/>
+              </a:rPr>
+              <a:t>reads every table first  ·  26 of 31 databases</a:t>
+            </a:r>
+          </a:p>
+        </p:txBody>
+      </p:sp>
+      <p:sp>
+        <p:nvSpPr>
+          <p:cNvPr id="9" name="Text 7">
+            <a:extLst xmlns:a="http://schemas.openxmlformats.org/drawingml/2006/main">
+              <a:ext uri="{FF2B5EF4-FFF2-40B4-BE49-F238E27FC236}">
+                <a16:creationId xmlns:a16="http://schemas.microsoft.com/office/drawing/2014/main" id="{AF2C8D84-5695-4D5C-AFFC-BD4171D5FEDD}"/>
+              </a:ext>
+            </a:extLst>
+          </p:cNvPr>
+          <p:cNvSpPr>
+            <a:spLocks xmlns:a="http://schemas.openxmlformats.org/drawingml/2006/main" noGrp="1"/>
+          </p:cNvSpPr>
+          <p:nvPr/>
+        </p:nvSpPr>
+        <p:spPr>
+          <a:xfrm xmlns:a="http://schemas.openxmlformats.org/drawingml/2006/main">
+            <a:off x="932688" y="2304288"/>
+            <a:ext cx="1463040" cy="347472"/>
+          </a:xfrm>
+          <a:prstGeom xmlns:a="http://schemas.openxmlformats.org/drawingml/2006/main" prst="rect">
+            <a:avLst/>
+          </a:prstGeom>
+          <a:noFill xmlns:a="http://schemas.openxmlformats.org/drawingml/2006/main"/>
+        </p:spPr>
+        <p:txBody>
+          <a:bodyPr xmlns:a="http://schemas.openxmlformats.org/drawingml/2006/main" wrap="square" lIns="0" tIns="0" rIns="0" bIns="0" anchor="ctr"/>
+          <a:lstStyle xmlns:a="http://schemas.openxmlformats.org/drawingml/2006/main"/>
+          <a:p xmlns:a="http://schemas.openxmlformats.org/drawingml/2006/main">
+            <a:pPr marL="0" indent="0">
+              <a:buNone/>
+            </a:pPr>
+            <a:r>
+              <a:rPr sz="1700" b="1">
+                <a:solidFill>
+                  <a:srgbClr val="0E1E3A"/>
+                </a:solidFill>
+                <a:latin typeface="Cambria"/>
+                <a:ea typeface="Cambria"/>
+                <a:cs typeface="Cambria"/>
+              </a:rPr>
+              <a:t>−45.9%</a:t>
+            </a:r>
+          </a:p>
+        </p:txBody>
+      </p:sp>
+      <p:sp>
+        <p:nvSpPr>
+          <p:cNvPr id="10" name="Text 8">
+            <a:extLst xmlns:a="http://schemas.openxmlformats.org/drawingml/2006/main">
+              <a:ext uri="{FF2B5EF4-FFF2-40B4-BE49-F238E27FC236}">
+                <a16:creationId xmlns:a16="http://schemas.microsoft.com/office/drawing/2014/main" id="{B16CBFF6-53C2-4D61-ACF3-CCE7B768A217}"/>
+              </a:ext>
+            </a:extLst>
+          </p:cNvPr>
+          <p:cNvSpPr>
+            <a:spLocks xmlns:a="http://schemas.openxmlformats.org/drawingml/2006/main" noGrp="1"/>
+          </p:cNvSpPr>
+          <p:nvPr/>
+        </p:nvSpPr>
+        <p:spPr>
+          <a:xfrm xmlns:a="http://schemas.openxmlformats.org/drawingml/2006/main">
+            <a:off x="2514600" y="2304288"/>
+            <a:ext cx="3078328" cy="347472"/>
+          </a:xfrm>
+          <a:prstGeom xmlns:a="http://schemas.openxmlformats.org/drawingml/2006/main" prst="rect">
+            <a:avLst/>
+          </a:prstGeom>
+          <a:noFill xmlns:a="http://schemas.openxmlformats.org/drawingml/2006/main"/>
+        </p:spPr>
+        <p:txBody>
+          <a:bodyPr xmlns:a="http://schemas.openxmlformats.org/drawingml/2006/main" wrap="square" lIns="0" tIns="0" rIns="0" bIns="0" anchor="ctr"/>
+          <a:lstStyle xmlns:a="http://schemas.openxmlformats.org/drawingml/2006/main"/>
+          <a:p xmlns:a="http://schemas.openxmlformats.org/drawingml/2006/main">
+            <a:pPr marL="0" indent="0">
+              <a:buNone/>
+            </a:pPr>
+            <a:r>
+              <a:rPr sz="1150">
+                <a:solidFill>
+                  <a:srgbClr val="24354F"/>
+                </a:solidFill>
+                <a:latin typeface="Calibri"/>
+                <a:ea typeface="Calibri"/>
+                <a:cs typeface="Calibri"/>
+              </a:rPr>
+              <a:t>provider requests, 625 held-out questions</a:t>
+            </a:r>
+          </a:p>
+        </p:txBody>
+      </p:sp>
+      <p:sp>
+        <p:nvSpPr>
+          <p:cNvPr id="11" name="Text 9">
+            <a:extLst xmlns:a="http://schemas.openxmlformats.org/drawingml/2006/main">
+              <a:ext uri="{FF2B5EF4-FFF2-40B4-BE49-F238E27FC236}">
+                <a16:creationId xmlns:a16="http://schemas.microsoft.com/office/drawing/2014/main" id="{AF2B94A8-A190-4DBE-89F0-EE106BFD200D}"/>
+              </a:ext>
+            </a:extLst>
+          </p:cNvPr>
+          <p:cNvSpPr>
+            <a:spLocks xmlns:a="http://schemas.openxmlformats.org/drawingml/2006/main" noGrp="1"/>
+          </p:cNvSpPr>
+          <p:nvPr/>
+        </p:nvSpPr>
+        <p:spPr>
+          <a:xfrm xmlns:a="http://schemas.openxmlformats.org/drawingml/2006/main">
+            <a:off x="932688" y="2761488"/>
+            <a:ext cx="1463040" cy="347472"/>
+          </a:xfrm>
+          <a:prstGeom xmlns:a="http://schemas.openxmlformats.org/drawingml/2006/main" prst="rect">
+            <a:avLst/>
+          </a:prstGeom>
+          <a:noFill xmlns:a="http://schemas.openxmlformats.org/drawingml/2006/main"/>
+        </p:spPr>
+        <p:txBody>
+          <a:bodyPr xmlns:a="http://schemas.openxmlformats.org/drawingml/2006/main" wrap="square" lIns="0" tIns="0" rIns="0" bIns="0" anchor="ctr"/>
+          <a:lstStyle xmlns:a="http://schemas.openxmlformats.org/drawingml/2006/main"/>
+          <a:p xmlns:a="http://schemas.openxmlformats.org/drawingml/2006/main">
+            <a:pPr marL="0" indent="0">
+              <a:buNone/>
+            </a:pPr>
+            <a:r>
+              <a:rPr sz="1700" b="1">
+                <a:solidFill>
+                  <a:srgbClr val="0E1E3A"/>
+                </a:solidFill>
+                <a:latin typeface="Cambria"/>
+                <a:ea typeface="Cambria"/>
+                <a:cs typeface="Cambria"/>
+              </a:rPr>
+              <a:t>−18.1%</a:t>
+            </a:r>
+          </a:p>
+        </p:txBody>
+      </p:sp>
+      <p:sp>
+        <p:nvSpPr>
+          <p:cNvPr id="12" name="Text 10">
+            <a:extLst xmlns:a="http://schemas.openxmlformats.org/drawingml/2006/main">
+              <a:ext uri="{FF2B5EF4-FFF2-40B4-BE49-F238E27FC236}">
+                <a16:creationId xmlns:a16="http://schemas.microsoft.com/office/drawing/2014/main" id="{0B82FCCC-13A3-4FE1-A986-C83EBE50D60D}"/>
+              </a:ext>
+            </a:extLst>
+          </p:cNvPr>
+          <p:cNvSpPr>
+            <a:spLocks xmlns:a="http://schemas.openxmlformats.org/drawingml/2006/main" noGrp="1"/>
+          </p:cNvSpPr>
+          <p:nvPr/>
+        </p:nvSpPr>
+        <p:spPr>
+          <a:xfrm xmlns:a="http://schemas.openxmlformats.org/drawingml/2006/main">
+            <a:off x="2514600" y="2761488"/>
+            <a:ext cx="3078328" cy="347472"/>
+          </a:xfrm>
+          <a:prstGeom xmlns:a="http://schemas.openxmlformats.org/drawingml/2006/main" prst="rect">
+            <a:avLst/>
+          </a:prstGeom>
+          <a:noFill xmlns:a="http://schemas.openxmlformats.org/drawingml/2006/main"/>
+        </p:spPr>
+        <p:txBody>
+          <a:bodyPr xmlns:a="http://schemas.openxmlformats.org/drawingml/2006/main" wrap="square" lIns="0" tIns="0" rIns="0" bIns="0" anchor="ctr"/>
+          <a:lstStyle xmlns:a="http://schemas.openxmlformats.org/drawingml/2006/main"/>
+          <a:p xmlns:a="http://schemas.openxmlformats.org/drawingml/2006/main">
+            <a:pPr marL="0" indent="0">
+              <a:buNone/>
+            </a:pPr>
+            <a:r>
+              <a:rPr sz="1150">
+                <a:solidFill>
+                  <a:srgbClr val="24354F"/>
+                </a:solidFill>
+                <a:latin typeface="Calibri"/>
+                <a:ea typeface="Calibri"/>
+                <a:cs typeface="Calibri"/>
+              </a:rPr>
+              <a:t>estimated cost (−14.0% at uncached prices)</a:t>
+            </a:r>
+          </a:p>
+        </p:txBody>
+      </p:sp>
+      <p:sp>
+        <p:nvSpPr>
+          <p:cNvPr id="13" name="Text 11">
+            <a:extLst xmlns:a="http://schemas.openxmlformats.org/drawingml/2006/main">
+              <a:ext uri="{FF2B5EF4-FFF2-40B4-BE49-F238E27FC236}">
+                <a16:creationId xmlns:a16="http://schemas.microsoft.com/office/drawing/2014/main" id="{3FD487E9-93C8-43BC-900B-736E2AF1224C}"/>
+              </a:ext>
+            </a:extLst>
+          </p:cNvPr>
+          <p:cNvSpPr>
+            <a:spLocks xmlns:a="http://schemas.openxmlformats.org/drawingml/2006/main" noGrp="1"/>
+          </p:cNvSpPr>
+          <p:nvPr/>
+        </p:nvSpPr>
+        <p:spPr>
+          <a:xfrm xmlns:a="http://schemas.openxmlformats.org/drawingml/2006/main">
+            <a:off x="932688" y="3218688"/>
+            <a:ext cx="1463040" cy="347472"/>
+          </a:xfrm>
+          <a:prstGeom xmlns:a="http://schemas.openxmlformats.org/drawingml/2006/main" prst="rect">
+            <a:avLst/>
+          </a:prstGeom>
+          <a:noFill xmlns:a="http://schemas.openxmlformats.org/drawingml/2006/main"/>
+        </p:spPr>
+        <p:txBody>
+          <a:bodyPr xmlns:a="http://schemas.openxmlformats.org/drawingml/2006/main" wrap="square" lIns="0" tIns="0" rIns="0" bIns="0" anchor="ctr"/>
+          <a:lstStyle xmlns:a="http://schemas.openxmlformats.org/drawingml/2006/main"/>
+          <a:p xmlns:a="http://schemas.openxmlformats.org/drawingml/2006/main">
+            <a:pPr marL="0" indent="0">
+              <a:buNone/>
+            </a:pPr>
+            <a:r>
+              <a:rPr sz="1700" b="1">
+                <a:solidFill>
+                  <a:srgbClr val="0E1E3A"/>
+                </a:solidFill>
+                <a:latin typeface="Cambria"/>
+                <a:ea typeface="Cambria"/>
+                <a:cs typeface="Cambria"/>
+              </a:rPr>
+              <a:t>400 / 401</a:t>
+            </a:r>
+          </a:p>
+        </p:txBody>
+      </p:sp>
+      <p:sp>
+        <p:nvSpPr>
+          <p:cNvPr id="14" name="Text 12">
+            <a:extLst xmlns:a="http://schemas.openxmlformats.org/drawingml/2006/main">
+              <a:ext uri="{FF2B5EF4-FFF2-40B4-BE49-F238E27FC236}">
+                <a16:creationId xmlns:a16="http://schemas.microsoft.com/office/drawing/2014/main" id="{61CF3254-1B82-4165-992F-6D3C01344989}"/>
+              </a:ext>
+            </a:extLst>
+          </p:cNvPr>
+          <p:cNvSpPr>
+            <a:spLocks xmlns:a="http://schemas.openxmlformats.org/drawingml/2006/main" noGrp="1"/>
+          </p:cNvSpPr>
+          <p:nvPr/>
+        </p:nvSpPr>
+        <p:spPr>
+          <a:xfrm xmlns:a="http://schemas.openxmlformats.org/drawingml/2006/main">
+            <a:off x="2514600" y="3218688"/>
+            <a:ext cx="3078328" cy="347472"/>
+          </a:xfrm>
+          <a:prstGeom xmlns:a="http://schemas.openxmlformats.org/drawingml/2006/main" prst="rect">
+            <a:avLst/>
+          </a:prstGeom>
+          <a:noFill xmlns:a="http://schemas.openxmlformats.org/drawingml/2006/main"/>
+        </p:spPr>
+        <p:txBody>
+          <a:bodyPr xmlns:a="http://schemas.openxmlformats.org/drawingml/2006/main" wrap="square" lIns="0" tIns="0" rIns="0" bIns="0" anchor="ctr"/>
+          <a:lstStyle xmlns:a="http://schemas.openxmlformats.org/drawingml/2006/main"/>
+          <a:p xmlns:a="http://schemas.openxmlformats.org/drawingml/2006/main">
+            <a:pPr marL="0" indent="0">
+              <a:buNone/>
+            </a:pPr>
+            <a:r>
+              <a:rPr sz="1150">
+                <a:solidFill>
+                  <a:srgbClr val="24354F"/>
+                </a:solidFill>
+                <a:latin typeface="Calibri"/>
+                <a:ea typeface="Calibri"/>
+                <a:cs typeface="Calibri"/>
+              </a:rPr>
+              <a:t>correct, compiled vs. unchanged agent</a:t>
+            </a:r>
+          </a:p>
+        </p:txBody>
+      </p:sp>
+      <p:sp>
+        <p:nvSpPr>
+          <p:cNvPr id="15" name="Text 13">
+            <a:extLst xmlns:a="http://schemas.openxmlformats.org/drawingml/2006/main">
+              <a:ext uri="{FF2B5EF4-FFF2-40B4-BE49-F238E27FC236}">
+                <a16:creationId xmlns:a16="http://schemas.microsoft.com/office/drawing/2014/main" id="{4872DBF4-F948-4D75-A7BD-280E63BF11CE}"/>
+              </a:ext>
+            </a:extLst>
+          </p:cNvPr>
+          <p:cNvSpPr>
+            <a:spLocks xmlns:a="http://schemas.openxmlformats.org/drawingml/2006/main" noGrp="1"/>
+          </p:cNvSpPr>
+          <p:nvPr/>
+        </p:nvSpPr>
+        <p:spPr>
+          <a:xfrm xmlns:a="http://schemas.openxmlformats.org/drawingml/2006/main">
+            <a:off x="932688" y="3749040"/>
+            <a:ext cx="4687672" cy="694944"/>
+          </a:xfrm>
+          <a:prstGeom xmlns:a="http://schemas.openxmlformats.org/drawingml/2006/main" prst="rect">
+            <a:avLst/>
+          </a:prstGeom>
+          <a:noFill xmlns:a="http://schemas.openxmlformats.org/drawingml/2006/main"/>
+        </p:spPr>
+        <p:txBody>
+          <a:bodyPr xmlns:a="http://schemas.openxmlformats.org/drawingml/2006/main" wrap="square" lIns="0" tIns="0" rIns="0" bIns="0" anchor="t"/>
+          <a:lstStyle xmlns:a="http://schemas.openxmlformats.org/drawingml/2006/main"/>
+          <a:p xmlns:a="http://schemas.openxmlformats.org/drawingml/2006/main">
+            <a:pPr marL="0" indent="0">
+              <a:lnSpc>
+                <a:spcPct val="108000"/>
+              </a:lnSpc>
+              <a:buNone/>
+            </a:pPr>
+            <a:r>
+              <a:rPr sz="1100">
+                <a:solidFill>
+                  <a:srgbClr val="5A6B84"/>
+                </a:solidFill>
+                <a:latin typeface="Calibri"/>
+                <a:ea typeface="Calibri"/>
+                <a:cs typeface="Calibri"/>
+              </a:rPr>
+              <a:t>Every admitted database dispatched on every question. The result replicates on the five dev databases and on gpt-6-luna (−49.9% requests, 93 vs. 91 correct).</a:t>
+            </a:r>
+          </a:p>
+        </p:txBody>
+      </p:sp>
+      <p:sp>
+        <p:nvSpPr>
+          <p:cNvPr id="16" name="Shape 14">
+            <a:extLst xmlns:a="http://schemas.openxmlformats.org/drawingml/2006/main">
+              <a:ext uri="{FF2B5EF4-FFF2-40B4-BE49-F238E27FC236}">
+                <a16:creationId xmlns:a16="http://schemas.microsoft.com/office/drawing/2014/main" id="{7168808E-70C4-4CD6-B364-546247F83C60}"/>
+              </a:ext>
+            </a:extLst>
+          </p:cNvPr>
+          <p:cNvSpPr>
+            <a:spLocks xmlns:a="http://schemas.openxmlformats.org/drawingml/2006/main" noGrp="1"/>
+          </p:cNvSpPr>
+          <p:nvPr/>
+        </p:nvSpPr>
+        <p:spPr>
+          <a:xfrm xmlns:a="http://schemas.openxmlformats.org/drawingml/2006/main">
+            <a:off x="6278728" y="1389888"/>
+            <a:ext cx="5272888" cy="3200400"/>
+          </a:xfrm>
+          <a:prstGeom xmlns:a="http://schemas.openxmlformats.org/drawingml/2006/main" prst="roundRect">
+            <a:avLst>
+              <a:gd name="adj" fmla="val 1429"/>
+            </a:avLst>
+          </a:prstGeom>
+          <a:solidFill xmlns:a="http://schemas.openxmlformats.org/drawingml/2006/main">
+            <a:srgbClr val="FBF0EC"/>
+          </a:solidFill>
+          <a:ln xmlns:a="http://schemas.openxmlformats.org/drawingml/2006/main" w="9525">
+            <a:solidFill>
+              <a:srgbClr val="EFDCD4"/>
+            </a:solidFill>
+            <a:prstDash val="solid"/>
+          </a:ln>
+          <a:effectLst xmlns:a="http://schemas.openxmlformats.org/drawingml/2006/main">
+            <a:outerShdw blurRad="114300" dist="17780" dir="5400000" algn="bl" rotWithShape="0">
+              <a:srgbClr val="94A6BC">
+                <a:alpha val="16000"/>
+              </a:srgbClr>
+            </a:outerShdw>
+          </a:effectLst>
+        </p:spPr>
+        <p:txBody>
+          <a:bodyPr xmlns:a="http://schemas.openxmlformats.org/drawingml/2006/main"/>
+          <a:lstStyle xmlns:a="http://schemas.openxmlformats.org/drawingml/2006/main"/>
+          <a:p xmlns:a="http://schemas.openxmlformats.org/drawingml/2006/main"/>
+        </p:txBody>
+      </p:sp>
+      <p:sp>
+        <p:nvSpPr>
+          <p:cNvPr id="17" name="Text 15">
+            <a:extLst xmlns:a="http://schemas.openxmlformats.org/drawingml/2006/main">
+              <a:ext uri="{FF2B5EF4-FFF2-40B4-BE49-F238E27FC236}">
+                <a16:creationId xmlns:a16="http://schemas.microsoft.com/office/drawing/2014/main" id="{1468FAB4-453B-4906-BF82-D9AEFC510B4C}"/>
+              </a:ext>
+            </a:extLst>
+          </p:cNvPr>
+          <p:cNvSpPr>
+            <a:spLocks xmlns:a="http://schemas.openxmlformats.org/drawingml/2006/main" noGrp="1"/>
+          </p:cNvSpPr>
+          <p:nvPr/>
+        </p:nvSpPr>
+        <p:spPr>
+          <a:xfrm xmlns:a="http://schemas.openxmlformats.org/drawingml/2006/main">
+            <a:off x="6571336" y="1572768"/>
+            <a:ext cx="4687672" cy="365760"/>
+          </a:xfrm>
+          <a:prstGeom xmlns:a="http://schemas.openxmlformats.org/drawingml/2006/main" prst="rect">
+            <a:avLst/>
+          </a:prstGeom>
+          <a:noFill xmlns:a="http://schemas.openxmlformats.org/drawingml/2006/main"/>
+        </p:spPr>
+        <p:txBody>
+          <a:bodyPr xmlns:a="http://schemas.openxmlformats.org/drawingml/2006/main" wrap="square" lIns="0" tIns="0" rIns="0" bIns="0" anchor="ctr"/>
+          <a:lstStyle xmlns:a="http://schemas.openxmlformats.org/drawingml/2006/main"/>
+          <a:p xmlns:a="http://schemas.openxmlformats.org/drawingml/2006/main">
+            <a:pPr marL="0" indent="0">
+              <a:buNone/>
+            </a:pPr>
+            <a:r>
+              <a:rPr sz="1800" b="1">
+                <a:solidFill>
+                  <a:srgbClr val="A93B2B"/>
+                </a:solidFill>
+                <a:latin typeface="Cambria"/>
+                <a:ea typeface="Cambria"/>
+                <a:cs typeface="Cambria"/>
+              </a:rPr>
+              <a:t>Standard agent</a:t>
+            </a:r>
+          </a:p>
+        </p:txBody>
+      </p:sp>
+      <p:sp>
+        <p:nvSpPr>
+          <p:cNvPr id="18" name="Text 16">
+            <a:extLst xmlns:a="http://schemas.openxmlformats.org/drawingml/2006/main">
+              <a:ext uri="{FF2B5EF4-FFF2-40B4-BE49-F238E27FC236}">
+                <a16:creationId xmlns:a16="http://schemas.microsoft.com/office/drawing/2014/main" id="{805376D7-EBA9-41BB-B773-6D923BE40D43}"/>
+              </a:ext>
+            </a:extLst>
+          </p:cNvPr>
+          <p:cNvSpPr>
+            <a:spLocks xmlns:a="http://schemas.openxmlformats.org/drawingml/2006/main" noGrp="1"/>
+          </p:cNvSpPr>
+          <p:nvPr/>
+        </p:nvSpPr>
+        <p:spPr>
+          <a:xfrm xmlns:a="http://schemas.openxmlformats.org/drawingml/2006/main">
+            <a:off x="6571336" y="1938528"/>
+            <a:ext cx="4687672" cy="256032"/>
+          </a:xfrm>
+          <a:prstGeom xmlns:a="http://schemas.openxmlformats.org/drawingml/2006/main" prst="rect">
+            <a:avLst/>
+          </a:prstGeom>
+          <a:noFill xmlns:a="http://schemas.openxmlformats.org/drawingml/2006/main"/>
+        </p:spPr>
+        <p:txBody>
+          <a:bodyPr xmlns:a="http://schemas.openxmlformats.org/drawingml/2006/main" wrap="square" lIns="0" tIns="0" rIns="0" bIns="0" anchor="ctr"/>
+          <a:lstStyle xmlns:a="http://schemas.openxmlformats.org/drawingml/2006/main"/>
+          <a:p xmlns:a="http://schemas.openxmlformats.org/drawingml/2006/main">
+            <a:pPr marL="0" indent="0">
+              <a:buNone/>
+            </a:pPr>
+            <a:r>
+              <a:rPr sz="1100" i="1">
+                <a:solidFill>
+                  <a:srgbClr val="5A6B84"/>
+                </a:solidFill>
+                <a:latin typeface="Calibri"/>
+                <a:ea typeface="Calibri"/>
+                <a:cs typeface="Calibri"/>
+              </a:rPr>
+              <a:t>picks its tables for each question</a:t>
+            </a:r>
+          </a:p>
+        </p:txBody>
+      </p:sp>
+      <p:sp>
+        <p:nvSpPr>
+          <p:cNvPr id="19" name="Text 17">
+            <a:extLst xmlns:a="http://schemas.openxmlformats.org/drawingml/2006/main">
+              <a:ext uri="{FF2B5EF4-FFF2-40B4-BE49-F238E27FC236}">
+                <a16:creationId xmlns:a16="http://schemas.microsoft.com/office/drawing/2014/main" id="{FC761766-6B8C-450E-B680-91CDFB31C9B5}"/>
+              </a:ext>
+            </a:extLst>
+          </p:cNvPr>
+          <p:cNvSpPr>
+            <a:spLocks xmlns:a="http://schemas.openxmlformats.org/drawingml/2006/main" noGrp="1"/>
+          </p:cNvSpPr>
+          <p:nvPr/>
+        </p:nvSpPr>
+        <p:spPr>
+          <a:xfrm xmlns:a="http://schemas.openxmlformats.org/drawingml/2006/main">
+            <a:off x="6571336" y="2304288"/>
+            <a:ext cx="1463040" cy="347472"/>
+          </a:xfrm>
+          <a:prstGeom xmlns:a="http://schemas.openxmlformats.org/drawingml/2006/main" prst="rect">
+            <a:avLst/>
+          </a:prstGeom>
+          <a:noFill xmlns:a="http://schemas.openxmlformats.org/drawingml/2006/main"/>
+        </p:spPr>
+        <p:txBody>
+          <a:bodyPr xmlns:a="http://schemas.openxmlformats.org/drawingml/2006/main" wrap="square" lIns="0" tIns="0" rIns="0" bIns="0" anchor="ctr"/>
+          <a:lstStyle xmlns:a="http://schemas.openxmlformats.org/drawingml/2006/main"/>
+          <a:p xmlns:a="http://schemas.openxmlformats.org/drawingml/2006/main">
+            <a:pPr marL="0" indent="0">
+              <a:buNone/>
+            </a:pPr>
+            <a:r>
+              <a:rPr sz="1700" b="1">
+                <a:solidFill>
+                  <a:srgbClr val="A93B2B"/>
+                </a:solidFill>
+                <a:latin typeface="Cambria"/>
+                <a:ea typeface="Cambria"/>
+                <a:cs typeface="Cambria"/>
+              </a:rPr>
+              <a:t>0 / 36</a:t>
+            </a:r>
+          </a:p>
+        </p:txBody>
+      </p:sp>
+      <p:sp>
+        <p:nvSpPr>
+          <p:cNvPr id="20" name="Text 18">
+            <a:extLst xmlns:a="http://schemas.openxmlformats.org/drawingml/2006/main">
+              <a:ext uri="{FF2B5EF4-FFF2-40B4-BE49-F238E27FC236}">
+                <a16:creationId xmlns:a16="http://schemas.microsoft.com/office/drawing/2014/main" id="{EBE6FD2D-BEFD-4322-9823-9306EDFA3A16}"/>
+              </a:ext>
+            </a:extLst>
+          </p:cNvPr>
+          <p:cNvSpPr>
+            <a:spLocks xmlns:a="http://schemas.openxmlformats.org/drawingml/2006/main" noGrp="1"/>
+          </p:cNvSpPr>
+          <p:nvPr/>
+        </p:nvSpPr>
+        <p:spPr>
+          <a:xfrm xmlns:a="http://schemas.openxmlformats.org/drawingml/2006/main">
+            <a:off x="8153248" y="2304288"/>
+            <a:ext cx="3078328" cy="347472"/>
+          </a:xfrm>
+          <a:prstGeom xmlns:a="http://schemas.openxmlformats.org/drawingml/2006/main" prst="rect">
+            <a:avLst/>
+          </a:prstGeom>
+          <a:noFill xmlns:a="http://schemas.openxmlformats.org/drawingml/2006/main"/>
+        </p:spPr>
+        <p:txBody>
+          <a:bodyPr xmlns:a="http://schemas.openxmlformats.org/drawingml/2006/main" wrap="square" lIns="0" tIns="0" rIns="0" bIns="0" anchor="ctr"/>
+          <a:lstStyle xmlns:a="http://schemas.openxmlformats.org/drawingml/2006/main"/>
+          <a:p xmlns:a="http://schemas.openxmlformats.org/drawingml/2006/main">
+            <a:pPr marL="0" indent="0">
+              <a:buNone/>
+            </a:pPr>
+            <a:r>
+              <a:rPr sz="1150">
+                <a:solidFill>
+                  <a:srgbClr val="24354F"/>
+                </a:solidFill>
+                <a:latin typeface="Calibri"/>
+                <a:ea typeface="Calibri"/>
+                <a:cs typeface="Calibri"/>
+              </a:rPr>
+              <a:t>database runs compiled (two OpenAI models)</a:t>
+            </a:r>
+          </a:p>
+        </p:txBody>
+      </p:sp>
+      <p:sp>
+        <p:nvSpPr>
+          <p:cNvPr id="21" name="Text 19">
+            <a:extLst xmlns:a="http://schemas.openxmlformats.org/drawingml/2006/main">
+              <a:ext uri="{FF2B5EF4-FFF2-40B4-BE49-F238E27FC236}">
+                <a16:creationId xmlns:a16="http://schemas.microsoft.com/office/drawing/2014/main" id="{B5780643-6688-49B6-8D80-A14D47E38BD3}"/>
+              </a:ext>
+            </a:extLst>
+          </p:cNvPr>
+          <p:cNvSpPr>
+            <a:spLocks xmlns:a="http://schemas.openxmlformats.org/drawingml/2006/main" noGrp="1"/>
+          </p:cNvSpPr>
+          <p:nvPr/>
+        </p:nvSpPr>
+        <p:spPr>
+          <a:xfrm xmlns:a="http://schemas.openxmlformats.org/drawingml/2006/main">
+            <a:off x="6571336" y="2761488"/>
+            <a:ext cx="1463040" cy="347472"/>
+          </a:xfrm>
+          <a:prstGeom xmlns:a="http://schemas.openxmlformats.org/drawingml/2006/main" prst="rect">
+            <a:avLst/>
+          </a:prstGeom>
+          <a:noFill xmlns:a="http://schemas.openxmlformats.org/drawingml/2006/main"/>
+        </p:spPr>
+        <p:txBody>
+          <a:bodyPr xmlns:a="http://schemas.openxmlformats.org/drawingml/2006/main" wrap="square" lIns="0" tIns="0" rIns="0" bIns="0" anchor="ctr"/>
+          <a:lstStyle xmlns:a="http://schemas.openxmlformats.org/drawingml/2006/main"/>
+          <a:p xmlns:a="http://schemas.openxmlformats.org/drawingml/2006/main">
+            <a:pPr marL="0" indent="0">
+              <a:buNone/>
+            </a:pPr>
+            <a:r>
+              <a:rPr sz="1700" b="1">
+                <a:solidFill>
+                  <a:srgbClr val="A93B2B"/>
+                </a:solidFill>
+                <a:latin typeface="Cambria"/>
+                <a:ea typeface="Cambria"/>
+                <a:cs typeface="Cambria"/>
+              </a:rPr>
+              <a:t>7–39</a:t>
+            </a:r>
+          </a:p>
+        </p:txBody>
+      </p:sp>
+      <p:sp>
+        <p:nvSpPr>
+          <p:cNvPr id="22" name="Text 20">
+            <a:extLst xmlns:a="http://schemas.openxmlformats.org/drawingml/2006/main">
+              <a:ext uri="{FF2B5EF4-FFF2-40B4-BE49-F238E27FC236}">
+                <a16:creationId xmlns:a16="http://schemas.microsoft.com/office/drawing/2014/main" id="{AE4E6F47-A5EE-4349-84FD-EC51EE22BCE4}"/>
+              </a:ext>
+            </a:extLst>
+          </p:cNvPr>
+          <p:cNvSpPr>
+            <a:spLocks xmlns:a="http://schemas.openxmlformats.org/drawingml/2006/main" noGrp="1"/>
+          </p:cNvSpPr>
+          <p:nvPr/>
+        </p:nvSpPr>
+        <p:spPr>
+          <a:xfrm xmlns:a="http://schemas.openxmlformats.org/drawingml/2006/main">
+            <a:off x="8153248" y="2761488"/>
+            <a:ext cx="3078328" cy="347472"/>
+          </a:xfrm>
+          <a:prstGeom xmlns:a="http://schemas.openxmlformats.org/drawingml/2006/main" prst="rect">
+            <a:avLst/>
+          </a:prstGeom>
+          <a:noFill xmlns:a="http://schemas.openxmlformats.org/drawingml/2006/main"/>
+        </p:spPr>
+        <p:txBody>
+          <a:bodyPr xmlns:a="http://schemas.openxmlformats.org/drawingml/2006/main" wrap="square" lIns="0" tIns="0" rIns="0" bIns="0" anchor="ctr"/>
+          <a:lstStyle xmlns:a="http://schemas.openxmlformats.org/drawingml/2006/main"/>
+          <a:p xmlns:a="http://schemas.openxmlformats.org/drawingml/2006/main">
+            <a:pPr marL="0" indent="0">
+              <a:buNone/>
+            </a:pPr>
+            <a:r>
+              <a:rPr sz="1150">
+                <a:solidFill>
+                  <a:srgbClr val="24354F"/>
+                </a:solidFill>
+                <a:latin typeface="Calibri"/>
+                <a:ea typeface="Calibri"/>
+                <a:cs typeface="Calibri"/>
+              </a:rPr>
+              <a:t>distinct table lists per dev database</a:t>
+            </a:r>
+          </a:p>
+        </p:txBody>
+      </p:sp>
+      <p:sp>
+        <p:nvSpPr>
+          <p:cNvPr id="23" name="Text 21">
+            <a:extLst xmlns:a="http://schemas.openxmlformats.org/drawingml/2006/main">
+              <a:ext uri="{FF2B5EF4-FFF2-40B4-BE49-F238E27FC236}">
+                <a16:creationId xmlns:a16="http://schemas.microsoft.com/office/drawing/2014/main" id="{8F71F11B-4A5E-4195-8084-37F3020BA653}"/>
+              </a:ext>
+            </a:extLst>
+          </p:cNvPr>
+          <p:cNvSpPr>
+            <a:spLocks xmlns:a="http://schemas.openxmlformats.org/drawingml/2006/main" noGrp="1"/>
+          </p:cNvSpPr>
+          <p:nvPr/>
+        </p:nvSpPr>
+        <p:spPr>
+          <a:xfrm xmlns:a="http://schemas.openxmlformats.org/drawingml/2006/main">
+            <a:off x="6571336" y="3218688"/>
+            <a:ext cx="1463040" cy="347472"/>
+          </a:xfrm>
+          <a:prstGeom xmlns:a="http://schemas.openxmlformats.org/drawingml/2006/main" prst="rect">
+            <a:avLst/>
+          </a:prstGeom>
+          <a:noFill xmlns:a="http://schemas.openxmlformats.org/drawingml/2006/main"/>
+        </p:spPr>
+        <p:txBody>
+          <a:bodyPr xmlns:a="http://schemas.openxmlformats.org/drawingml/2006/main" wrap="square" lIns="0" tIns="0" rIns="0" bIns="0" anchor="ctr"/>
+          <a:lstStyle xmlns:a="http://schemas.openxmlformats.org/drawingml/2006/main"/>
+          <a:p xmlns:a="http://schemas.openxmlformats.org/drawingml/2006/main">
+            <a:pPr marL="0" indent="0">
+              <a:buNone/>
+            </a:pPr>
+            <a:r>
+              <a:rPr sz="1700" b="1">
+                <a:solidFill>
+                  <a:srgbClr val="A93B2B"/>
+                </a:solidFill>
+                <a:latin typeface="Cambria"/>
+                <a:ea typeface="Cambria"/>
+                <a:cs typeface="Cambria"/>
+              </a:rPr>
+              <a:t>0 / 10</a:t>
+            </a:r>
+          </a:p>
+        </p:txBody>
+      </p:sp>
+      <p:sp>
+        <p:nvSpPr>
+          <p:cNvPr id="24" name="Text 22">
+            <a:extLst xmlns:a="http://schemas.openxmlformats.org/drawingml/2006/main">
+              <a:ext uri="{FF2B5EF4-FFF2-40B4-BE49-F238E27FC236}">
+                <a16:creationId xmlns:a16="http://schemas.microsoft.com/office/drawing/2014/main" id="{41487ECA-A561-4FFC-9B39-603EFDE0749D}"/>
+              </a:ext>
+            </a:extLst>
+          </p:cNvPr>
+          <p:cNvSpPr>
+            <a:spLocks xmlns:a="http://schemas.openxmlformats.org/drawingml/2006/main" noGrp="1"/>
+          </p:cNvSpPr>
+          <p:nvPr/>
+        </p:nvSpPr>
+        <p:spPr>
+          <a:xfrm xmlns:a="http://schemas.openxmlformats.org/drawingml/2006/main">
+            <a:off x="8153248" y="3218688"/>
+            <a:ext cx="3078328" cy="347472"/>
+          </a:xfrm>
+          <a:prstGeom xmlns:a="http://schemas.openxmlformats.org/drawingml/2006/main" prst="rect">
+            <a:avLst/>
+          </a:prstGeom>
+          <a:noFill xmlns:a="http://schemas.openxmlformats.org/drawingml/2006/main"/>
+        </p:spPr>
+        <p:txBody>
+          <a:bodyPr xmlns:a="http://schemas.openxmlformats.org/drawingml/2006/main" wrap="square" lIns="0" tIns="0" rIns="0" bIns="0" anchor="ctr"/>
+          <a:lstStyle xmlns:a="http://schemas.openxmlformats.org/drawingml/2006/main"/>
+          <a:p xmlns:a="http://schemas.openxmlformats.org/drawingml/2006/main">
+            <a:pPr marL="0" indent="0">
+              <a:buNone/>
+            </a:pPr>
+            <a:r>
+              <a:rPr sz="1150">
+                <a:solidFill>
+                  <a:srgbClr val="24354F"/>
+                </a:solidFill>
+                <a:latin typeface="Calibri"/>
+                <a:ea typeface="Calibri"/>
+                <a:cs typeface="Calibri"/>
+              </a:rPr>
+              <a:t>database-design pairs on Claude Sonnet</a:t>
+            </a:r>
+          </a:p>
+        </p:txBody>
+      </p:sp>
+      <p:sp>
+        <p:nvSpPr>
+          <p:cNvPr id="25" name="Text 23">
+            <a:extLst xmlns:a="http://schemas.openxmlformats.org/drawingml/2006/main">
+              <a:ext uri="{FF2B5EF4-FFF2-40B4-BE49-F238E27FC236}">
+                <a16:creationId xmlns:a16="http://schemas.microsoft.com/office/drawing/2014/main" id="{7E12A923-8838-46B6-BE65-498B863BD457}"/>
+              </a:ext>
+            </a:extLst>
+          </p:cNvPr>
+          <p:cNvSpPr>
+            <a:spLocks xmlns:a="http://schemas.openxmlformats.org/drawingml/2006/main" noGrp="1"/>
+          </p:cNvSpPr>
+          <p:nvPr/>
+        </p:nvSpPr>
+        <p:spPr>
+          <a:xfrm xmlns:a="http://schemas.openxmlformats.org/drawingml/2006/main">
+            <a:off x="6571336" y="3749040"/>
+            <a:ext cx="4687672" cy="694944"/>
+          </a:xfrm>
+          <a:prstGeom xmlns:a="http://schemas.openxmlformats.org/drawingml/2006/main" prst="rect">
+            <a:avLst/>
+          </a:prstGeom>
+          <a:noFill xmlns:a="http://schemas.openxmlformats.org/drawingml/2006/main"/>
+        </p:spPr>
+        <p:txBody>
+          <a:bodyPr xmlns:a="http://schemas.openxmlformats.org/drawingml/2006/main" wrap="square" lIns="0" tIns="0" rIns="0" bIns="0" anchor="t"/>
+          <a:lstStyle xmlns:a="http://schemas.openxmlformats.org/drawingml/2006/main"/>
+          <a:p xmlns:a="http://schemas.openxmlformats.org/drawingml/2006/main">
+            <a:pPr marL="0" indent="0">
+              <a:lnSpc>
+                <a:spcPct val="108000"/>
+              </a:lnSpc>
+              <a:buNone/>
+            </a:pPr>
+            <a:r>
+              <a:rPr sz="1100">
+                <a:solidFill>
+                  <a:srgbClr val="5C4034"/>
+                </a:solidFill>
+                <a:latin typeface="Calibri"/>
+                <a:ea typeface="Calibri"/>
+                <a:cs typeface="Calibri"/>
+              </a:rPr>
+              <a:t>The table list is a per-question model decision, so there is nothing fixed to compile. Sonnet, told to read every table, did so in 26 of 655 runs.</a:t>
+            </a:r>
+          </a:p>
+        </p:txBody>
+      </p:sp>
+      <p:sp>
+        <p:nvSpPr>
+          <p:cNvPr id="26" name="Shape 24">
+            <a:extLst xmlns:a="http://schemas.openxmlformats.org/drawingml/2006/main">
+              <a:ext uri="{FF2B5EF4-FFF2-40B4-BE49-F238E27FC236}">
+                <a16:creationId xmlns:a16="http://schemas.microsoft.com/office/drawing/2014/main" id="{C0BF981A-9E8F-494A-9AD0-98168DAA843F}"/>
+              </a:ext>
+            </a:extLst>
+          </p:cNvPr>
+          <p:cNvSpPr>
+            <a:spLocks xmlns:a="http://schemas.openxmlformats.org/drawingml/2006/main" noGrp="1"/>
+          </p:cNvSpPr>
+          <p:nvPr/>
+        </p:nvSpPr>
+        <p:spPr>
+          <a:xfrm xmlns:a="http://schemas.openxmlformats.org/drawingml/2006/main">
+            <a:off x="640080" y="4754880"/>
+            <a:ext cx="10911535" cy="1371600"/>
+          </a:xfrm>
+          <a:prstGeom xmlns:a="http://schemas.openxmlformats.org/drawingml/2006/main" prst="roundRect">
+            <a:avLst>
+              <a:gd name="adj" fmla="val 3333"/>
+            </a:avLst>
+          </a:prstGeom>
+          <a:solidFill xmlns:a="http://schemas.openxmlformats.org/drawingml/2006/main">
+            <a:srgbClr val="E8F4F5"/>
+          </a:solidFill>
+          <a:ln xmlns:a="http://schemas.openxmlformats.org/drawingml/2006/main" w="9525">
+            <a:solidFill>
+              <a:srgbClr val="CFE4E7"/>
+            </a:solidFill>
+            <a:prstDash val="solid"/>
+          </a:ln>
+          <a:effectLst xmlns:a="http://schemas.openxmlformats.org/drawingml/2006/main">
+            <a:outerShdw blurRad="114300" dist="17780" dir="5400000" algn="bl" rotWithShape="0">
+              <a:srgbClr val="94A6BC">
+                <a:alpha val="16000"/>
+              </a:srgbClr>
+            </a:outerShdw>
+          </a:effectLst>
+        </p:spPr>
+        <p:txBody>
+          <a:bodyPr xmlns:a="http://schemas.openxmlformats.org/drawingml/2006/main"/>
+          <a:lstStyle xmlns:a="http://schemas.openxmlformats.org/drawingml/2006/main"/>
+          <a:p xmlns:a="http://schemas.openxmlformats.org/drawingml/2006/main"/>
+        </p:txBody>
+      </p:sp>
+      <p:sp>
+        <p:nvSpPr>
+          <p:cNvPr id="27" name="Shape 25">
+            <a:extLst xmlns:a="http://schemas.openxmlformats.org/drawingml/2006/main">
+              <a:ext uri="{FF2B5EF4-FFF2-40B4-BE49-F238E27FC236}">
+                <a16:creationId xmlns:a16="http://schemas.microsoft.com/office/drawing/2014/main" id="{A8D5D3DB-7228-4C64-BB37-2C16FCEA1A88}"/>
+              </a:ext>
+            </a:extLst>
+          </p:cNvPr>
+          <p:cNvSpPr>
+            <a:spLocks xmlns:a="http://schemas.openxmlformats.org/drawingml/2006/main" noGrp="1"/>
+          </p:cNvSpPr>
+          <p:nvPr/>
+        </p:nvSpPr>
+        <p:spPr>
+          <a:xfrm xmlns:a="http://schemas.openxmlformats.org/drawingml/2006/main">
+            <a:off x="914400" y="4956048"/>
+            <a:ext cx="384048" cy="384048"/>
+          </a:xfrm>
+          <a:prstGeom xmlns:a="http://schemas.openxmlformats.org/drawingml/2006/main" prst="ellipse">
+            <a:avLst/>
+          </a:prstGeom>
+          <a:solidFill xmlns:a="http://schemas.openxmlformats.org/drawingml/2006/main">
+            <a:srgbClr val="1F8A99"/>
+          </a:solidFill>
+          <a:ln xmlns:a="http://schemas.openxmlformats.org/drawingml/2006/main" w="6350">
+            <a:solidFill>
+              <a:srgbClr val="1F8A99"/>
+            </a:solidFill>
+            <a:prstDash val="solid"/>
+          </a:ln>
+        </p:spPr>
+        <p:txBody>
+          <a:bodyPr xmlns:a="http://schemas.openxmlformats.org/drawingml/2006/main"/>
+          <a:lstStyle xmlns:a="http://schemas.openxmlformats.org/drawingml/2006/main"/>
+          <a:p xmlns:a="http://schemas.openxmlformats.org/drawingml/2006/main"/>
+        </p:txBody>
+      </p:sp>
+      <p:sp>
+        <p:nvSpPr>
+          <p:cNvPr id="28" name="Text 26">
+            <a:extLst xmlns:a="http://schemas.openxmlformats.org/drawingml/2006/main">
+              <a:ext uri="{FF2B5EF4-FFF2-40B4-BE49-F238E27FC236}">
+                <a16:creationId xmlns:a16="http://schemas.microsoft.com/office/drawing/2014/main" id="{8DBCF72E-4F10-4B08-8087-4D76EC613F69}"/>
+              </a:ext>
+            </a:extLst>
+          </p:cNvPr>
+          <p:cNvSpPr>
+            <a:spLocks xmlns:a="http://schemas.openxmlformats.org/drawingml/2006/main" noGrp="1"/>
+          </p:cNvSpPr>
+          <p:nvPr/>
+        </p:nvSpPr>
+        <p:spPr>
+          <a:xfrm xmlns:a="http://schemas.openxmlformats.org/drawingml/2006/main">
+            <a:off x="914400" y="4956048"/>
+            <a:ext cx="384048" cy="384048"/>
+          </a:xfrm>
+          <a:prstGeom xmlns:a="http://schemas.openxmlformats.org/drawingml/2006/main" prst="rect">
+            <a:avLst/>
+          </a:prstGeom>
+          <a:noFill xmlns:a="http://schemas.openxmlformats.org/drawingml/2006/main"/>
+        </p:spPr>
+        <p:txBody>
+          <a:bodyPr xmlns:a="http://schemas.openxmlformats.org/drawingml/2006/main" wrap="square" lIns="0" tIns="0" rIns="0" bIns="0" anchor="ctr"/>
+          <a:lstStyle xmlns:a="http://schemas.openxmlformats.org/drawingml/2006/main"/>
+          <a:p xmlns:a="http://schemas.openxmlformats.org/drawingml/2006/main">
+            <a:pPr marL="0" indent="0" algn="ctr">
+              <a:buNone/>
+            </a:pPr>
+            <a:r>
+              <a:rPr sz="1300" b="1">
+                <a:solidFill>
+                  <a:srgbClr val="FFFFFF"/>
+                </a:solidFill>
+                <a:latin typeface="Calibri"/>
+                <a:ea typeface="Calibri"/>
+                <a:cs typeface="Calibri"/>
+              </a:rPr>
+              <a:t>✓</a:t>
+            </a:r>
+          </a:p>
+        </p:txBody>
+      </p:sp>
+      <p:sp>
+        <p:nvSpPr>
+          <p:cNvPr id="29" name="Text 27">
+            <a:extLst xmlns:a="http://schemas.openxmlformats.org/drawingml/2006/main">
+              <a:ext uri="{FF2B5EF4-FFF2-40B4-BE49-F238E27FC236}">
+                <a16:creationId xmlns:a16="http://schemas.microsoft.com/office/drawing/2014/main" id="{E55FC436-6B16-4308-9F0A-60AB237C51A1}"/>
+              </a:ext>
+            </a:extLst>
+          </p:cNvPr>
+          <p:cNvSpPr>
+            <a:spLocks xmlns:a="http://schemas.openxmlformats.org/drawingml/2006/main" noGrp="1"/>
+          </p:cNvSpPr>
+          <p:nvPr/>
+        </p:nvSpPr>
+        <p:spPr>
+          <a:xfrm xmlns:a="http://schemas.openxmlformats.org/drawingml/2006/main">
+            <a:off x="1463040" y="4919472"/>
+            <a:ext cx="9814255" cy="310896"/>
+          </a:xfrm>
+          <a:prstGeom xmlns:a="http://schemas.openxmlformats.org/drawingml/2006/main" prst="rect">
+            <a:avLst/>
+          </a:prstGeom>
+          <a:noFill xmlns:a="http://schemas.openxmlformats.org/drawingml/2006/main"/>
+        </p:spPr>
+        <p:txBody>
+          <a:bodyPr xmlns:a="http://schemas.openxmlformats.org/drawingml/2006/main" wrap="square" lIns="0" tIns="0" rIns="0" bIns="0" anchor="ctr"/>
+          <a:lstStyle xmlns:a="http://schemas.openxmlformats.org/drawingml/2006/main"/>
+          <a:p xmlns:a="http://schemas.openxmlformats.org/drawingml/2006/main">
+            <a:pPr marL="0" indent="0">
+              <a:buNone/>
+            </a:pPr>
+            <a:r>
+              <a:rPr sz="1400" b="1">
+                <a:solidFill>
+                  <a:srgbClr val="0E1E3A"/>
+                </a:solidFill>
+                <a:latin typeface="Cambria"/>
+                <a:ea typeface="Cambria"/>
+                <a:cs typeface="Cambria"/>
+              </a:rPr>
+              <a:t>GAC compiles what an agent does, not what its prompt asks for</a:t>
+            </a:r>
+          </a:p>
+        </p:txBody>
+      </p:sp>
+      <p:sp>
+        <p:nvSpPr>
+          <p:cNvPr id="30" name="Text 28">
+            <a:extLst xmlns:a="http://schemas.openxmlformats.org/drawingml/2006/main">
+              <a:ext uri="{FF2B5EF4-FFF2-40B4-BE49-F238E27FC236}">
+                <a16:creationId xmlns:a16="http://schemas.microsoft.com/office/drawing/2014/main" id="{C9547E57-0BC7-4666-B445-08D84357BB7A}"/>
+              </a:ext>
+            </a:extLst>
+          </p:cNvPr>
+          <p:cNvSpPr>
+            <a:spLocks xmlns:a="http://schemas.openxmlformats.org/drawingml/2006/main" noGrp="1"/>
+          </p:cNvSpPr>
+          <p:nvPr/>
+        </p:nvSpPr>
+        <p:spPr>
+          <a:xfrm xmlns:a="http://schemas.openxmlformats.org/drawingml/2006/main">
+            <a:off x="1463040" y="5266944"/>
+            <a:ext cx="9722815" cy="749808"/>
+          </a:xfrm>
+          <a:prstGeom xmlns:a="http://schemas.openxmlformats.org/drawingml/2006/main" prst="rect">
+            <a:avLst/>
+          </a:prstGeom>
+          <a:noFill xmlns:a="http://schemas.openxmlformats.org/drawingml/2006/main"/>
+        </p:spPr>
+        <p:txBody>
+          <a:bodyPr xmlns:a="http://schemas.openxmlformats.org/drawingml/2006/main" wrap="square" lIns="0" tIns="0" rIns="0" bIns="0" anchor="ctr"/>
+          <a:lstStyle xmlns:a="http://schemas.openxmlformats.org/drawingml/2006/main"/>
+          <a:p xmlns:a="http://schemas.openxmlformats.org/drawingml/2006/main">
+            <a:pPr marL="0" indent="0">
+              <a:lnSpc>
+                <a:spcPct val="106000"/>
+              </a:lnSpc>
+              <a:buNone/>
+            </a:pPr>
+            <a:r>
+              <a:rPr sz="1150">
+                <a:solidFill>
+                  <a:srgbClr val="24354F"/>
+                </a:solidFill>
+                <a:latin typeface="Calibri"/>
+                <a:ea typeface="Calibri"/>
+                <a:cs typeface="Calibri"/>
+              </a:rPr>
+              <a:t>On 924 held-out questions with a compiled agent (26 databases, two model families), dispatch was complete and no run showed a detected accuracy loss: requests fell 45–50%, latency 29–38%, and cost 11–18% at uncached prices. A hand-written schema prefetch matches the compiled program.</a:t>
+            </a:r>
+          </a:p>
+        </p:txBody>
+      </p:sp>
+    </p:spTree>
+    <p:extLst>
+      <p:ext uri="{BB962C8B-B14F-4D97-AF65-F5344CB8AC3E}">
+        <p14:creationId xmlns:p14="http://schemas.microsoft.com/office/powerpoint/2010/main" val="2014152445"/>
+      </p:ext>
+    </p:extLst>
+  </p:cSld>
+</p:sld>
+</file>
+
+<file path=ppt/slides/slide28.xml><?xml version="1.0" encoding="utf-8"?>
+<p:sld xmlns:p="http://schemas.openxmlformats.org/presentationml/2006/main">
+  <p:cSld>
+    <p:bg>
+      <p:bgPr>
+        <a:solidFill xmlns:a="http://schemas.openxmlformats.org/drawingml/2006/main">
+          <a:srgbClr val="FFFFFF"/>
+        </a:solidFill>
+      </p:bgPr>
+    </p:bg>
+    <p:spTree>
+      <p:nvGrpSpPr>
+        <p:cNvPr id="1" name=""/>
+        <p:cNvGrpSpPr/>
+        <p:nvPr/>
+      </p:nvGrpSpPr>
+      <p:grpSpPr>
+        <a:xfrm xmlns:a="http://schemas.openxmlformats.org/drawingml/2006/main"/>
+      </p:grpSpPr>
+      <p:sp>
+        <p:nvSpPr>
+          <p:cNvPr id="2" name="Text 0">
+            <a:extLst xmlns:a="http://schemas.openxmlformats.org/drawingml/2006/main">
+              <a:ext uri="{FF2B5EF4-FFF2-40B4-BE49-F238E27FC236}">
+                <a16:creationId xmlns:a16="http://schemas.microsoft.com/office/drawing/2014/main" id="{AE47B6A8-C54A-48F2-AF52-BB28FB3E879F}"/>
+              </a:ext>
+            </a:extLst>
+          </p:cNvPr>
+          <p:cNvSpPr>
+            <a:spLocks xmlns:a="http://schemas.openxmlformats.org/drawingml/2006/main" noGrp="1"/>
+          </p:cNvSpPr>
+          <p:nvPr/>
+        </p:nvSpPr>
+        <p:spPr>
+          <a:xfrm xmlns:a="http://schemas.openxmlformats.org/drawingml/2006/main">
+            <a:off x="640080" y="6345936"/>
+            <a:ext cx="5486400" cy="256032"/>
+          </a:xfrm>
+          <a:prstGeom xmlns:a="http://schemas.openxmlformats.org/drawingml/2006/main" prst="rect">
+            <a:avLst/>
+          </a:prstGeom>
+          <a:noFill xmlns:a="http://schemas.openxmlformats.org/drawingml/2006/main"/>
+        </p:spPr>
+        <p:txBody>
+          <a:bodyPr xmlns:a="http://schemas.openxmlformats.org/drawingml/2006/main" wrap="square" lIns="0" tIns="0" rIns="0" bIns="0" anchor="t"/>
+          <a:lstStyle xmlns:a="http://schemas.openxmlformats.org/drawingml/2006/main"/>
+          <a:p xmlns:a="http://schemas.openxmlformats.org/drawingml/2006/main">
+            <a:pPr marL="0" indent="0">
+              <a:buNone/>
+            </a:pPr>
+            <a:r>
+              <a:rPr sz="900" spc="100">
+                <a:solidFill>
+                  <a:srgbClr val="A3B2C4"/>
+                </a:solidFill>
+                <a:latin typeface="Calibri"/>
+                <a:ea typeface="Calibri"/>
+                <a:cs typeface="Calibri"/>
+              </a:rPr>
+              <a:t>Guarded Agentic Compaction</a:t>
+            </a:r>
+          </a:p>
+        </p:txBody>
+      </p:sp>
+      <p:sp>
+        <p:nvSpPr>
+          <p:cNvPr id="3" name="Text 1">
+            <a:extLst xmlns:a="http://schemas.openxmlformats.org/drawingml/2006/main">
+              <a:ext uri="{FF2B5EF4-FFF2-40B4-BE49-F238E27FC236}">
+                <a16:creationId xmlns:a16="http://schemas.microsoft.com/office/drawing/2014/main" id="{F33FCA74-061A-4D5D-AE36-35CFBE430BE6}"/>
+              </a:ext>
+            </a:extLst>
+          </p:cNvPr>
+          <p:cNvSpPr>
+            <a:spLocks xmlns:a="http://schemas.openxmlformats.org/drawingml/2006/main" noGrp="1"/>
+          </p:cNvSpPr>
+          <p:nvPr/>
+        </p:nvSpPr>
+        <p:spPr>
+          <a:xfrm xmlns:a="http://schemas.openxmlformats.org/drawingml/2006/main">
+            <a:off x="10637215" y="6345936"/>
+            <a:ext cx="914400" cy="256032"/>
+          </a:xfrm>
+          <a:prstGeom xmlns:a="http://schemas.openxmlformats.org/drawingml/2006/main" prst="rect">
+            <a:avLst/>
+          </a:prstGeom>
+          <a:noFill xmlns:a="http://schemas.openxmlformats.org/drawingml/2006/main"/>
+        </p:spPr>
+        <p:txBody>
+          <a:bodyPr xmlns:a="http://schemas.openxmlformats.org/drawingml/2006/main" wrap="square" lIns="0" tIns="0" rIns="0" bIns="0" anchor="t"/>
+          <a:lstStyle xmlns:a="http://schemas.openxmlformats.org/drawingml/2006/main"/>
+          <a:p xmlns:a="http://schemas.openxmlformats.org/drawingml/2006/main">
+            <a:pPr marL="0" indent="0" algn="r">
+              <a:buNone/>
+            </a:pPr>
+            <a:r>
+              <a:rPr sz="900">
+                <a:solidFill>
+                  <a:srgbClr val="A3B2C4"/>
+                </a:solidFill>
+                <a:latin typeface="Calibri"/>
+                <a:ea typeface="Calibri"/>
+                <a:cs typeface="Calibri"/>
+              </a:rPr>
+              <a:t>22</a:t>
+            </a:r>
+          </a:p>
+        </p:txBody>
+      </p:sp>
+      <p:sp>
+        <p:nvSpPr>
+          <p:cNvPr id="4" name="Text 2">
+            <a:extLst xmlns:a="http://schemas.openxmlformats.org/drawingml/2006/main">
+              <a:ext uri="{FF2B5EF4-FFF2-40B4-BE49-F238E27FC236}">
+                <a16:creationId xmlns:a16="http://schemas.microsoft.com/office/drawing/2014/main" id="{6AC227C5-2480-4274-800D-B03E803DBC12}"/>
+              </a:ext>
+            </a:extLst>
+          </p:cNvPr>
+          <p:cNvSpPr>
+            <a:spLocks xmlns:a="http://schemas.openxmlformats.org/drawingml/2006/main" noGrp="1"/>
+          </p:cNvSpPr>
+          <p:nvPr/>
+        </p:nvSpPr>
+        <p:spPr>
+          <a:xfrm xmlns:a="http://schemas.openxmlformats.org/drawingml/2006/main">
+            <a:off x="640080" y="384048"/>
+            <a:ext cx="10911535" cy="237744"/>
+          </a:xfrm>
+          <a:prstGeom xmlns:a="http://schemas.openxmlformats.org/drawingml/2006/main" prst="rect">
+            <a:avLst/>
+          </a:prstGeom>
+          <a:noFill xmlns:a="http://schemas.openxmlformats.org/drawingml/2006/main"/>
+        </p:spPr>
+        <p:txBody>
+          <a:bodyPr xmlns:a="http://schemas.openxmlformats.org/drawingml/2006/main" wrap="square" lIns="0" tIns="0" rIns="0" bIns="0" anchor="t"/>
+          <a:lstStyle xmlns:a="http://schemas.openxmlformats.org/drawingml/2006/main"/>
+          <a:p xmlns:a="http://schemas.openxmlformats.org/drawingml/2006/main">
+            <a:pPr marL="0" indent="0">
+              <a:buNone/>
+            </a:pPr>
+            <a:r>
+              <a:rPr sz="1050" b="1" spc="180">
+                <a:solidFill>
+                  <a:srgbClr val="1F8A99"/>
+                </a:solidFill>
+                <a:latin typeface="Calibri"/>
+                <a:ea typeface="Calibri"/>
+                <a:cs typeface="Calibri"/>
+              </a:rPr>
+              <a:t>RESULTS  ·  CERTIFICATES AND REPLICATIONS</a:t>
+            </a:r>
+          </a:p>
+        </p:txBody>
+      </p:sp>
+      <p:sp>
+        <p:nvSpPr>
+          <p:cNvPr id="5" name="Text 3">
+            <a:extLst xmlns:a="http://schemas.openxmlformats.org/drawingml/2006/main">
+              <a:ext uri="{FF2B5EF4-FFF2-40B4-BE49-F238E27FC236}">
+                <a16:creationId xmlns:a16="http://schemas.microsoft.com/office/drawing/2014/main" id="{BFAD9DD3-AA36-4893-A274-2A83980B4360}"/>
+              </a:ext>
+            </a:extLst>
+          </p:cNvPr>
+          <p:cNvSpPr>
+            <a:spLocks xmlns:a="http://schemas.openxmlformats.org/drawingml/2006/main" noGrp="1"/>
+          </p:cNvSpPr>
+          <p:nvPr/>
+        </p:nvSpPr>
+        <p:spPr>
+          <a:xfrm xmlns:a="http://schemas.openxmlformats.org/drawingml/2006/main">
+            <a:off x="640080" y="658368"/>
+            <a:ext cx="10911535" cy="502920"/>
+          </a:xfrm>
+          <a:prstGeom xmlns:a="http://schemas.openxmlformats.org/drawingml/2006/main" prst="rect">
+            <a:avLst/>
+          </a:prstGeom>
+          <a:noFill xmlns:a="http://schemas.openxmlformats.org/drawingml/2006/main"/>
+        </p:spPr>
+        <p:txBody>
+          <a:bodyPr xmlns:a="http://schemas.openxmlformats.org/drawingml/2006/main" wrap="square" lIns="0" tIns="0" rIns="0" bIns="0" anchor="t"/>
+          <a:lstStyle xmlns:a="http://schemas.openxmlformats.org/drawingml/2006/main"/>
+          <a:p xmlns:a="http://schemas.openxmlformats.org/drawingml/2006/main">
+            <a:pPr marL="0" indent="0">
+              <a:buNone/>
+            </a:pPr>
+            <a:r>
+              <a:rPr sz="2600" b="1">
+                <a:solidFill>
+                  <a:srgbClr val="0E1E3A"/>
+                </a:solidFill>
+                <a:latin typeface="Cambria"/>
+                <a:ea typeface="Cambria"/>
+                <a:cs typeface="Cambria"/>
+              </a:rPr>
+              <a:t>What the certificates certify</a:t>
+            </a:r>
+          </a:p>
+        </p:txBody>
+      </p:sp>
+      <p:sp>
+        <p:nvSpPr>
+          <p:cNvPr id="6" name="Shape 4">
+            <a:extLst xmlns:a="http://schemas.openxmlformats.org/drawingml/2006/main">
+              <a:ext uri="{FF2B5EF4-FFF2-40B4-BE49-F238E27FC236}">
+                <a16:creationId xmlns:a16="http://schemas.microsoft.com/office/drawing/2014/main" id="{A7CCC68F-BA39-4940-B211-3362266BF39F}"/>
+              </a:ext>
+            </a:extLst>
+          </p:cNvPr>
+          <p:cNvSpPr>
+            <a:spLocks xmlns:a="http://schemas.openxmlformats.org/drawingml/2006/main" noGrp="1"/>
+          </p:cNvSpPr>
+          <p:nvPr/>
+        </p:nvSpPr>
+        <p:spPr>
+          <a:xfrm xmlns:a="http://schemas.openxmlformats.org/drawingml/2006/main">
+            <a:off x="640080" y="1389888"/>
+            <a:ext cx="5272888" cy="3200400"/>
+          </a:xfrm>
+          <a:prstGeom xmlns:a="http://schemas.openxmlformats.org/drawingml/2006/main" prst="roundRect">
+            <a:avLst>
+              <a:gd name="adj" fmla="val 1429"/>
+            </a:avLst>
+          </a:prstGeom>
+          <a:solidFill xmlns:a="http://schemas.openxmlformats.org/drawingml/2006/main">
+            <a:srgbClr val="F5F9FC"/>
+          </a:solidFill>
+          <a:ln xmlns:a="http://schemas.openxmlformats.org/drawingml/2006/main" w="9525">
+            <a:solidFill>
+              <a:srgbClr val="D5E0EB"/>
+            </a:solidFill>
+            <a:prstDash val="solid"/>
+          </a:ln>
+          <a:effectLst xmlns:a="http://schemas.openxmlformats.org/drawingml/2006/main">
+            <a:outerShdw blurRad="114300" dist="17780" dir="5400000" algn="bl" rotWithShape="0">
+              <a:srgbClr val="94A6BC">
+                <a:alpha val="16000"/>
+              </a:srgbClr>
+            </a:outerShdw>
+          </a:effectLst>
+        </p:spPr>
+        <p:txBody>
+          <a:bodyPr xmlns:a="http://schemas.openxmlformats.org/drawingml/2006/main"/>
+          <a:lstStyle xmlns:a="http://schemas.openxmlformats.org/drawingml/2006/main"/>
+          <a:p xmlns:a="http://schemas.openxmlformats.org/drawingml/2006/main"/>
+        </p:txBody>
+      </p:sp>
+      <p:sp>
+        <p:nvSpPr>
+          <p:cNvPr id="7" name="Text 5">
+            <a:extLst xmlns:a="http://schemas.openxmlformats.org/drawingml/2006/main">
+              <a:ext uri="{FF2B5EF4-FFF2-40B4-BE49-F238E27FC236}">
+                <a16:creationId xmlns:a16="http://schemas.microsoft.com/office/drawing/2014/main" id="{2FE5721D-EB4D-4AB2-AA8C-0C3F4706131C}"/>
+              </a:ext>
+            </a:extLst>
+          </p:cNvPr>
+          <p:cNvSpPr>
+            <a:spLocks xmlns:a="http://schemas.openxmlformats.org/drawingml/2006/main" noGrp="1"/>
+          </p:cNvSpPr>
+          <p:nvPr/>
+        </p:nvSpPr>
+        <p:spPr>
+          <a:xfrm xmlns:a="http://schemas.openxmlformats.org/drawingml/2006/main">
+            <a:off x="932688" y="1572768"/>
+            <a:ext cx="4687672" cy="365760"/>
+          </a:xfrm>
+          <a:prstGeom xmlns:a="http://schemas.openxmlformats.org/drawingml/2006/main" prst="rect">
+            <a:avLst/>
+          </a:prstGeom>
+          <a:noFill xmlns:a="http://schemas.openxmlformats.org/drawingml/2006/main"/>
+        </p:spPr>
+        <p:txBody>
+          <a:bodyPr xmlns:a="http://schemas.openxmlformats.org/drawingml/2006/main" wrap="square" lIns="0" tIns="0" rIns="0" bIns="0" anchor="ctr"/>
+          <a:lstStyle xmlns:a="http://schemas.openxmlformats.org/drawingml/2006/main"/>
+          <a:p xmlns:a="http://schemas.openxmlformats.org/drawingml/2006/main">
+            <a:pPr marL="0" indent="0">
+              <a:buNone/>
+            </a:pPr>
+            <a:r>
+              <a:rPr sz="1800" b="1">
+                <a:solidFill>
+                  <a:srgbClr val="0E1E3A"/>
+                </a:solidFill>
+                <a:latin typeface="Cambria"/>
+                <a:ea typeface="Cambria"/>
+                <a:cs typeface="Cambria"/>
+              </a:rPr>
+              <a:t>End-to-end certificate</a:t>
+            </a:r>
+          </a:p>
+        </p:txBody>
+      </p:sp>
+      <p:sp>
+        <p:nvSpPr>
+          <p:cNvPr id="8" name="Text 6">
+            <a:extLst xmlns:a="http://schemas.openxmlformats.org/drawingml/2006/main">
+              <a:ext uri="{FF2B5EF4-FFF2-40B4-BE49-F238E27FC236}">
+                <a16:creationId xmlns:a16="http://schemas.microsoft.com/office/drawing/2014/main" id="{5A1F2CE0-A89F-4754-B59D-A9B10798FDED}"/>
+              </a:ext>
+            </a:extLst>
+          </p:cNvPr>
+          <p:cNvSpPr>
+            <a:spLocks xmlns:a="http://schemas.openxmlformats.org/drawingml/2006/main" noGrp="1"/>
+          </p:cNvSpPr>
+          <p:nvPr/>
+        </p:nvSpPr>
+        <p:spPr>
+          <a:xfrm xmlns:a="http://schemas.openxmlformats.org/drawingml/2006/main">
+            <a:off x="932688" y="1938528"/>
+            <a:ext cx="4687672" cy="256032"/>
+          </a:xfrm>
+          <a:prstGeom xmlns:a="http://schemas.openxmlformats.org/drawingml/2006/main" prst="rect">
+            <a:avLst/>
+          </a:prstGeom>
+          <a:noFill xmlns:a="http://schemas.openxmlformats.org/drawingml/2006/main"/>
+        </p:spPr>
+        <p:txBody>
+          <a:bodyPr xmlns:a="http://schemas.openxmlformats.org/drawingml/2006/main" wrap="square" lIns="0" tIns="0" rIns="0" bIns="0" anchor="ctr"/>
+          <a:lstStyle xmlns:a="http://schemas.openxmlformats.org/drawingml/2006/main"/>
+          <a:p xmlns:a="http://schemas.openxmlformats.org/drawingml/2006/main">
+            <a:pPr marL="0" indent="0">
+              <a:buNone/>
+            </a:pPr>
+            <a:r>
+              <a:rPr sz="1100" i="1">
+                <a:solidFill>
+                  <a:srgbClr val="5A6B84"/>
+                </a:solidFill>
+                <a:latin typeface="Calibri"/>
+                <a:ea typeface="Calibri"/>
+                <a:cs typeface="Calibri"/>
+              </a:rPr>
+              <a:t>132 fresh post-cutoff pull requests  ·  one family</a:t>
+            </a:r>
+          </a:p>
+        </p:txBody>
+      </p:sp>
+      <p:sp>
+        <p:nvSpPr>
+          <p:cNvPr id="9" name="Text 7">
+            <a:extLst xmlns:a="http://schemas.openxmlformats.org/drawingml/2006/main">
+              <a:ext uri="{FF2B5EF4-FFF2-40B4-BE49-F238E27FC236}">
+                <a16:creationId xmlns:a16="http://schemas.microsoft.com/office/drawing/2014/main" id="{AF2C8D84-5695-4D5C-AFFC-BD4171D5FEDD}"/>
+              </a:ext>
+            </a:extLst>
+          </p:cNvPr>
+          <p:cNvSpPr>
+            <a:spLocks xmlns:a="http://schemas.openxmlformats.org/drawingml/2006/main" noGrp="1"/>
+          </p:cNvSpPr>
+          <p:nvPr/>
+        </p:nvSpPr>
+        <p:spPr>
+          <a:xfrm xmlns:a="http://schemas.openxmlformats.org/drawingml/2006/main">
+            <a:off x="932688" y="2304288"/>
+            <a:ext cx="1463040" cy="347472"/>
+          </a:xfrm>
+          <a:prstGeom xmlns:a="http://schemas.openxmlformats.org/drawingml/2006/main" prst="rect">
+            <a:avLst/>
+          </a:prstGeom>
+          <a:noFill xmlns:a="http://schemas.openxmlformats.org/drawingml/2006/main"/>
+        </p:spPr>
+        <p:txBody>
+          <a:bodyPr xmlns:a="http://schemas.openxmlformats.org/drawingml/2006/main" wrap="square" lIns="0" tIns="0" rIns="0" bIns="0" anchor="ctr"/>
+          <a:lstStyle xmlns:a="http://schemas.openxmlformats.org/drawingml/2006/main"/>
+          <a:p xmlns:a="http://schemas.openxmlformats.org/drawingml/2006/main">
+            <a:pPr marL="0" indent="0">
+              <a:buNone/>
+            </a:pPr>
+            <a:r>
+              <a:rPr sz="1700" b="1">
+                <a:solidFill>
+                  <a:srgbClr val="0E1E3A"/>
+                </a:solidFill>
+                <a:latin typeface="Cambria"/>
+                <a:ea typeface="Cambria"/>
+                <a:cs typeface="Cambria"/>
+              </a:rPr>
+              <a:t>0 / 132</a:t>
+            </a:r>
+          </a:p>
+        </p:txBody>
+      </p:sp>
+      <p:sp>
+        <p:nvSpPr>
+          <p:cNvPr id="10" name="Text 8">
+            <a:extLst xmlns:a="http://schemas.openxmlformats.org/drawingml/2006/main">
+              <a:ext uri="{FF2B5EF4-FFF2-40B4-BE49-F238E27FC236}">
+                <a16:creationId xmlns:a16="http://schemas.microsoft.com/office/drawing/2014/main" id="{B16CBFF6-53C2-4D61-ACF3-CCE7B768A217}"/>
+              </a:ext>
+            </a:extLst>
+          </p:cNvPr>
+          <p:cNvSpPr>
+            <a:spLocks xmlns:a="http://schemas.openxmlformats.org/drawingml/2006/main" noGrp="1"/>
+          </p:cNvSpPr>
+          <p:nvPr/>
+        </p:nvSpPr>
+        <p:spPr>
+          <a:xfrm xmlns:a="http://schemas.openxmlformats.org/drawingml/2006/main">
+            <a:off x="2514600" y="2304288"/>
+            <a:ext cx="3078328" cy="347472"/>
+          </a:xfrm>
+          <a:prstGeom xmlns:a="http://schemas.openxmlformats.org/drawingml/2006/main" prst="rect">
+            <a:avLst/>
+          </a:prstGeom>
+          <a:noFill xmlns:a="http://schemas.openxmlformats.org/drawingml/2006/main"/>
+        </p:spPr>
+        <p:txBody>
+          <a:bodyPr xmlns:a="http://schemas.openxmlformats.org/drawingml/2006/main" wrap="square" lIns="0" tIns="0" rIns="0" bIns="0" anchor="ctr"/>
+          <a:lstStyle xmlns:a="http://schemas.openxmlformats.org/drawingml/2006/main"/>
+          <a:p xmlns:a="http://schemas.openxmlformats.org/drawingml/2006/main">
+            <a:pPr marL="0" indent="0">
+              <a:buNone/>
+            </a:pPr>
+            <a:r>
+              <a:rPr sz="1150">
+                <a:solidFill>
+                  <a:srgbClr val="24354F"/>
+                </a:solidFill>
+                <a:latin typeface="Calibri"/>
+                <a:ea typeface="Calibri"/>
+                <a:cs typeface="Calibri"/>
+              </a:rPr>
+              <a:t>end-to-end contract misses</a:t>
+            </a:r>
+          </a:p>
+        </p:txBody>
+      </p:sp>
+      <p:sp>
+        <p:nvSpPr>
+          <p:cNvPr id="11" name="Text 9">
+            <a:extLst xmlns:a="http://schemas.openxmlformats.org/drawingml/2006/main">
+              <a:ext uri="{FF2B5EF4-FFF2-40B4-BE49-F238E27FC236}">
+                <a16:creationId xmlns:a16="http://schemas.microsoft.com/office/drawing/2014/main" id="{AF2B94A8-A190-4DBE-89F0-EE106BFD200D}"/>
+              </a:ext>
+            </a:extLst>
+          </p:cNvPr>
+          <p:cNvSpPr>
+            <a:spLocks xmlns:a="http://schemas.openxmlformats.org/drawingml/2006/main" noGrp="1"/>
+          </p:cNvSpPr>
+          <p:nvPr/>
+        </p:nvSpPr>
+        <p:spPr>
+          <a:xfrm xmlns:a="http://schemas.openxmlformats.org/drawingml/2006/main">
+            <a:off x="932688" y="2761488"/>
+            <a:ext cx="1463040" cy="347472"/>
+          </a:xfrm>
+          <a:prstGeom xmlns:a="http://schemas.openxmlformats.org/drawingml/2006/main" prst="rect">
+            <a:avLst/>
+          </a:prstGeom>
+          <a:noFill xmlns:a="http://schemas.openxmlformats.org/drawingml/2006/main"/>
+        </p:spPr>
+        <p:txBody>
+          <a:bodyPr xmlns:a="http://schemas.openxmlformats.org/drawingml/2006/main" wrap="square" lIns="0" tIns="0" rIns="0" bIns="0" anchor="ctr"/>
+          <a:lstStyle xmlns:a="http://schemas.openxmlformats.org/drawingml/2006/main"/>
+          <a:p xmlns:a="http://schemas.openxmlformats.org/drawingml/2006/main">
+            <a:pPr marL="0" indent="0">
+              <a:buNone/>
+            </a:pPr>
+            <a:r>
+              <a:rPr sz="1700" b="1">
+                <a:solidFill>
+                  <a:srgbClr val="0E1E3A"/>
+                </a:solidFill>
+                <a:latin typeface="Cambria"/>
+                <a:ea typeface="Cambria"/>
+                <a:cs typeface="Cambria"/>
+              </a:rPr>
+              <a:t>0.0173</a:t>
+            </a:r>
+          </a:p>
+        </p:txBody>
+      </p:sp>
+      <p:sp>
+        <p:nvSpPr>
+          <p:cNvPr id="12" name="Text 10">
+            <a:extLst xmlns:a="http://schemas.openxmlformats.org/drawingml/2006/main">
+              <a:ext uri="{FF2B5EF4-FFF2-40B4-BE49-F238E27FC236}">
+                <a16:creationId xmlns:a16="http://schemas.microsoft.com/office/drawing/2014/main" id="{0B82FCCC-13A3-4FE1-A986-C83EBE50D60D}"/>
+              </a:ext>
+            </a:extLst>
+          </p:cNvPr>
+          <p:cNvSpPr>
+            <a:spLocks xmlns:a="http://schemas.openxmlformats.org/drawingml/2006/main" noGrp="1"/>
+          </p:cNvSpPr>
+          <p:nvPr/>
+        </p:nvSpPr>
+        <p:spPr>
+          <a:xfrm xmlns:a="http://schemas.openxmlformats.org/drawingml/2006/main">
+            <a:off x="2514600" y="2761488"/>
+            <a:ext cx="3078328" cy="347472"/>
+          </a:xfrm>
+          <a:prstGeom xmlns:a="http://schemas.openxmlformats.org/drawingml/2006/main" prst="rect">
+            <a:avLst/>
+          </a:prstGeom>
+          <a:noFill xmlns:a="http://schemas.openxmlformats.org/drawingml/2006/main"/>
+        </p:spPr>
+        <p:txBody>
+          <a:bodyPr xmlns:a="http://schemas.openxmlformats.org/drawingml/2006/main" wrap="square" lIns="0" tIns="0" rIns="0" bIns="0" anchor="ctr"/>
+          <a:lstStyle xmlns:a="http://schemas.openxmlformats.org/drawingml/2006/main"/>
+          <a:p xmlns:a="http://schemas.openxmlformats.org/drawingml/2006/main">
+            <a:pPr marL="0" indent="0">
+              <a:buNone/>
+            </a:pPr>
+            <a:r>
+              <a:rPr sz="1150">
+                <a:solidFill>
+                  <a:srgbClr val="24354F"/>
+                </a:solidFill>
+                <a:latin typeface="Calibri"/>
+                <a:ea typeface="Calibri"/>
+                <a:cs typeface="Calibri"/>
+              </a:rPr>
+              <a:t>upper bound at 90% confidence (0.035, grid)</a:t>
+            </a:r>
+          </a:p>
+        </p:txBody>
+      </p:sp>
+      <p:sp>
+        <p:nvSpPr>
+          <p:cNvPr id="13" name="Text 11">
+            <a:extLst xmlns:a="http://schemas.openxmlformats.org/drawingml/2006/main">
+              <a:ext uri="{FF2B5EF4-FFF2-40B4-BE49-F238E27FC236}">
+                <a16:creationId xmlns:a16="http://schemas.microsoft.com/office/drawing/2014/main" id="{3FD487E9-93C8-43BC-900B-736E2AF1224C}"/>
+              </a:ext>
+            </a:extLst>
+          </p:cNvPr>
+          <p:cNvSpPr>
+            <a:spLocks xmlns:a="http://schemas.openxmlformats.org/drawingml/2006/main" noGrp="1"/>
+          </p:cNvSpPr>
+          <p:nvPr/>
+        </p:nvSpPr>
+        <p:spPr>
+          <a:xfrm xmlns:a="http://schemas.openxmlformats.org/drawingml/2006/main">
+            <a:off x="932688" y="3218688"/>
+            <a:ext cx="1463040" cy="347472"/>
+          </a:xfrm>
+          <a:prstGeom xmlns:a="http://schemas.openxmlformats.org/drawingml/2006/main" prst="rect">
+            <a:avLst/>
+          </a:prstGeom>
+          <a:noFill xmlns:a="http://schemas.openxmlformats.org/drawingml/2006/main"/>
+        </p:spPr>
+        <p:txBody>
+          <a:bodyPr xmlns:a="http://schemas.openxmlformats.org/drawingml/2006/main" wrap="square" lIns="0" tIns="0" rIns="0" bIns="0" anchor="ctr"/>
+          <a:lstStyle xmlns:a="http://schemas.openxmlformats.org/drawingml/2006/main"/>
+          <a:p xmlns:a="http://schemas.openxmlformats.org/drawingml/2006/main">
+            <a:pPr marL="0" indent="0">
+              <a:buNone/>
+            </a:pPr>
+            <a:r>
+              <a:rPr sz="1700" b="1">
+                <a:solidFill>
+                  <a:srgbClr val="0E1E3A"/>
+                </a:solidFill>
+                <a:latin typeface="Cambria"/>
+                <a:ea typeface="Cambria"/>
+                <a:cs typeface="Cambria"/>
+              </a:rPr>
+              <a:t>60 / 60</a:t>
+            </a:r>
+          </a:p>
+        </p:txBody>
+      </p:sp>
+      <p:sp>
+        <p:nvSpPr>
+          <p:cNvPr id="14" name="Text 12">
+            <a:extLst xmlns:a="http://schemas.openxmlformats.org/drawingml/2006/main">
+              <a:ext uri="{FF2B5EF4-FFF2-40B4-BE49-F238E27FC236}">
+                <a16:creationId xmlns:a16="http://schemas.microsoft.com/office/drawing/2014/main" id="{61CF3254-1B82-4165-992F-6D3C01344989}"/>
+              </a:ext>
+            </a:extLst>
+          </p:cNvPr>
+          <p:cNvSpPr>
+            <a:spLocks xmlns:a="http://schemas.openxmlformats.org/drawingml/2006/main" noGrp="1"/>
+          </p:cNvSpPr>
+          <p:nvPr/>
+        </p:nvSpPr>
+        <p:spPr>
+          <a:xfrm xmlns:a="http://schemas.openxmlformats.org/drawingml/2006/main">
+            <a:off x="2514600" y="3218688"/>
+            <a:ext cx="3078328" cy="347472"/>
+          </a:xfrm>
+          <a:prstGeom xmlns:a="http://schemas.openxmlformats.org/drawingml/2006/main" prst="rect">
+            <a:avLst/>
+          </a:prstGeom>
+          <a:noFill xmlns:a="http://schemas.openxmlformats.org/drawingml/2006/main"/>
+        </p:spPr>
+        <p:txBody>
+          <a:bodyPr xmlns:a="http://schemas.openxmlformats.org/drawingml/2006/main" wrap="square" lIns="0" tIns="0" rIns="0" bIns="0" anchor="ctr"/>
+          <a:lstStyle xmlns:a="http://schemas.openxmlformats.org/drawingml/2006/main"/>
+          <a:p xmlns:a="http://schemas.openxmlformats.org/drawingml/2006/main">
+            <a:pPr marL="0" indent="0">
+              <a:buNone/>
+            </a:pPr>
+            <a:r>
+              <a:rPr sz="1150">
+                <a:solidFill>
+                  <a:srgbClr val="24354F"/>
+                </a:solidFill>
+                <a:latin typeface="Calibri"/>
+                <a:ea typeface="Calibri"/>
+                <a:cs typeface="Calibri"/>
+              </a:rPr>
+              <a:t>fresh test records, every condition</a:t>
+            </a:r>
+          </a:p>
+        </p:txBody>
+      </p:sp>
+      <p:sp>
+        <p:nvSpPr>
+          <p:cNvPr id="15" name="Text 13">
+            <a:extLst xmlns:a="http://schemas.openxmlformats.org/drawingml/2006/main">
+              <a:ext uri="{FF2B5EF4-FFF2-40B4-BE49-F238E27FC236}">
+                <a16:creationId xmlns:a16="http://schemas.microsoft.com/office/drawing/2014/main" id="{4872DBF4-F948-4D75-A7BD-280E63BF11CE}"/>
+              </a:ext>
+            </a:extLst>
+          </p:cNvPr>
+          <p:cNvSpPr>
+            <a:spLocks xmlns:a="http://schemas.openxmlformats.org/drawingml/2006/main" noGrp="1"/>
+          </p:cNvSpPr>
+          <p:nvPr/>
+        </p:nvSpPr>
+        <p:spPr>
+          <a:xfrm xmlns:a="http://schemas.openxmlformats.org/drawingml/2006/main">
+            <a:off x="932688" y="3749040"/>
+            <a:ext cx="4687672" cy="694944"/>
+          </a:xfrm>
+          <a:prstGeom xmlns:a="http://schemas.openxmlformats.org/drawingml/2006/main" prst="rect">
+            <a:avLst/>
+          </a:prstGeom>
+          <a:noFill xmlns:a="http://schemas.openxmlformats.org/drawingml/2006/main"/>
+        </p:spPr>
+        <p:txBody>
+          <a:bodyPr xmlns:a="http://schemas.openxmlformats.org/drawingml/2006/main" wrap="square" lIns="0" tIns="0" rIns="0" bIns="0" anchor="t"/>
+          <a:lstStyle xmlns:a="http://schemas.openxmlformats.org/drawingml/2006/main"/>
+          <a:p xmlns:a="http://schemas.openxmlformats.org/drawingml/2006/main">
+            <a:pPr marL="0" indent="0">
+              <a:lnSpc>
+                <a:spcPct val="108000"/>
+              </a:lnSpc>
+              <a:buNone/>
+            </a:pPr>
+            <a:r>
+              <a:rPr sz="1100">
+                <a:solidFill>
+                  <a:srgbClr val="5A6B84"/>
+                </a:solidFill>
+                <a:latin typeface="Calibri"/>
+                <a:ea typeface="Calibri"/>
+                <a:cs typeface="Calibri"/>
+              </a:rPr>
+              <a:t>The first certificate whose event includes the model's answer. It covers open and merged pull requests: the calibration draw held no closed-unmerged ones.</a:t>
+            </a:r>
+          </a:p>
+        </p:txBody>
+      </p:sp>
+      <p:sp>
+        <p:nvSpPr>
+          <p:cNvPr id="16" name="Shape 14">
+            <a:extLst xmlns:a="http://schemas.openxmlformats.org/drawingml/2006/main">
+              <a:ext uri="{FF2B5EF4-FFF2-40B4-BE49-F238E27FC236}">
+                <a16:creationId xmlns:a16="http://schemas.microsoft.com/office/drawing/2014/main" id="{7168808E-70C4-4CD6-B364-546247F83C60}"/>
+              </a:ext>
+            </a:extLst>
+          </p:cNvPr>
+          <p:cNvSpPr>
+            <a:spLocks xmlns:a="http://schemas.openxmlformats.org/drawingml/2006/main" noGrp="1"/>
+          </p:cNvSpPr>
+          <p:nvPr/>
+        </p:nvSpPr>
+        <p:spPr>
+          <a:xfrm xmlns:a="http://schemas.openxmlformats.org/drawingml/2006/main">
+            <a:off x="6278728" y="1389888"/>
+            <a:ext cx="5272888" cy="3200400"/>
+          </a:xfrm>
+          <a:prstGeom xmlns:a="http://schemas.openxmlformats.org/drawingml/2006/main" prst="roundRect">
+            <a:avLst>
+              <a:gd name="adj" fmla="val 1429"/>
+            </a:avLst>
+          </a:prstGeom>
+          <a:solidFill xmlns:a="http://schemas.openxmlformats.org/drawingml/2006/main">
+            <a:srgbClr val="FBF0EC"/>
+          </a:solidFill>
+          <a:ln xmlns:a="http://schemas.openxmlformats.org/drawingml/2006/main" w="9525">
+            <a:solidFill>
+              <a:srgbClr val="EFDCD4"/>
+            </a:solidFill>
+            <a:prstDash val="solid"/>
+          </a:ln>
+          <a:effectLst xmlns:a="http://schemas.openxmlformats.org/drawingml/2006/main">
+            <a:outerShdw blurRad="114300" dist="17780" dir="5400000" algn="bl" rotWithShape="0">
+              <a:srgbClr val="94A6BC">
+                <a:alpha val="16000"/>
+              </a:srgbClr>
+            </a:outerShdw>
+          </a:effectLst>
+        </p:spPr>
+        <p:txBody>
+          <a:bodyPr xmlns:a="http://schemas.openxmlformats.org/drawingml/2006/main"/>
+          <a:lstStyle xmlns:a="http://schemas.openxmlformats.org/drawingml/2006/main"/>
+          <a:p xmlns:a="http://schemas.openxmlformats.org/drawingml/2006/main"/>
+        </p:txBody>
+      </p:sp>
+      <p:sp>
+        <p:nvSpPr>
+          <p:cNvPr id="17" name="Text 15">
+            <a:extLst xmlns:a="http://schemas.openxmlformats.org/drawingml/2006/main">
+              <a:ext uri="{FF2B5EF4-FFF2-40B4-BE49-F238E27FC236}">
+                <a16:creationId xmlns:a16="http://schemas.microsoft.com/office/drawing/2014/main" id="{1468FAB4-453B-4906-BF82-D9AEFC510B4C}"/>
+              </a:ext>
+            </a:extLst>
+          </p:cNvPr>
+          <p:cNvSpPr>
+            <a:spLocks xmlns:a="http://schemas.openxmlformats.org/drawingml/2006/main" noGrp="1"/>
+          </p:cNvSpPr>
+          <p:nvPr/>
+        </p:nvSpPr>
+        <p:spPr>
+          <a:xfrm xmlns:a="http://schemas.openxmlformats.org/drawingml/2006/main">
+            <a:off x="6571336" y="1572768"/>
+            <a:ext cx="4687672" cy="365760"/>
+          </a:xfrm>
+          <a:prstGeom xmlns:a="http://schemas.openxmlformats.org/drawingml/2006/main" prst="rect">
+            <a:avLst/>
+          </a:prstGeom>
+          <a:noFill xmlns:a="http://schemas.openxmlformats.org/drawingml/2006/main"/>
+        </p:spPr>
+        <p:txBody>
+          <a:bodyPr xmlns:a="http://schemas.openxmlformats.org/drawingml/2006/main" wrap="square" lIns="0" tIns="0" rIns="0" bIns="0" anchor="ctr"/>
+          <a:lstStyle xmlns:a="http://schemas.openxmlformats.org/drawingml/2006/main"/>
+          <a:p xmlns:a="http://schemas.openxmlformats.org/drawingml/2006/main">
+            <a:pPr marL="0" indent="0">
+              <a:buNone/>
+            </a:pPr>
+            <a:r>
+              <a:rPr sz="1800" b="1">
+                <a:solidFill>
+                  <a:srgbClr val="A93B2B"/>
+                </a:solidFill>
+                <a:latin typeface="Cambria"/>
+                <a:ea typeface="Cambria"/>
+                <a:cs typeface="Cambria"/>
+              </a:rPr>
+              <a:t>Primary certificates</a:t>
+            </a:r>
+          </a:p>
+        </p:txBody>
+      </p:sp>
+      <p:sp>
+        <p:nvSpPr>
+          <p:cNvPr id="18" name="Text 16">
+            <a:extLst xmlns:a="http://schemas.openxmlformats.org/drawingml/2006/main">
+              <a:ext uri="{FF2B5EF4-FFF2-40B4-BE49-F238E27FC236}">
+                <a16:creationId xmlns:a16="http://schemas.microsoft.com/office/drawing/2014/main" id="{805376D7-EBA9-41BB-B773-6D923BE40D43}"/>
+              </a:ext>
+            </a:extLst>
+          </p:cNvPr>
+          <p:cNvSpPr>
+            <a:spLocks xmlns:a="http://schemas.openxmlformats.org/drawingml/2006/main" noGrp="1"/>
+          </p:cNvSpPr>
+          <p:nvPr/>
+        </p:nvSpPr>
+        <p:spPr>
+          <a:xfrm xmlns:a="http://schemas.openxmlformats.org/drawingml/2006/main">
+            <a:off x="6571336" y="1938528"/>
+            <a:ext cx="4687672" cy="256032"/>
+          </a:xfrm>
+          <a:prstGeom xmlns:a="http://schemas.openxmlformats.org/drawingml/2006/main" prst="rect">
+            <a:avLst/>
+          </a:prstGeom>
+          <a:noFill xmlns:a="http://schemas.openxmlformats.org/drawingml/2006/main"/>
+        </p:spPr>
+        <p:txBody>
+          <a:bodyPr xmlns:a="http://schemas.openxmlformats.org/drawingml/2006/main" wrap="square" lIns="0" tIns="0" rIns="0" bIns="0" anchor="ctr"/>
+          <a:lstStyle xmlns:a="http://schemas.openxmlformats.org/drawingml/2006/main"/>
+          <a:p xmlns:a="http://schemas.openxmlformats.org/drawingml/2006/main">
+            <a:pPr marL="0" indent="0">
+              <a:buNone/>
+            </a:pPr>
+            <a:r>
+              <a:rPr sz="1100" i="1">
+                <a:solidFill>
+                  <a:srgbClr val="5A6B84"/>
+                </a:solidFill>
+                <a:latin typeface="Calibri"/>
+                <a:ea typeface="Calibri"/>
+                <a:cs typeface="Calibri"/>
+              </a:rPr>
+              <a:t>three GitHub families  ·  92 calibration groups each</a:t>
+            </a:r>
+          </a:p>
+        </p:txBody>
+      </p:sp>
+      <p:sp>
+        <p:nvSpPr>
+          <p:cNvPr id="19" name="Text 17">
+            <a:extLst xmlns:a="http://schemas.openxmlformats.org/drawingml/2006/main">
+              <a:ext uri="{FF2B5EF4-FFF2-40B4-BE49-F238E27FC236}">
+                <a16:creationId xmlns:a16="http://schemas.microsoft.com/office/drawing/2014/main" id="{FC761766-6B8C-450E-B680-91CDFB31C9B5}"/>
+              </a:ext>
+            </a:extLst>
+          </p:cNvPr>
+          <p:cNvSpPr>
+            <a:spLocks xmlns:a="http://schemas.openxmlformats.org/drawingml/2006/main" noGrp="1"/>
+          </p:cNvSpPr>
+          <p:nvPr/>
+        </p:nvSpPr>
+        <p:spPr>
+          <a:xfrm xmlns:a="http://schemas.openxmlformats.org/drawingml/2006/main">
+            <a:off x="6571336" y="2304288"/>
+            <a:ext cx="1463040" cy="347472"/>
+          </a:xfrm>
+          <a:prstGeom xmlns:a="http://schemas.openxmlformats.org/drawingml/2006/main" prst="rect">
+            <a:avLst/>
+          </a:prstGeom>
+          <a:noFill xmlns:a="http://schemas.openxmlformats.org/drawingml/2006/main"/>
+        </p:spPr>
+        <p:txBody>
+          <a:bodyPr xmlns:a="http://schemas.openxmlformats.org/drawingml/2006/main" wrap="square" lIns="0" tIns="0" rIns="0" bIns="0" anchor="ctr"/>
+          <a:lstStyle xmlns:a="http://schemas.openxmlformats.org/drawingml/2006/main"/>
+          <a:p xmlns:a="http://schemas.openxmlformats.org/drawingml/2006/main">
+            <a:pPr marL="0" indent="0">
+              <a:buNone/>
+            </a:pPr>
+            <a:r>
+              <a:rPr sz="1700" b="1">
+                <a:solidFill>
+                  <a:srgbClr val="A93B2B"/>
+                </a:solidFill>
+                <a:latin typeface="Cambria"/>
+                <a:ea typeface="Cambria"/>
+                <a:cs typeface="Cambria"/>
+              </a:rPr>
+              <a:t>92 / 92</a:t>
+            </a:r>
+          </a:p>
+        </p:txBody>
+      </p:sp>
+      <p:sp>
+        <p:nvSpPr>
+          <p:cNvPr id="20" name="Text 18">
+            <a:extLst xmlns:a="http://schemas.openxmlformats.org/drawingml/2006/main">
+              <a:ext uri="{FF2B5EF4-FFF2-40B4-BE49-F238E27FC236}">
+                <a16:creationId xmlns:a16="http://schemas.microsoft.com/office/drawing/2014/main" id="{EBE6FD2D-BEFD-4322-9823-9306EDFA3A16}"/>
+              </a:ext>
+            </a:extLst>
+          </p:cNvPr>
+          <p:cNvSpPr>
+            <a:spLocks xmlns:a="http://schemas.openxmlformats.org/drawingml/2006/main" noGrp="1"/>
+          </p:cNvSpPr>
+          <p:nvPr/>
+        </p:nvSpPr>
+        <p:spPr>
+          <a:xfrm xmlns:a="http://schemas.openxmlformats.org/drawingml/2006/main">
+            <a:off x="8153248" y="2304288"/>
+            <a:ext cx="3078328" cy="347472"/>
+          </a:xfrm>
+          <a:prstGeom xmlns:a="http://schemas.openxmlformats.org/drawingml/2006/main" prst="rect">
+            <a:avLst/>
+          </a:prstGeom>
+          <a:noFill xmlns:a="http://schemas.openxmlformats.org/drawingml/2006/main"/>
+        </p:spPr>
+        <p:txBody>
+          <a:bodyPr xmlns:a="http://schemas.openxmlformats.org/drawingml/2006/main" wrap="square" lIns="0" tIns="0" rIns="0" bIns="0" anchor="ctr"/>
+          <a:lstStyle xmlns:a="http://schemas.openxmlformats.org/drawingml/2006/main"/>
+          <a:p xmlns:a="http://schemas.openxmlformats.org/drawingml/2006/main">
+            <a:pPr marL="0" indent="0">
+              <a:buNone/>
+            </a:pPr>
+            <a:r>
+              <a:rPr sz="1150">
+                <a:solidFill>
+                  <a:srgbClr val="24354F"/>
+                </a:solidFill>
+                <a:latin typeface="Calibri"/>
+                <a:ea typeface="Calibri"/>
+                <a:cs typeface="Calibri"/>
+              </a:rPr>
+              <a:t>zero-violation calibration groups</a:t>
+            </a:r>
+          </a:p>
+        </p:txBody>
+      </p:sp>
+      <p:sp>
+        <p:nvSpPr>
+          <p:cNvPr id="21" name="Text 19">
+            <a:extLst xmlns:a="http://schemas.openxmlformats.org/drawingml/2006/main">
+              <a:ext uri="{FF2B5EF4-FFF2-40B4-BE49-F238E27FC236}">
+                <a16:creationId xmlns:a16="http://schemas.microsoft.com/office/drawing/2014/main" id="{B5780643-6688-49B6-8D80-A14D47E38BD3}"/>
+              </a:ext>
+            </a:extLst>
+          </p:cNvPr>
+          <p:cNvSpPr>
+            <a:spLocks xmlns:a="http://schemas.openxmlformats.org/drawingml/2006/main" noGrp="1"/>
+          </p:cNvSpPr>
+          <p:nvPr/>
+        </p:nvSpPr>
+        <p:spPr>
+          <a:xfrm xmlns:a="http://schemas.openxmlformats.org/drawingml/2006/main">
+            <a:off x="6571336" y="2761488"/>
+            <a:ext cx="1463040" cy="347472"/>
+          </a:xfrm>
+          <a:prstGeom xmlns:a="http://schemas.openxmlformats.org/drawingml/2006/main" prst="rect">
+            <a:avLst/>
+          </a:prstGeom>
+          <a:noFill xmlns:a="http://schemas.openxmlformats.org/drawingml/2006/main"/>
+        </p:spPr>
+        <p:txBody>
+          <a:bodyPr xmlns:a="http://schemas.openxmlformats.org/drawingml/2006/main" wrap="square" lIns="0" tIns="0" rIns="0" bIns="0" anchor="ctr"/>
+          <a:lstStyle xmlns:a="http://schemas.openxmlformats.org/drawingml/2006/main"/>
+          <a:p xmlns:a="http://schemas.openxmlformats.org/drawingml/2006/main">
+            <a:pPr marL="0" indent="0">
+              <a:buNone/>
+            </a:pPr>
+            <a:r>
+              <a:rPr sz="1700" b="1">
+                <a:solidFill>
+                  <a:srgbClr val="A93B2B"/>
+                </a:solidFill>
+                <a:latin typeface="Cambria"/>
+                <a:ea typeface="Cambria"/>
+                <a:cs typeface="Cambria"/>
+              </a:rPr>
+              <a:t>0.0498</a:t>
+            </a:r>
+          </a:p>
+        </p:txBody>
+      </p:sp>
+      <p:sp>
+        <p:nvSpPr>
+          <p:cNvPr id="22" name="Text 20">
+            <a:extLst xmlns:a="http://schemas.openxmlformats.org/drawingml/2006/main">
+              <a:ext uri="{FF2B5EF4-FFF2-40B4-BE49-F238E27FC236}">
+                <a16:creationId xmlns:a16="http://schemas.microsoft.com/office/drawing/2014/main" id="{AE4E6F47-A5EE-4349-84FD-EC51EE22BCE4}"/>
+              </a:ext>
+            </a:extLst>
+          </p:cNvPr>
+          <p:cNvSpPr>
+            <a:spLocks xmlns:a="http://schemas.openxmlformats.org/drawingml/2006/main" noGrp="1"/>
+          </p:cNvSpPr>
+          <p:nvPr/>
+        </p:nvSpPr>
+        <p:spPr>
+          <a:xfrm xmlns:a="http://schemas.openxmlformats.org/drawingml/2006/main">
+            <a:off x="8153248" y="2761488"/>
+            <a:ext cx="3078328" cy="347472"/>
+          </a:xfrm>
+          <a:prstGeom xmlns:a="http://schemas.openxmlformats.org/drawingml/2006/main" prst="rect">
+            <a:avLst/>
+          </a:prstGeom>
+          <a:noFill xmlns:a="http://schemas.openxmlformats.org/drawingml/2006/main"/>
+        </p:spPr>
+        <p:txBody>
+          <a:bodyPr xmlns:a="http://schemas.openxmlformats.org/drawingml/2006/main" wrap="square" lIns="0" tIns="0" rIns="0" bIns="0" anchor="ctr"/>
+          <a:lstStyle xmlns:a="http://schemas.openxmlformats.org/drawingml/2006/main"/>
+          <a:p xmlns:a="http://schemas.openxmlformats.org/drawingml/2006/main">
+            <a:pPr marL="0" indent="0">
+              <a:buNone/>
+            </a:pPr>
+            <a:r>
+              <a:rPr sz="1150">
+                <a:solidFill>
+                  <a:srgbClr val="24354F"/>
+                </a:solidFill>
+                <a:latin typeface="Calibri"/>
+                <a:ea typeface="Calibri"/>
+                <a:cs typeface="Calibri"/>
+              </a:rPr>
+              <a:t>upper bound against α = 0.05</a:t>
+            </a:r>
+          </a:p>
+        </p:txBody>
+      </p:sp>
+      <p:sp>
+        <p:nvSpPr>
+          <p:cNvPr id="23" name="Text 21">
+            <a:extLst xmlns:a="http://schemas.openxmlformats.org/drawingml/2006/main">
+              <a:ext uri="{FF2B5EF4-FFF2-40B4-BE49-F238E27FC236}">
+                <a16:creationId xmlns:a16="http://schemas.microsoft.com/office/drawing/2014/main" id="{8F71F11B-4A5E-4195-8084-37F3020BA653}"/>
+              </a:ext>
+            </a:extLst>
+          </p:cNvPr>
+          <p:cNvSpPr>
+            <a:spLocks xmlns:a="http://schemas.openxmlformats.org/drawingml/2006/main" noGrp="1"/>
+          </p:cNvSpPr>
+          <p:nvPr/>
+        </p:nvSpPr>
+        <p:spPr>
+          <a:xfrm xmlns:a="http://schemas.openxmlformats.org/drawingml/2006/main">
+            <a:off x="6571336" y="3218688"/>
+            <a:ext cx="1463040" cy="347472"/>
+          </a:xfrm>
+          <a:prstGeom xmlns:a="http://schemas.openxmlformats.org/drawingml/2006/main" prst="rect">
+            <a:avLst/>
+          </a:prstGeom>
+          <a:noFill xmlns:a="http://schemas.openxmlformats.org/drawingml/2006/main"/>
+        </p:spPr>
+        <p:txBody>
+          <a:bodyPr xmlns:a="http://schemas.openxmlformats.org/drawingml/2006/main" wrap="square" lIns="0" tIns="0" rIns="0" bIns="0" anchor="ctr"/>
+          <a:lstStyle xmlns:a="http://schemas.openxmlformats.org/drawingml/2006/main"/>
+          <a:p xmlns:a="http://schemas.openxmlformats.org/drawingml/2006/main">
+            <a:pPr marL="0" indent="0">
+              <a:buNone/>
+            </a:pPr>
+            <a:r>
+              <a:rPr sz="1700" b="1">
+                <a:solidFill>
+                  <a:srgbClr val="A93B2B"/>
+                </a:solidFill>
+                <a:latin typeface="Cambria"/>
+                <a:ea typeface="Cambria"/>
+                <a:cs typeface="Cambria"/>
+              </a:rPr>
+              <a:t>n ≥ 92</a:t>
+            </a:r>
+          </a:p>
+        </p:txBody>
+      </p:sp>
+      <p:sp>
+        <p:nvSpPr>
+          <p:cNvPr id="24" name="Text 22">
+            <a:extLst xmlns:a="http://schemas.openxmlformats.org/drawingml/2006/main">
+              <a:ext uri="{FF2B5EF4-FFF2-40B4-BE49-F238E27FC236}">
+                <a16:creationId xmlns:a16="http://schemas.microsoft.com/office/drawing/2014/main" id="{41487ECA-A561-4FFC-9B39-603EFDE0749D}"/>
+              </a:ext>
+            </a:extLst>
+          </p:cNvPr>
+          <p:cNvSpPr>
+            <a:spLocks xmlns:a="http://schemas.openxmlformats.org/drawingml/2006/main" noGrp="1"/>
+          </p:cNvSpPr>
+          <p:nvPr/>
+        </p:nvSpPr>
+        <p:spPr>
+          <a:xfrm xmlns:a="http://schemas.openxmlformats.org/drawingml/2006/main">
+            <a:off x="8153248" y="3218688"/>
+            <a:ext cx="3078328" cy="347472"/>
+          </a:xfrm>
+          <a:prstGeom xmlns:a="http://schemas.openxmlformats.org/drawingml/2006/main" prst="rect">
+            <a:avLst/>
+          </a:prstGeom>
+          <a:noFill xmlns:a="http://schemas.openxmlformats.org/drawingml/2006/main"/>
+        </p:spPr>
+        <p:txBody>
+          <a:bodyPr xmlns:a="http://schemas.openxmlformats.org/drawingml/2006/main" wrap="square" lIns="0" tIns="0" rIns="0" bIns="0" anchor="ctr"/>
+          <a:lstStyle xmlns:a="http://schemas.openxmlformats.org/drawingml/2006/main"/>
+          <a:p xmlns:a="http://schemas.openxmlformats.org/drawingml/2006/main">
+            <a:pPr marL="0" indent="0">
+              <a:buNone/>
+            </a:pPr>
+            <a:r>
+              <a:rPr sz="1150">
+                <a:solidFill>
+                  <a:srgbClr val="24354F"/>
+                </a:solidFill>
+                <a:latin typeface="Calibri"/>
+                <a:ea typeface="Calibri"/>
+                <a:cs typeface="Calibri"/>
+              </a:rPr>
+              <a:t>what the bound really certifies</a:t>
+            </a:r>
+          </a:p>
+        </p:txBody>
+      </p:sp>
+      <p:sp>
+        <p:nvSpPr>
+          <p:cNvPr id="25" name="Text 23">
+            <a:extLst xmlns:a="http://schemas.openxmlformats.org/drawingml/2006/main">
+              <a:ext uri="{FF2B5EF4-FFF2-40B4-BE49-F238E27FC236}">
+                <a16:creationId xmlns:a16="http://schemas.microsoft.com/office/drawing/2014/main" id="{7E12A923-8838-46B6-BE65-498B863BD457}"/>
+              </a:ext>
+            </a:extLst>
+          </p:cNvPr>
+          <p:cNvSpPr>
+            <a:spLocks xmlns:a="http://schemas.openxmlformats.org/drawingml/2006/main" noGrp="1"/>
+          </p:cNvSpPr>
+          <p:nvPr/>
+        </p:nvSpPr>
+        <p:spPr>
+          <a:xfrm xmlns:a="http://schemas.openxmlformats.org/drawingml/2006/main">
+            <a:off x="6571336" y="3749040"/>
+            <a:ext cx="4687672" cy="694944"/>
+          </a:xfrm>
+          <a:prstGeom xmlns:a="http://schemas.openxmlformats.org/drawingml/2006/main" prst="rect">
+            <a:avLst/>
+          </a:prstGeom>
+          <a:noFill xmlns:a="http://schemas.openxmlformats.org/drawingml/2006/main"/>
+        </p:spPr>
+        <p:txBody>
+          <a:bodyPr xmlns:a="http://schemas.openxmlformats.org/drawingml/2006/main" wrap="square" lIns="0" tIns="0" rIns="0" bIns="0" anchor="t"/>
+          <a:lstStyle xmlns:a="http://schemas.openxmlformats.org/drawingml/2006/main"/>
+          <a:p xmlns:a="http://schemas.openxmlformats.org/drawingml/2006/main">
+            <a:pPr marL="0" indent="0">
+              <a:lnSpc>
+                <a:spcPct val="108000"/>
+              </a:lnSpc>
+              <a:buNone/>
+            </a:pPr>
+            <a:r>
+              <a:rPr sz="1100">
+                <a:solidFill>
+                  <a:srgbClr val="5C4034"/>
+                </a:solidFill>
+                <a:latin typeface="Calibri"/>
+                <a:ea typeface="Calibri"/>
+                <a:cs typeface="Calibri"/>
+              </a:rPr>
+              <a:t>The replay-contract event has no support on these cohorts: arguments are invariant and reads deterministic, so the bound confirms enough examples, not an observed risk.</a:t>
+            </a:r>
+          </a:p>
+        </p:txBody>
+      </p:sp>
+      <p:sp>
+        <p:nvSpPr>
+          <p:cNvPr id="26" name="Shape 24">
+            <a:extLst xmlns:a="http://schemas.openxmlformats.org/drawingml/2006/main">
+              <a:ext uri="{FF2B5EF4-FFF2-40B4-BE49-F238E27FC236}">
+                <a16:creationId xmlns:a16="http://schemas.microsoft.com/office/drawing/2014/main" id="{C0BF981A-9E8F-494A-9AD0-98168DAA843F}"/>
+              </a:ext>
+            </a:extLst>
+          </p:cNvPr>
+          <p:cNvSpPr>
+            <a:spLocks xmlns:a="http://schemas.openxmlformats.org/drawingml/2006/main" noGrp="1"/>
+          </p:cNvSpPr>
+          <p:nvPr/>
+        </p:nvSpPr>
+        <p:spPr>
+          <a:xfrm xmlns:a="http://schemas.openxmlformats.org/drawingml/2006/main">
+            <a:off x="640080" y="4754880"/>
+            <a:ext cx="10911535" cy="1371600"/>
+          </a:xfrm>
+          <a:prstGeom xmlns:a="http://schemas.openxmlformats.org/drawingml/2006/main" prst="roundRect">
+            <a:avLst>
+              <a:gd name="adj" fmla="val 3333"/>
+            </a:avLst>
+          </a:prstGeom>
+          <a:solidFill xmlns:a="http://schemas.openxmlformats.org/drawingml/2006/main">
+            <a:srgbClr val="E8F4F5"/>
+          </a:solidFill>
+          <a:ln xmlns:a="http://schemas.openxmlformats.org/drawingml/2006/main" w="9525">
+            <a:solidFill>
+              <a:srgbClr val="CFE4E7"/>
+            </a:solidFill>
+            <a:prstDash val="solid"/>
+          </a:ln>
+          <a:effectLst xmlns:a="http://schemas.openxmlformats.org/drawingml/2006/main">
+            <a:outerShdw blurRad="114300" dist="17780" dir="5400000" algn="bl" rotWithShape="0">
+              <a:srgbClr val="94A6BC">
+                <a:alpha val="16000"/>
+              </a:srgbClr>
+            </a:outerShdw>
+          </a:effectLst>
+        </p:spPr>
+        <p:txBody>
+          <a:bodyPr xmlns:a="http://schemas.openxmlformats.org/drawingml/2006/main"/>
+          <a:lstStyle xmlns:a="http://schemas.openxmlformats.org/drawingml/2006/main"/>
+          <a:p xmlns:a="http://schemas.openxmlformats.org/drawingml/2006/main"/>
+        </p:txBody>
+      </p:sp>
+      <p:sp>
+        <p:nvSpPr>
+          <p:cNvPr id="27" name="Shape 25">
+            <a:extLst xmlns:a="http://schemas.openxmlformats.org/drawingml/2006/main">
+              <a:ext uri="{FF2B5EF4-FFF2-40B4-BE49-F238E27FC236}">
+                <a16:creationId xmlns:a16="http://schemas.microsoft.com/office/drawing/2014/main" id="{A8D5D3DB-7228-4C64-BB37-2C16FCEA1A88}"/>
+              </a:ext>
+            </a:extLst>
+          </p:cNvPr>
+          <p:cNvSpPr>
+            <a:spLocks xmlns:a="http://schemas.openxmlformats.org/drawingml/2006/main" noGrp="1"/>
+          </p:cNvSpPr>
+          <p:nvPr/>
+        </p:nvSpPr>
+        <p:spPr>
+          <a:xfrm xmlns:a="http://schemas.openxmlformats.org/drawingml/2006/main">
+            <a:off x="914400" y="4956048"/>
+            <a:ext cx="384048" cy="384048"/>
+          </a:xfrm>
+          <a:prstGeom xmlns:a="http://schemas.openxmlformats.org/drawingml/2006/main" prst="ellipse">
+            <a:avLst/>
+          </a:prstGeom>
+          <a:solidFill xmlns:a="http://schemas.openxmlformats.org/drawingml/2006/main">
+            <a:srgbClr val="1F8A99"/>
+          </a:solidFill>
+          <a:ln xmlns:a="http://schemas.openxmlformats.org/drawingml/2006/main" w="6350">
+            <a:solidFill>
+              <a:srgbClr val="1F8A99"/>
+            </a:solidFill>
+            <a:prstDash val="solid"/>
+          </a:ln>
+        </p:spPr>
+        <p:txBody>
+          <a:bodyPr xmlns:a="http://schemas.openxmlformats.org/drawingml/2006/main"/>
+          <a:lstStyle xmlns:a="http://schemas.openxmlformats.org/drawingml/2006/main"/>
+          <a:p xmlns:a="http://schemas.openxmlformats.org/drawingml/2006/main"/>
+        </p:txBody>
+      </p:sp>
+      <p:sp>
+        <p:nvSpPr>
+          <p:cNvPr id="28" name="Text 26">
+            <a:extLst xmlns:a="http://schemas.openxmlformats.org/drawingml/2006/main">
+              <a:ext uri="{FF2B5EF4-FFF2-40B4-BE49-F238E27FC236}">
+                <a16:creationId xmlns:a16="http://schemas.microsoft.com/office/drawing/2014/main" id="{8DBCF72E-4F10-4B08-8087-4D76EC613F69}"/>
+              </a:ext>
+            </a:extLst>
+          </p:cNvPr>
+          <p:cNvSpPr>
+            <a:spLocks xmlns:a="http://schemas.openxmlformats.org/drawingml/2006/main" noGrp="1"/>
+          </p:cNvSpPr>
+          <p:nvPr/>
+        </p:nvSpPr>
+        <p:spPr>
+          <a:xfrm xmlns:a="http://schemas.openxmlformats.org/drawingml/2006/main">
+            <a:off x="914400" y="4956048"/>
+            <a:ext cx="384048" cy="384048"/>
+          </a:xfrm>
+          <a:prstGeom xmlns:a="http://schemas.openxmlformats.org/drawingml/2006/main" prst="rect">
+            <a:avLst/>
+          </a:prstGeom>
+          <a:noFill xmlns:a="http://schemas.openxmlformats.org/drawingml/2006/main"/>
+        </p:spPr>
+        <p:txBody>
+          <a:bodyPr xmlns:a="http://schemas.openxmlformats.org/drawingml/2006/main" wrap="square" lIns="0" tIns="0" rIns="0" bIns="0" anchor="ctr"/>
+          <a:lstStyle xmlns:a="http://schemas.openxmlformats.org/drawingml/2006/main"/>
+          <a:p xmlns:a="http://schemas.openxmlformats.org/drawingml/2006/main">
+            <a:pPr marL="0" indent="0" algn="ctr">
+              <a:buNone/>
+            </a:pPr>
+            <a:r>
+              <a:rPr sz="1300" b="1">
+                <a:solidFill>
+                  <a:srgbClr val="FFFFFF"/>
+                </a:solidFill>
+                <a:latin typeface="Calibri"/>
+                <a:ea typeface="Calibri"/>
+                <a:cs typeface="Calibri"/>
+              </a:rPr>
+              <a:t>!</a:t>
+            </a:r>
+          </a:p>
+        </p:txBody>
+      </p:sp>
+      <p:sp>
+        <p:nvSpPr>
+          <p:cNvPr id="29" name="Text 27">
+            <a:extLst xmlns:a="http://schemas.openxmlformats.org/drawingml/2006/main">
+              <a:ext uri="{FF2B5EF4-FFF2-40B4-BE49-F238E27FC236}">
+                <a16:creationId xmlns:a16="http://schemas.microsoft.com/office/drawing/2014/main" id="{E55FC436-6B16-4308-9F0A-60AB237C51A1}"/>
+              </a:ext>
+            </a:extLst>
+          </p:cNvPr>
+          <p:cNvSpPr>
+            <a:spLocks xmlns:a="http://schemas.openxmlformats.org/drawingml/2006/main" noGrp="1"/>
+          </p:cNvSpPr>
+          <p:nvPr/>
+        </p:nvSpPr>
+        <p:spPr>
+          <a:xfrm xmlns:a="http://schemas.openxmlformats.org/drawingml/2006/main">
+            <a:off x="1463040" y="4919472"/>
+            <a:ext cx="9814255" cy="310896"/>
+          </a:xfrm>
+          <a:prstGeom xmlns:a="http://schemas.openxmlformats.org/drawingml/2006/main" prst="rect">
+            <a:avLst/>
+          </a:prstGeom>
+          <a:noFill xmlns:a="http://schemas.openxmlformats.org/drawingml/2006/main"/>
+        </p:spPr>
+        <p:txBody>
+          <a:bodyPr xmlns:a="http://schemas.openxmlformats.org/drawingml/2006/main" wrap="square" lIns="0" tIns="0" rIns="0" bIns="0" anchor="ctr"/>
+          <a:lstStyle xmlns:a="http://schemas.openxmlformats.org/drawingml/2006/main"/>
+          <a:p xmlns:a="http://schemas.openxmlformats.org/drawingml/2006/main">
+            <a:pPr marL="0" indent="0">
+              <a:buNone/>
+            </a:pPr>
+            <a:r>
+              <a:rPr sz="1400" b="1">
+                <a:solidFill>
+                  <a:srgbClr val="0E1E3A"/>
+                </a:solidFill>
+                <a:latin typeface="Cambria"/>
+                <a:ea typeface="Cambria"/>
+                <a:cs typeface="Cambria"/>
+              </a:rPr>
+              <a:t>Same programs on a second model and a second provider; no protection under drift</a:t>
+            </a:r>
+          </a:p>
+        </p:txBody>
+      </p:sp>
+      <p:sp>
+        <p:nvSpPr>
+          <p:cNvPr id="30" name="Text 28">
+            <a:extLst xmlns:a="http://schemas.openxmlformats.org/drawingml/2006/main">
+              <a:ext uri="{FF2B5EF4-FFF2-40B4-BE49-F238E27FC236}">
+                <a16:creationId xmlns:a16="http://schemas.microsoft.com/office/drawing/2014/main" id="{C9547E57-0BC7-4666-B445-08D84357BB7A}"/>
+              </a:ext>
+            </a:extLst>
+          </p:cNvPr>
+          <p:cNvSpPr>
+            <a:spLocks xmlns:a="http://schemas.openxmlformats.org/drawingml/2006/main" noGrp="1"/>
+          </p:cNvSpPr>
+          <p:nvPr/>
+        </p:nvSpPr>
+        <p:spPr>
+          <a:xfrm xmlns:a="http://schemas.openxmlformats.org/drawingml/2006/main">
+            <a:off x="1463040" y="5266944"/>
+            <a:ext cx="9722815" cy="749808"/>
+          </a:xfrm>
+          <a:prstGeom xmlns:a="http://schemas.openxmlformats.org/drawingml/2006/main" prst="rect">
+            <a:avLst/>
+          </a:prstGeom>
+          <a:noFill xmlns:a="http://schemas.openxmlformats.org/drawingml/2006/main"/>
+        </p:spPr>
+        <p:txBody>
+          <a:bodyPr xmlns:a="http://schemas.openxmlformats.org/drawingml/2006/main" wrap="square" lIns="0" tIns="0" rIns="0" bIns="0" anchor="ctr"/>
+          <a:lstStyle xmlns:a="http://schemas.openxmlformats.org/drawingml/2006/main"/>
+          <a:p xmlns:a="http://schemas.openxmlformats.org/drawingml/2006/main">
+            <a:pPr marL="0" indent="0">
+              <a:lnSpc>
+                <a:spcPct val="106000"/>
+              </a:lnSpc>
+              <a:buNone/>
+            </a:pPr>
+            <a:r>
+              <a:rPr sz="1150">
+                <a:solidFill>
+                  <a:srgbClr val="24354F"/>
+                </a:solidFill>
+                <a:latin typeface="Calibri"/>
+                <a:ea typeface="Calibri"/>
+                <a:cs typeface="Calibri"/>
+              </a:rPr>
+              <a:t>Re-discovery on gpt-6-luna and Claude Sonnet re-derives the identical programs on two of three GitHub families and refuses backlog routing (on Sonnet at 91 and 90 of 92 groups). Under tool-layer drift the run-time checks prevented no wrong answer: both arms answered wrongly on 39 of 60 records.</a:t>
+            </a:r>
+          </a:p>
+        </p:txBody>
+      </p:sp>
+    </p:spTree>
+    <p:extLst>
+      <p:ext uri="{BB962C8B-B14F-4D97-AF65-F5344CB8AC3E}">
+        <p14:creationId xmlns:p14="http://schemas.microsoft.com/office/powerpoint/2010/main" val="2014152445"/>
+      </p:ext>
+    </p:extLst>
+  </p:cSld>
+</p:sld>
+</file>
+
+<file path=ppt/slides/slide29.xml><?xml version="1.0" encoding="utf-8"?>
+<p:sld xmlns:p="http://schemas.openxmlformats.org/presentationml/2006/main">
+  <p:cSld>
+    <p:bg>
+      <p:bgPr>
+        <a:solidFill xmlns:a="http://schemas.openxmlformats.org/drawingml/2006/main">
+          <a:srgbClr val="FFFFFF"/>
+        </a:solidFill>
+      </p:bgPr>
+    </p:bg>
+    <p:spTree>
+      <p:nvGrpSpPr>
+        <p:cNvPr id="1" name=""/>
+        <p:cNvGrpSpPr/>
+        <p:nvPr/>
+      </p:nvGrpSpPr>
+      <p:grpSpPr>
+        <a:xfrm xmlns:a="http://schemas.openxmlformats.org/drawingml/2006/main"/>
+      </p:grpSpPr>
+      <p:sp>
+        <p:nvSpPr>
+          <p:cNvPr id="2" name="Text 0">
+            <a:extLst xmlns:a="http://schemas.openxmlformats.org/drawingml/2006/main">
+              <a:ext uri="{FF2B5EF4-FFF2-40B4-BE49-F238E27FC236}">
+                <a16:creationId xmlns:a16="http://schemas.microsoft.com/office/drawing/2014/main" id="{AE47B6A8-C54A-48F2-AF52-BB28FB3E879F}"/>
+              </a:ext>
+            </a:extLst>
+          </p:cNvPr>
+          <p:cNvSpPr>
+            <a:spLocks xmlns:a="http://schemas.openxmlformats.org/drawingml/2006/main" noGrp="1"/>
+          </p:cNvSpPr>
+          <p:nvPr/>
+        </p:nvSpPr>
+        <p:spPr>
+          <a:xfrm xmlns:a="http://schemas.openxmlformats.org/drawingml/2006/main">
+            <a:off x="640080" y="6345936"/>
+            <a:ext cx="5486400" cy="256032"/>
+          </a:xfrm>
+          <a:prstGeom xmlns:a="http://schemas.openxmlformats.org/drawingml/2006/main" prst="rect">
+            <a:avLst/>
+          </a:prstGeom>
+          <a:noFill xmlns:a="http://schemas.openxmlformats.org/drawingml/2006/main"/>
+        </p:spPr>
+        <p:txBody>
+          <a:bodyPr xmlns:a="http://schemas.openxmlformats.org/drawingml/2006/main" wrap="square" lIns="0" tIns="0" rIns="0" bIns="0" anchor="t"/>
+          <a:lstStyle xmlns:a="http://schemas.openxmlformats.org/drawingml/2006/main"/>
+          <a:p xmlns:a="http://schemas.openxmlformats.org/drawingml/2006/main">
+            <a:pPr marL="0" indent="0">
+              <a:buNone/>
+            </a:pPr>
+            <a:r>
+              <a:rPr sz="900" spc="100">
+                <a:solidFill>
+                  <a:srgbClr val="A3B2C4"/>
+                </a:solidFill>
+                <a:latin typeface="Calibri"/>
+                <a:ea typeface="Calibri"/>
+                <a:cs typeface="Calibri"/>
+              </a:rPr>
+              <a:t>Guarded Agentic Compaction</a:t>
+            </a:r>
+          </a:p>
+        </p:txBody>
+      </p:sp>
+      <p:sp>
+        <p:nvSpPr>
+          <p:cNvPr id="3" name="Text 1">
+            <a:extLst xmlns:a="http://schemas.openxmlformats.org/drawingml/2006/main">
+              <a:ext uri="{FF2B5EF4-FFF2-40B4-BE49-F238E27FC236}">
+                <a16:creationId xmlns:a16="http://schemas.microsoft.com/office/drawing/2014/main" id="{F33FCA74-061A-4D5D-AE36-35CFBE430BE6}"/>
+              </a:ext>
+            </a:extLst>
+          </p:cNvPr>
+          <p:cNvSpPr>
+            <a:spLocks xmlns:a="http://schemas.openxmlformats.org/drawingml/2006/main" noGrp="1"/>
+          </p:cNvSpPr>
+          <p:nvPr/>
+        </p:nvSpPr>
+        <p:spPr>
+          <a:xfrm xmlns:a="http://schemas.openxmlformats.org/drawingml/2006/main">
+            <a:off x="10637215" y="6345936"/>
+            <a:ext cx="914400" cy="256032"/>
+          </a:xfrm>
+          <a:prstGeom xmlns:a="http://schemas.openxmlformats.org/drawingml/2006/main" prst="rect">
+            <a:avLst/>
+          </a:prstGeom>
+          <a:noFill xmlns:a="http://schemas.openxmlformats.org/drawingml/2006/main"/>
+        </p:spPr>
+        <p:txBody>
+          <a:bodyPr xmlns:a="http://schemas.openxmlformats.org/drawingml/2006/main" wrap="square" lIns="0" tIns="0" rIns="0" bIns="0" anchor="t"/>
+          <a:lstStyle xmlns:a="http://schemas.openxmlformats.org/drawingml/2006/main"/>
+          <a:p xmlns:a="http://schemas.openxmlformats.org/drawingml/2006/main">
+            <a:pPr marL="0" indent="0" algn="r">
+              <a:buNone/>
+            </a:pPr>
+            <a:r>
+              <a:rPr sz="900">
+                <a:solidFill>
+                  <a:srgbClr val="A3B2C4"/>
+                </a:solidFill>
+                <a:latin typeface="Calibri"/>
+                <a:ea typeface="Calibri"/>
+                <a:cs typeface="Calibri"/>
+              </a:rPr>
+              <a:t>23</a:t>
+            </a:r>
+          </a:p>
+        </p:txBody>
+      </p:sp>
+      <p:sp>
+        <p:nvSpPr>
+          <p:cNvPr id="4" name="Text 2">
+            <a:extLst xmlns:a="http://schemas.openxmlformats.org/drawingml/2006/main">
+              <a:ext uri="{FF2B5EF4-FFF2-40B4-BE49-F238E27FC236}">
+                <a16:creationId xmlns:a16="http://schemas.microsoft.com/office/drawing/2014/main" id="{6AC227C5-2480-4274-800D-B03E803DBC12}"/>
+              </a:ext>
+            </a:extLst>
+          </p:cNvPr>
+          <p:cNvSpPr>
+            <a:spLocks xmlns:a="http://schemas.openxmlformats.org/drawingml/2006/main" noGrp="1"/>
+          </p:cNvSpPr>
+          <p:nvPr/>
+        </p:nvSpPr>
+        <p:spPr>
+          <a:xfrm xmlns:a="http://schemas.openxmlformats.org/drawingml/2006/main">
+            <a:off x="640080" y="384048"/>
+            <a:ext cx="10911535" cy="237744"/>
+          </a:xfrm>
+          <a:prstGeom xmlns:a="http://schemas.openxmlformats.org/drawingml/2006/main" prst="rect">
+            <a:avLst/>
+          </a:prstGeom>
+          <a:noFill xmlns:a="http://schemas.openxmlformats.org/drawingml/2006/main"/>
+        </p:spPr>
+        <p:txBody>
+          <a:bodyPr xmlns:a="http://schemas.openxmlformats.org/drawingml/2006/main" wrap="square" lIns="0" tIns="0" rIns="0" bIns="0" anchor="t"/>
+          <a:lstStyle xmlns:a="http://schemas.openxmlformats.org/drawingml/2006/main"/>
+          <a:p xmlns:a="http://schemas.openxmlformats.org/drawingml/2006/main">
+            <a:pPr marL="0" indent="0">
+              <a:buNone/>
+            </a:pPr>
+            <a:r>
+              <a:rPr sz="1050" b="1" spc="180">
+                <a:solidFill>
+                  <a:srgbClr val="1F8A99"/>
+                </a:solidFill>
+                <a:latin typeface="Calibri"/>
+                <a:ea typeface="Calibri"/>
+                <a:cs typeface="Calibri"/>
+              </a:rPr>
+              <a:t>RESULTS  ·  WHERE GAC YIELDS NO MEASURED BENEFIT</a:t>
+            </a:r>
+          </a:p>
+        </p:txBody>
+      </p:sp>
+      <p:sp>
+        <p:nvSpPr>
+          <p:cNvPr id="5" name="Text 3">
+            <a:extLst xmlns:a="http://schemas.openxmlformats.org/drawingml/2006/main">
+              <a:ext uri="{FF2B5EF4-FFF2-40B4-BE49-F238E27FC236}">
+                <a16:creationId xmlns:a16="http://schemas.microsoft.com/office/drawing/2014/main" id="{BFAD9DD3-AA36-4893-A274-2A83980B4360}"/>
+              </a:ext>
+            </a:extLst>
+          </p:cNvPr>
+          <p:cNvSpPr>
+            <a:spLocks xmlns:a="http://schemas.openxmlformats.org/drawingml/2006/main" noGrp="1"/>
+          </p:cNvSpPr>
+          <p:nvPr/>
+        </p:nvSpPr>
+        <p:spPr>
+          <a:xfrm xmlns:a="http://schemas.openxmlformats.org/drawingml/2006/main">
+            <a:off x="640080" y="658368"/>
+            <a:ext cx="10911535" cy="502920"/>
+          </a:xfrm>
+          <a:prstGeom xmlns:a="http://schemas.openxmlformats.org/drawingml/2006/main" prst="rect">
+            <a:avLst/>
+          </a:prstGeom>
+          <a:noFill xmlns:a="http://schemas.openxmlformats.org/drawingml/2006/main"/>
+        </p:spPr>
+        <p:txBody>
+          <a:bodyPr xmlns:a="http://schemas.openxmlformats.org/drawingml/2006/main" wrap="square" lIns="0" tIns="0" rIns="0" bIns="0" anchor="t"/>
+          <a:lstStyle xmlns:a="http://schemas.openxmlformats.org/drawingml/2006/main"/>
+          <a:p xmlns:a="http://schemas.openxmlformats.org/drawingml/2006/main">
+            <a:pPr marL="0" indent="0">
+              <a:buNone/>
+            </a:pPr>
+            <a:r>
+              <a:rPr sz="2600" b="1">
+                <a:solidFill>
+                  <a:srgbClr val="0E1E3A"/>
+                </a:solidFill>
+                <a:latin typeface="Cambria"/>
+                <a:ea typeface="Cambria"/>
+                <a:cs typeface="Cambria"/>
+              </a:rPr>
+              <a:t>Where GAC yields no measured benefit</a:t>
+            </a:r>
+          </a:p>
+        </p:txBody>
+      </p:sp>
+      <p:sp>
+        <p:nvSpPr>
+          <p:cNvPr id="6" name="Shape 4">
+            <a:extLst xmlns:a="http://schemas.openxmlformats.org/drawingml/2006/main">
+              <a:ext uri="{FF2B5EF4-FFF2-40B4-BE49-F238E27FC236}">
+                <a16:creationId xmlns:a16="http://schemas.microsoft.com/office/drawing/2014/main" id="{A7CCC68F-BA39-4940-B211-3362266BF39F}"/>
+              </a:ext>
+            </a:extLst>
+          </p:cNvPr>
+          <p:cNvSpPr>
+            <a:spLocks xmlns:a="http://schemas.openxmlformats.org/drawingml/2006/main" noGrp="1"/>
+          </p:cNvSpPr>
+          <p:nvPr/>
+        </p:nvSpPr>
+        <p:spPr>
+          <a:xfrm xmlns:a="http://schemas.openxmlformats.org/drawingml/2006/main">
+            <a:off x="640080" y="1389888"/>
+            <a:ext cx="5272888" cy="3200400"/>
+          </a:xfrm>
+          <a:prstGeom xmlns:a="http://schemas.openxmlformats.org/drawingml/2006/main" prst="roundRect">
+            <a:avLst>
+              <a:gd name="adj" fmla="val 1429"/>
+            </a:avLst>
+          </a:prstGeom>
+          <a:solidFill xmlns:a="http://schemas.openxmlformats.org/drawingml/2006/main">
+            <a:srgbClr val="F5F9FC"/>
+          </a:solidFill>
+          <a:ln xmlns:a="http://schemas.openxmlformats.org/drawingml/2006/main" w="9525">
+            <a:solidFill>
+              <a:srgbClr val="D5E0EB"/>
+            </a:solidFill>
+            <a:prstDash val="solid"/>
+          </a:ln>
+          <a:effectLst xmlns:a="http://schemas.openxmlformats.org/drawingml/2006/main">
+            <a:outerShdw blurRad="114300" dist="17780" dir="5400000" algn="bl" rotWithShape="0">
+              <a:srgbClr val="94A6BC">
+                <a:alpha val="16000"/>
+              </a:srgbClr>
+            </a:outerShdw>
+          </a:effectLst>
+        </p:spPr>
+        <p:txBody>
+          <a:bodyPr xmlns:a="http://schemas.openxmlformats.org/drawingml/2006/main"/>
+          <a:lstStyle xmlns:a="http://schemas.openxmlformats.org/drawingml/2006/main"/>
+          <a:p xmlns:a="http://schemas.openxmlformats.org/drawingml/2006/main"/>
+        </p:txBody>
+      </p:sp>
+      <p:sp>
+        <p:nvSpPr>
+          <p:cNvPr id="7" name="Text 5">
+            <a:extLst xmlns:a="http://schemas.openxmlformats.org/drawingml/2006/main">
+              <a:ext uri="{FF2B5EF4-FFF2-40B4-BE49-F238E27FC236}">
+                <a16:creationId xmlns:a16="http://schemas.microsoft.com/office/drawing/2014/main" id="{2FE5721D-EB4D-4AB2-AA8C-0C3F4706131C}"/>
+              </a:ext>
+            </a:extLst>
+          </p:cNvPr>
+          <p:cNvSpPr>
+            <a:spLocks xmlns:a="http://schemas.openxmlformats.org/drawingml/2006/main" noGrp="1"/>
+          </p:cNvSpPr>
+          <p:nvPr/>
+        </p:nvSpPr>
+        <p:spPr>
+          <a:xfrm xmlns:a="http://schemas.openxmlformats.org/drawingml/2006/main">
+            <a:off x="932688" y="1572768"/>
+            <a:ext cx="4687672" cy="365760"/>
+          </a:xfrm>
+          <a:prstGeom xmlns:a="http://schemas.openxmlformats.org/drawingml/2006/main" prst="rect">
+            <a:avLst/>
+          </a:prstGeom>
+          <a:noFill xmlns:a="http://schemas.openxmlformats.org/drawingml/2006/main"/>
+        </p:spPr>
+        <p:txBody>
+          <a:bodyPr xmlns:a="http://schemas.openxmlformats.org/drawingml/2006/main" wrap="square" lIns="0" tIns="0" rIns="0" bIns="0" anchor="ctr"/>
+          <a:lstStyle xmlns:a="http://schemas.openxmlformats.org/drawingml/2006/main"/>
+          <a:p xmlns:a="http://schemas.openxmlformats.org/drawingml/2006/main">
+            <a:pPr marL="0" indent="0">
+              <a:buNone/>
+            </a:pPr>
+            <a:r>
+              <a:rPr sz="1800" b="1">
+                <a:solidFill>
+                  <a:srgbClr val="0E1E3A"/>
+                </a:solidFill>
+                <a:latin typeface="Cambria"/>
+                <a:ea typeface="Cambria"/>
+                <a:cs typeface="Cambria"/>
+              </a:rPr>
+              <a:t>NESTFUL</a:t>
+            </a:r>
+          </a:p>
+        </p:txBody>
+      </p:sp>
+      <p:sp>
+        <p:nvSpPr>
+          <p:cNvPr id="8" name="Text 6">
+            <a:extLst xmlns:a="http://schemas.openxmlformats.org/drawingml/2006/main">
+              <a:ext uri="{FF2B5EF4-FFF2-40B4-BE49-F238E27FC236}">
+                <a16:creationId xmlns:a16="http://schemas.microsoft.com/office/drawing/2014/main" id="{5A1F2CE0-A89F-4754-B59D-A9B10798FDED}"/>
+              </a:ext>
+            </a:extLst>
+          </p:cNvPr>
+          <p:cNvSpPr>
+            <a:spLocks xmlns:a="http://schemas.openxmlformats.org/drawingml/2006/main" noGrp="1"/>
+          </p:cNvSpPr>
+          <p:nvPr/>
+        </p:nvSpPr>
+        <p:spPr>
+          <a:xfrm xmlns:a="http://schemas.openxmlformats.org/drawingml/2006/main">
+            <a:off x="932688" y="1938528"/>
+            <a:ext cx="4687672" cy="256032"/>
+          </a:xfrm>
+          <a:prstGeom xmlns:a="http://schemas.openxmlformats.org/drawingml/2006/main" prst="rect">
+            <a:avLst/>
+          </a:prstGeom>
+          <a:noFill xmlns:a="http://schemas.openxmlformats.org/drawingml/2006/main"/>
+        </p:spPr>
+        <p:txBody>
+          <a:bodyPr xmlns:a="http://schemas.openxmlformats.org/drawingml/2006/main" wrap="square" lIns="0" tIns="0" rIns="0" bIns="0" anchor="ctr"/>
+          <a:lstStyle xmlns:a="http://schemas.openxmlformats.org/drawingml/2006/main"/>
+          <a:p xmlns:a="http://schemas.openxmlformats.org/drawingml/2006/main">
+            <a:pPr marL="0" indent="0">
+              <a:buNone/>
+            </a:pPr>
+            <a:r>
+              <a:rPr sz="1100" i="1">
+                <a:solidFill>
+                  <a:srgbClr val="5A6B84"/>
+                </a:solidFill>
+                <a:latin typeface="Calibri"/>
+                <a:ea typeface="Calibri"/>
+                <a:cs typeface="Calibri"/>
+              </a:rPr>
+              <a:t>1,415 executable traces  ·  32 recurring families</a:t>
+            </a:r>
+          </a:p>
+        </p:txBody>
+      </p:sp>
+      <p:sp>
+        <p:nvSpPr>
+          <p:cNvPr id="9" name="Text 7">
+            <a:extLst xmlns:a="http://schemas.openxmlformats.org/drawingml/2006/main">
+              <a:ext uri="{FF2B5EF4-FFF2-40B4-BE49-F238E27FC236}">
+                <a16:creationId xmlns:a16="http://schemas.microsoft.com/office/drawing/2014/main" id="{AF2C8D84-5695-4D5C-AFFC-BD4171D5FEDD}"/>
+              </a:ext>
+            </a:extLst>
+          </p:cNvPr>
+          <p:cNvSpPr>
+            <a:spLocks xmlns:a="http://schemas.openxmlformats.org/drawingml/2006/main" noGrp="1"/>
+          </p:cNvSpPr>
+          <p:nvPr/>
+        </p:nvSpPr>
+        <p:spPr>
+          <a:xfrm xmlns:a="http://schemas.openxmlformats.org/drawingml/2006/main">
+            <a:off x="932688" y="2304288"/>
+            <a:ext cx="1463040" cy="347472"/>
+          </a:xfrm>
+          <a:prstGeom xmlns:a="http://schemas.openxmlformats.org/drawingml/2006/main" prst="rect">
+            <a:avLst/>
+          </a:prstGeom>
+          <a:noFill xmlns:a="http://schemas.openxmlformats.org/drawingml/2006/main"/>
+        </p:spPr>
+        <p:txBody>
+          <a:bodyPr xmlns:a="http://schemas.openxmlformats.org/drawingml/2006/main" wrap="square" lIns="0" tIns="0" rIns="0" bIns="0" anchor="ctr"/>
+          <a:lstStyle xmlns:a="http://schemas.openxmlformats.org/drawingml/2006/main"/>
+          <a:p xmlns:a="http://schemas.openxmlformats.org/drawingml/2006/main">
+            <a:pPr marL="0" indent="0">
+              <a:buNone/>
+            </a:pPr>
+            <a:r>
+              <a:rPr sz="1700" b="1">
+                <a:solidFill>
+                  <a:srgbClr val="0E1E3A"/>
+                </a:solidFill>
+                <a:latin typeface="Cambria"/>
+                <a:ea typeface="Cambria"/>
+                <a:cs typeface="Cambria"/>
+              </a:rPr>
+              <a:t>26</a:t>
+            </a:r>
+          </a:p>
+        </p:txBody>
+      </p:sp>
+      <p:sp>
+        <p:nvSpPr>
+          <p:cNvPr id="10" name="Text 8">
+            <a:extLst xmlns:a="http://schemas.openxmlformats.org/drawingml/2006/main">
+              <a:ext uri="{FF2B5EF4-FFF2-40B4-BE49-F238E27FC236}">
+                <a16:creationId xmlns:a16="http://schemas.microsoft.com/office/drawing/2014/main" id="{B16CBFF6-53C2-4D61-ACF3-CCE7B768A217}"/>
+              </a:ext>
+            </a:extLst>
+          </p:cNvPr>
+          <p:cNvSpPr>
+            <a:spLocks xmlns:a="http://schemas.openxmlformats.org/drawingml/2006/main" noGrp="1"/>
+          </p:cNvSpPr>
+          <p:nvPr/>
+        </p:nvSpPr>
+        <p:spPr>
+          <a:xfrm xmlns:a="http://schemas.openxmlformats.org/drawingml/2006/main">
+            <a:off x="2514600" y="2304288"/>
+            <a:ext cx="3078328" cy="347472"/>
+          </a:xfrm>
+          <a:prstGeom xmlns:a="http://schemas.openxmlformats.org/drawingml/2006/main" prst="rect">
+            <a:avLst/>
+          </a:prstGeom>
+          <a:noFill xmlns:a="http://schemas.openxmlformats.org/drawingml/2006/main"/>
+        </p:spPr>
+        <p:txBody>
+          <a:bodyPr xmlns:a="http://schemas.openxmlformats.org/drawingml/2006/main" wrap="square" lIns="0" tIns="0" rIns="0" bIns="0" anchor="ctr"/>
+          <a:lstStyle xmlns:a="http://schemas.openxmlformats.org/drawingml/2006/main"/>
+          <a:p xmlns:a="http://schemas.openxmlformats.org/drawingml/2006/main">
+            <a:pPr marL="0" indent="0">
+              <a:buNone/>
+            </a:pPr>
+            <a:r>
+              <a:rPr sz="1150">
+                <a:solidFill>
+                  <a:srgbClr val="24354F"/>
+                </a:solidFill>
+                <a:latin typeface="Calibri"/>
+                <a:ea typeface="Calibri"/>
+                <a:cs typeface="Calibri"/>
+              </a:rPr>
+              <a:t>largest family support</a:t>
+            </a:r>
+          </a:p>
+        </p:txBody>
+      </p:sp>
+      <p:sp>
+        <p:nvSpPr>
+          <p:cNvPr id="11" name="Text 9">
+            <a:extLst xmlns:a="http://schemas.openxmlformats.org/drawingml/2006/main">
+              <a:ext uri="{FF2B5EF4-FFF2-40B4-BE49-F238E27FC236}">
+                <a16:creationId xmlns:a16="http://schemas.microsoft.com/office/drawing/2014/main" id="{AF2B94A8-A190-4DBE-89F0-EE106BFD200D}"/>
+              </a:ext>
+            </a:extLst>
+          </p:cNvPr>
+          <p:cNvSpPr>
+            <a:spLocks xmlns:a="http://schemas.openxmlformats.org/drawingml/2006/main" noGrp="1"/>
+          </p:cNvSpPr>
+          <p:nvPr/>
+        </p:nvSpPr>
+        <p:spPr>
+          <a:xfrm xmlns:a="http://schemas.openxmlformats.org/drawingml/2006/main">
+            <a:off x="932688" y="2761488"/>
+            <a:ext cx="1463040" cy="347472"/>
+          </a:xfrm>
+          <a:prstGeom xmlns:a="http://schemas.openxmlformats.org/drawingml/2006/main" prst="rect">
+            <a:avLst/>
+          </a:prstGeom>
+          <a:noFill xmlns:a="http://schemas.openxmlformats.org/drawingml/2006/main"/>
+        </p:spPr>
+        <p:txBody>
+          <a:bodyPr xmlns:a="http://schemas.openxmlformats.org/drawingml/2006/main" wrap="square" lIns="0" tIns="0" rIns="0" bIns="0" anchor="ctr"/>
+          <a:lstStyle xmlns:a="http://schemas.openxmlformats.org/drawingml/2006/main"/>
+          <a:p xmlns:a="http://schemas.openxmlformats.org/drawingml/2006/main">
+            <a:pPr marL="0" indent="0">
+              <a:buNone/>
+            </a:pPr>
+            <a:r>
+              <a:rPr sz="1700" b="1">
+                <a:solidFill>
+                  <a:srgbClr val="0E1E3A"/>
+                </a:solidFill>
+                <a:latin typeface="Cambria"/>
+                <a:ea typeface="Cambria"/>
+                <a:cs typeface="Cambria"/>
+              </a:rPr>
+              <a:t>92</a:t>
+            </a:r>
+          </a:p>
+        </p:txBody>
+      </p:sp>
+      <p:sp>
+        <p:nvSpPr>
+          <p:cNvPr id="12" name="Text 10">
+            <a:extLst xmlns:a="http://schemas.openxmlformats.org/drawingml/2006/main">
+              <a:ext uri="{FF2B5EF4-FFF2-40B4-BE49-F238E27FC236}">
+                <a16:creationId xmlns:a16="http://schemas.microsoft.com/office/drawing/2014/main" id="{0B82FCCC-13A3-4FE1-A986-C83EBE50D60D}"/>
+              </a:ext>
+            </a:extLst>
+          </p:cNvPr>
+          <p:cNvSpPr>
+            <a:spLocks xmlns:a="http://schemas.openxmlformats.org/drawingml/2006/main" noGrp="1"/>
+          </p:cNvSpPr>
+          <p:nvPr/>
+        </p:nvSpPr>
+        <p:spPr>
+          <a:xfrm xmlns:a="http://schemas.openxmlformats.org/drawingml/2006/main">
+            <a:off x="2514600" y="2761488"/>
+            <a:ext cx="3078328" cy="347472"/>
+          </a:xfrm>
+          <a:prstGeom xmlns:a="http://schemas.openxmlformats.org/drawingml/2006/main" prst="rect">
+            <a:avLst/>
+          </a:prstGeom>
+          <a:noFill xmlns:a="http://schemas.openxmlformats.org/drawingml/2006/main"/>
+        </p:spPr>
+        <p:txBody>
+          <a:bodyPr xmlns:a="http://schemas.openxmlformats.org/drawingml/2006/main" wrap="square" lIns="0" tIns="0" rIns="0" bIns="0" anchor="ctr"/>
+          <a:lstStyle xmlns:a="http://schemas.openxmlformats.org/drawingml/2006/main"/>
+          <a:p xmlns:a="http://schemas.openxmlformats.org/drawingml/2006/main">
+            <a:pPr marL="0" indent="0">
+              <a:buNone/>
+            </a:pPr>
+            <a:r>
+              <a:rPr sz="1150">
+                <a:solidFill>
+                  <a:srgbClr val="24354F"/>
+                </a:solidFill>
+                <a:latin typeface="Calibri"/>
+                <a:ea typeface="Calibri"/>
+                <a:cs typeface="Calibri"/>
+              </a:rPr>
+              <a:t>zero-violation groups the gate requires</a:t>
+            </a:r>
+          </a:p>
+        </p:txBody>
+      </p:sp>
+      <p:sp>
+        <p:nvSpPr>
+          <p:cNvPr id="13" name="Text 11">
+            <a:extLst xmlns:a="http://schemas.openxmlformats.org/drawingml/2006/main">
+              <a:ext uri="{FF2B5EF4-FFF2-40B4-BE49-F238E27FC236}">
+                <a16:creationId xmlns:a16="http://schemas.microsoft.com/office/drawing/2014/main" id="{3FD487E9-93C8-43BC-900B-736E2AF1224C}"/>
+              </a:ext>
+            </a:extLst>
+          </p:cNvPr>
+          <p:cNvSpPr>
+            <a:spLocks xmlns:a="http://schemas.openxmlformats.org/drawingml/2006/main" noGrp="1"/>
+          </p:cNvSpPr>
+          <p:nvPr/>
+        </p:nvSpPr>
+        <p:spPr>
+          <a:xfrm xmlns:a="http://schemas.openxmlformats.org/drawingml/2006/main">
+            <a:off x="932688" y="3218688"/>
+            <a:ext cx="1463040" cy="347472"/>
+          </a:xfrm>
+          <a:prstGeom xmlns:a="http://schemas.openxmlformats.org/drawingml/2006/main" prst="rect">
+            <a:avLst/>
+          </a:prstGeom>
+          <a:noFill xmlns:a="http://schemas.openxmlformats.org/drawingml/2006/main"/>
+        </p:spPr>
+        <p:txBody>
+          <a:bodyPr xmlns:a="http://schemas.openxmlformats.org/drawingml/2006/main" wrap="square" lIns="0" tIns="0" rIns="0" bIns="0" anchor="ctr"/>
+          <a:lstStyle xmlns:a="http://schemas.openxmlformats.org/drawingml/2006/main"/>
+          <a:p xmlns:a="http://schemas.openxmlformats.org/drawingml/2006/main">
+            <a:pPr marL="0" indent="0">
+              <a:buNone/>
+            </a:pPr>
+            <a:r>
+              <a:rPr sz="1700" b="1">
+                <a:solidFill>
+                  <a:srgbClr val="0E1E3A"/>
+                </a:solidFill>
+                <a:latin typeface="Cambria"/>
+                <a:ea typeface="Cambria"/>
+                <a:cs typeface="Cambria"/>
+              </a:rPr>
+              <a:t>0 / 32</a:t>
+            </a:r>
+          </a:p>
+        </p:txBody>
+      </p:sp>
+      <p:sp>
+        <p:nvSpPr>
+          <p:cNvPr id="14" name="Text 12">
+            <a:extLst xmlns:a="http://schemas.openxmlformats.org/drawingml/2006/main">
+              <a:ext uri="{FF2B5EF4-FFF2-40B4-BE49-F238E27FC236}">
+                <a16:creationId xmlns:a16="http://schemas.microsoft.com/office/drawing/2014/main" id="{61CF3254-1B82-4165-992F-6D3C01344989}"/>
+              </a:ext>
+            </a:extLst>
+          </p:cNvPr>
+          <p:cNvSpPr>
+            <a:spLocks xmlns:a="http://schemas.openxmlformats.org/drawingml/2006/main" noGrp="1"/>
+          </p:cNvSpPr>
+          <p:nvPr/>
+        </p:nvSpPr>
+        <p:spPr>
+          <a:xfrm xmlns:a="http://schemas.openxmlformats.org/drawingml/2006/main">
+            <a:off x="2514600" y="3218688"/>
+            <a:ext cx="3078328" cy="347472"/>
+          </a:xfrm>
+          <a:prstGeom xmlns:a="http://schemas.openxmlformats.org/drawingml/2006/main" prst="rect">
+            <a:avLst/>
+          </a:prstGeom>
+          <a:noFill xmlns:a="http://schemas.openxmlformats.org/drawingml/2006/main"/>
+        </p:spPr>
+        <p:txBody>
+          <a:bodyPr xmlns:a="http://schemas.openxmlformats.org/drawingml/2006/main" wrap="square" lIns="0" tIns="0" rIns="0" bIns="0" anchor="ctr"/>
+          <a:lstStyle xmlns:a="http://schemas.openxmlformats.org/drawingml/2006/main"/>
+          <a:p xmlns:a="http://schemas.openxmlformats.org/drawingml/2006/main">
+            <a:pPr marL="0" indent="0">
+              <a:buNone/>
+            </a:pPr>
+            <a:r>
+              <a:rPr sz="1150">
+                <a:solidFill>
+                  <a:srgbClr val="24354F"/>
+                </a:solidFill>
+                <a:latin typeface="Calibri"/>
+                <a:ea typeface="Calibri"/>
+                <a:cs typeface="Calibri"/>
+              </a:rPr>
+              <a:t>families admitted; no wrong execution</a:t>
+            </a:r>
+          </a:p>
+        </p:txBody>
+      </p:sp>
+      <p:sp>
+        <p:nvSpPr>
+          <p:cNvPr id="15" name="Text 13">
+            <a:extLst xmlns:a="http://schemas.openxmlformats.org/drawingml/2006/main">
+              <a:ext uri="{FF2B5EF4-FFF2-40B4-BE49-F238E27FC236}">
+                <a16:creationId xmlns:a16="http://schemas.microsoft.com/office/drawing/2014/main" id="{4872DBF4-F948-4D75-A7BD-280E63BF11CE}"/>
+              </a:ext>
+            </a:extLst>
+          </p:cNvPr>
+          <p:cNvSpPr>
+            <a:spLocks xmlns:a="http://schemas.openxmlformats.org/drawingml/2006/main" noGrp="1"/>
+          </p:cNvSpPr>
+          <p:nvPr/>
+        </p:nvSpPr>
+        <p:spPr>
+          <a:xfrm xmlns:a="http://schemas.openxmlformats.org/drawingml/2006/main">
+            <a:off x="932688" y="3749040"/>
+            <a:ext cx="4687672" cy="694944"/>
+          </a:xfrm>
+          <a:prstGeom xmlns:a="http://schemas.openxmlformats.org/drawingml/2006/main" prst="rect">
+            <a:avLst/>
+          </a:prstGeom>
+          <a:noFill xmlns:a="http://schemas.openxmlformats.org/drawingml/2006/main"/>
+        </p:spPr>
+        <p:txBody>
+          <a:bodyPr xmlns:a="http://schemas.openxmlformats.org/drawingml/2006/main" wrap="square" lIns="0" tIns="0" rIns="0" bIns="0" anchor="t"/>
+          <a:lstStyle xmlns:a="http://schemas.openxmlformats.org/drawingml/2006/main"/>
+          <a:p xmlns:a="http://schemas.openxmlformats.org/drawingml/2006/main">
+            <a:pPr marL="0" indent="0">
+              <a:lnSpc>
+                <a:spcPct val="108000"/>
+              </a:lnSpc>
+              <a:buNone/>
+            </a:pPr>
+            <a:r>
+              <a:rPr sz="1100">
+                <a:solidFill>
+                  <a:srgbClr val="5A6B84"/>
+                </a:solidFill>
+                <a:latin typeface="Calibri"/>
+                <a:ea typeface="Calibri"/>
+                <a:cs typeface="Calibri"/>
+              </a:rPr>
+              <a:t>Evidence too thin: every family passes provenance, synthesis, and replay, then retires at the gate. API-Bank (8) and BFCL v4 (15) retire the same way.</a:t>
+            </a:r>
+          </a:p>
+        </p:txBody>
+      </p:sp>
+      <p:sp>
+        <p:nvSpPr>
+          <p:cNvPr id="16" name="Shape 14">
+            <a:extLst xmlns:a="http://schemas.openxmlformats.org/drawingml/2006/main">
+              <a:ext uri="{FF2B5EF4-FFF2-40B4-BE49-F238E27FC236}">
+                <a16:creationId xmlns:a16="http://schemas.microsoft.com/office/drawing/2014/main" id="{7168808E-70C4-4CD6-B364-546247F83C60}"/>
+              </a:ext>
+            </a:extLst>
+          </p:cNvPr>
+          <p:cNvSpPr>
+            <a:spLocks xmlns:a="http://schemas.openxmlformats.org/drawingml/2006/main" noGrp="1"/>
+          </p:cNvSpPr>
+          <p:nvPr/>
+        </p:nvSpPr>
+        <p:spPr>
+          <a:xfrm xmlns:a="http://schemas.openxmlformats.org/drawingml/2006/main">
+            <a:off x="6278728" y="1389888"/>
+            <a:ext cx="5272888" cy="3200400"/>
+          </a:xfrm>
+          <a:prstGeom xmlns:a="http://schemas.openxmlformats.org/drawingml/2006/main" prst="roundRect">
+            <a:avLst>
+              <a:gd name="adj" fmla="val 1429"/>
+            </a:avLst>
+          </a:prstGeom>
+          <a:solidFill xmlns:a="http://schemas.openxmlformats.org/drawingml/2006/main">
+            <a:srgbClr val="FBF0EC"/>
+          </a:solidFill>
+          <a:ln xmlns:a="http://schemas.openxmlformats.org/drawingml/2006/main" w="9525">
+            <a:solidFill>
+              <a:srgbClr val="EFDCD4"/>
+            </a:solidFill>
+            <a:prstDash val="solid"/>
+          </a:ln>
+          <a:effectLst xmlns:a="http://schemas.openxmlformats.org/drawingml/2006/main">
+            <a:outerShdw blurRad="114300" dist="17780" dir="5400000" algn="bl" rotWithShape="0">
+              <a:srgbClr val="94A6BC">
+                <a:alpha val="16000"/>
+              </a:srgbClr>
+            </a:outerShdw>
+          </a:effectLst>
+        </p:spPr>
+        <p:txBody>
+          <a:bodyPr xmlns:a="http://schemas.openxmlformats.org/drawingml/2006/main"/>
+          <a:lstStyle xmlns:a="http://schemas.openxmlformats.org/drawingml/2006/main"/>
+          <a:p xmlns:a="http://schemas.openxmlformats.org/drawingml/2006/main"/>
+        </p:txBody>
+      </p:sp>
+      <p:sp>
+        <p:nvSpPr>
+          <p:cNvPr id="17" name="Text 15">
+            <a:extLst xmlns:a="http://schemas.openxmlformats.org/drawingml/2006/main">
+              <a:ext uri="{FF2B5EF4-FFF2-40B4-BE49-F238E27FC236}">
+                <a16:creationId xmlns:a16="http://schemas.microsoft.com/office/drawing/2014/main" id="{1468FAB4-453B-4906-BF82-D9AEFC510B4C}"/>
+              </a:ext>
+            </a:extLst>
+          </p:cNvPr>
+          <p:cNvSpPr>
+            <a:spLocks xmlns:a="http://schemas.openxmlformats.org/drawingml/2006/main" noGrp="1"/>
+          </p:cNvSpPr>
+          <p:nvPr/>
+        </p:nvSpPr>
+        <p:spPr>
+          <a:xfrm xmlns:a="http://schemas.openxmlformats.org/drawingml/2006/main">
+            <a:off x="6571336" y="1572768"/>
+            <a:ext cx="4687672" cy="365760"/>
+          </a:xfrm>
+          <a:prstGeom xmlns:a="http://schemas.openxmlformats.org/drawingml/2006/main" prst="rect">
+            <a:avLst/>
+          </a:prstGeom>
+          <a:noFill xmlns:a="http://schemas.openxmlformats.org/drawingml/2006/main"/>
+        </p:spPr>
+        <p:txBody>
+          <a:bodyPr xmlns:a="http://schemas.openxmlformats.org/drawingml/2006/main" wrap="square" lIns="0" tIns="0" rIns="0" bIns="0" anchor="ctr"/>
+          <a:lstStyle xmlns:a="http://schemas.openxmlformats.org/drawingml/2006/main"/>
+          <a:p xmlns:a="http://schemas.openxmlformats.org/drawingml/2006/main">
+            <a:pPr marL="0" indent="0">
+              <a:buNone/>
+            </a:pPr>
+            <a:r>
+              <a:rPr sz="1800" b="1">
+                <a:solidFill>
+                  <a:srgbClr val="A93B2B"/>
+                </a:solidFill>
+                <a:latin typeface="Cambria"/>
+                <a:ea typeface="Cambria"/>
+                <a:cs typeface="Cambria"/>
+              </a:rPr>
+              <a:t>AppWorld</a:t>
+            </a:r>
+          </a:p>
+        </p:txBody>
+      </p:sp>
+      <p:sp>
+        <p:nvSpPr>
+          <p:cNvPr id="18" name="Text 16">
+            <a:extLst xmlns:a="http://schemas.openxmlformats.org/drawingml/2006/main">
+              <a:ext uri="{FF2B5EF4-FFF2-40B4-BE49-F238E27FC236}">
+                <a16:creationId xmlns:a16="http://schemas.microsoft.com/office/drawing/2014/main" id="{805376D7-EBA9-41BB-B773-6D923BE40D43}"/>
+              </a:ext>
+            </a:extLst>
+          </p:cNvPr>
+          <p:cNvSpPr>
+            <a:spLocks xmlns:a="http://schemas.openxmlformats.org/drawingml/2006/main" noGrp="1"/>
+          </p:cNvSpPr>
+          <p:nvPr/>
+        </p:nvSpPr>
+        <p:spPr>
+          <a:xfrm xmlns:a="http://schemas.openxmlformats.org/drawingml/2006/main">
+            <a:off x="6571336" y="1938528"/>
+            <a:ext cx="4687672" cy="256032"/>
+          </a:xfrm>
+          <a:prstGeom xmlns:a="http://schemas.openxmlformats.org/drawingml/2006/main" prst="rect">
+            <a:avLst/>
+          </a:prstGeom>
+          <a:noFill xmlns:a="http://schemas.openxmlformats.org/drawingml/2006/main"/>
+        </p:spPr>
+        <p:txBody>
+          <a:bodyPr xmlns:a="http://schemas.openxmlformats.org/drawingml/2006/main" wrap="square" lIns="0" tIns="0" rIns="0" bIns="0" anchor="ctr"/>
+          <a:lstStyle xmlns:a="http://schemas.openxmlformats.org/drawingml/2006/main"/>
+          <a:p xmlns:a="http://schemas.openxmlformats.org/drawingml/2006/main">
+            <a:pPr marL="0" indent="0">
+              <a:buNone/>
+            </a:pPr>
+            <a:r>
+              <a:rPr sz="1100" i="1">
+                <a:solidFill>
+                  <a:srgbClr val="5A6B84"/>
+                </a:solidFill>
+                <a:latin typeface="Calibri"/>
+                <a:ea typeface="Calibri"/>
+                <a:cs typeface="Calibri"/>
+              </a:rPr>
+              <a:t>gold solutions  ·  8,190 released agent runs</a:t>
+            </a:r>
+          </a:p>
+        </p:txBody>
+      </p:sp>
+      <p:sp>
+        <p:nvSpPr>
+          <p:cNvPr id="19" name="Text 17">
+            <a:extLst xmlns:a="http://schemas.openxmlformats.org/drawingml/2006/main">
+              <a:ext uri="{FF2B5EF4-FFF2-40B4-BE49-F238E27FC236}">
+                <a16:creationId xmlns:a16="http://schemas.microsoft.com/office/drawing/2014/main" id="{FC761766-6B8C-450E-B680-91CDFB31C9B5}"/>
+              </a:ext>
+            </a:extLst>
+          </p:cNvPr>
+          <p:cNvSpPr>
+            <a:spLocks xmlns:a="http://schemas.openxmlformats.org/drawingml/2006/main" noGrp="1"/>
+          </p:cNvSpPr>
+          <p:nvPr/>
+        </p:nvSpPr>
+        <p:spPr>
+          <a:xfrm xmlns:a="http://schemas.openxmlformats.org/drawingml/2006/main">
+            <a:off x="6571336" y="2304288"/>
+            <a:ext cx="1463040" cy="347472"/>
+          </a:xfrm>
+          <a:prstGeom xmlns:a="http://schemas.openxmlformats.org/drawingml/2006/main" prst="rect">
+            <a:avLst/>
+          </a:prstGeom>
+          <a:noFill xmlns:a="http://schemas.openxmlformats.org/drawingml/2006/main"/>
+        </p:spPr>
+        <p:txBody>
+          <a:bodyPr xmlns:a="http://schemas.openxmlformats.org/drawingml/2006/main" wrap="square" lIns="0" tIns="0" rIns="0" bIns="0" anchor="ctr"/>
+          <a:lstStyle xmlns:a="http://schemas.openxmlformats.org/drawingml/2006/main"/>
+          <a:p xmlns:a="http://schemas.openxmlformats.org/drawingml/2006/main">
+            <a:pPr marL="0" indent="0">
+              <a:buNone/>
+            </a:pPr>
+            <a:r>
+              <a:rPr sz="1700" b="1">
+                <a:solidFill>
+                  <a:srgbClr val="A93B2B"/>
+                </a:solidFill>
+                <a:latin typeface="Cambria"/>
+                <a:ea typeface="Cambria"/>
+                <a:cs typeface="Cambria"/>
+              </a:rPr>
+              <a:t>92 / 92</a:t>
+            </a:r>
+          </a:p>
+        </p:txBody>
+      </p:sp>
+      <p:sp>
+        <p:nvSpPr>
+          <p:cNvPr id="20" name="Text 18">
+            <a:extLst xmlns:a="http://schemas.openxmlformats.org/drawingml/2006/main">
+              <a:ext uri="{FF2B5EF4-FFF2-40B4-BE49-F238E27FC236}">
+                <a16:creationId xmlns:a16="http://schemas.microsoft.com/office/drawing/2014/main" id="{EBE6FD2D-BEFD-4322-9823-9306EDFA3A16}"/>
+              </a:ext>
+            </a:extLst>
+          </p:cNvPr>
+          <p:cNvSpPr>
+            <a:spLocks xmlns:a="http://schemas.openxmlformats.org/drawingml/2006/main" noGrp="1"/>
+          </p:cNvSpPr>
+          <p:nvPr/>
+        </p:nvSpPr>
+        <p:spPr>
+          <a:xfrm xmlns:a="http://schemas.openxmlformats.org/drawingml/2006/main">
+            <a:off x="8153248" y="2304288"/>
+            <a:ext cx="3078328" cy="347472"/>
+          </a:xfrm>
+          <a:prstGeom xmlns:a="http://schemas.openxmlformats.org/drawingml/2006/main" prst="rect">
+            <a:avLst/>
+          </a:prstGeom>
+          <a:noFill xmlns:a="http://schemas.openxmlformats.org/drawingml/2006/main"/>
+        </p:spPr>
+        <p:txBody>
+          <a:bodyPr xmlns:a="http://schemas.openxmlformats.org/drawingml/2006/main" wrap="square" lIns="0" tIns="0" rIns="0" bIns="0" anchor="ctr"/>
+          <a:lstStyle xmlns:a="http://schemas.openxmlformats.org/drawingml/2006/main"/>
+          <a:p xmlns:a="http://schemas.openxmlformats.org/drawingml/2006/main">
+            <a:pPr marL="0" indent="0">
+              <a:buNone/>
+            </a:pPr>
+            <a:r>
+              <a:rPr sz="1150">
+                <a:solidFill>
+                  <a:srgbClr val="24354F"/>
+                </a:solidFill>
+                <a:latin typeface="Calibri"/>
+                <a:ea typeface="Calibri"/>
+                <a:cs typeface="Calibri"/>
+              </a:rPr>
+              <a:t>one two-call artifact admitted</a:t>
+            </a:r>
+          </a:p>
+        </p:txBody>
+      </p:sp>
+      <p:sp>
+        <p:nvSpPr>
+          <p:cNvPr id="21" name="Text 19">
+            <a:extLst xmlns:a="http://schemas.openxmlformats.org/drawingml/2006/main">
+              <a:ext uri="{FF2B5EF4-FFF2-40B4-BE49-F238E27FC236}">
+                <a16:creationId xmlns:a16="http://schemas.microsoft.com/office/drawing/2014/main" id="{B5780643-6688-49B6-8D80-A14D47E38BD3}"/>
+              </a:ext>
+            </a:extLst>
+          </p:cNvPr>
+          <p:cNvSpPr>
+            <a:spLocks xmlns:a="http://schemas.openxmlformats.org/drawingml/2006/main" noGrp="1"/>
+          </p:cNvSpPr>
+          <p:nvPr/>
+        </p:nvSpPr>
+        <p:spPr>
+          <a:xfrm xmlns:a="http://schemas.openxmlformats.org/drawingml/2006/main">
+            <a:off x="6571336" y="2761488"/>
+            <a:ext cx="1463040" cy="347472"/>
+          </a:xfrm>
+          <a:prstGeom xmlns:a="http://schemas.openxmlformats.org/drawingml/2006/main" prst="rect">
+            <a:avLst/>
+          </a:prstGeom>
+          <a:noFill xmlns:a="http://schemas.openxmlformats.org/drawingml/2006/main"/>
+        </p:spPr>
+        <p:txBody>
+          <a:bodyPr xmlns:a="http://schemas.openxmlformats.org/drawingml/2006/main" wrap="square" lIns="0" tIns="0" rIns="0" bIns="0" anchor="ctr"/>
+          <a:lstStyle xmlns:a="http://schemas.openxmlformats.org/drawingml/2006/main"/>
+          <a:p xmlns:a="http://schemas.openxmlformats.org/drawingml/2006/main">
+            <a:pPr marL="0" indent="0">
+              <a:buNone/>
+            </a:pPr>
+            <a:r>
+              <a:rPr sz="1700" b="1">
+                <a:solidFill>
+                  <a:srgbClr val="A93B2B"/>
+                </a:solidFill>
+                <a:latin typeface="Cambria"/>
+                <a:ea typeface="Cambria"/>
+                <a:cs typeface="Cambria"/>
+              </a:rPr>
+              <a:t>2,339/2,340</a:t>
+            </a:r>
+          </a:p>
+        </p:txBody>
+      </p:sp>
+      <p:sp>
+        <p:nvSpPr>
+          <p:cNvPr id="22" name="Text 20">
+            <a:extLst xmlns:a="http://schemas.openxmlformats.org/drawingml/2006/main">
+              <a:ext uri="{FF2B5EF4-FFF2-40B4-BE49-F238E27FC236}">
+                <a16:creationId xmlns:a16="http://schemas.microsoft.com/office/drawing/2014/main" id="{AE4E6F47-A5EE-4349-84FD-EC51EE22BCE4}"/>
+              </a:ext>
+            </a:extLst>
+          </p:cNvPr>
+          <p:cNvSpPr>
+            <a:spLocks xmlns:a="http://schemas.openxmlformats.org/drawingml/2006/main" noGrp="1"/>
+          </p:cNvSpPr>
+          <p:nvPr/>
+        </p:nvSpPr>
+        <p:spPr>
+          <a:xfrm xmlns:a="http://schemas.openxmlformats.org/drawingml/2006/main">
+            <a:off x="8153248" y="2761488"/>
+            <a:ext cx="3078328" cy="347472"/>
+          </a:xfrm>
+          <a:prstGeom xmlns:a="http://schemas.openxmlformats.org/drawingml/2006/main" prst="rect">
+            <a:avLst/>
+          </a:prstGeom>
+          <a:noFill xmlns:a="http://schemas.openxmlformats.org/drawingml/2006/main"/>
+        </p:spPr>
+        <p:txBody>
+          <a:bodyPr xmlns:a="http://schemas.openxmlformats.org/drawingml/2006/main" wrap="square" lIns="0" tIns="0" rIns="0" bIns="0" anchor="ctr"/>
+          <a:lstStyle xmlns:a="http://schemas.openxmlformats.org/drawingml/2006/main"/>
+          <a:p xmlns:a="http://schemas.openxmlformats.org/drawingml/2006/main">
+            <a:pPr marL="0" indent="0">
+              <a:buNone/>
+            </a:pPr>
+            <a:r>
+              <a:rPr sz="1150">
+                <a:solidFill>
+                  <a:srgbClr val="24354F"/>
+                </a:solidFill>
+                <a:latin typeface="Calibri"/>
+                <a:ea typeface="Calibri"/>
+                <a:cs typeface="Calibri"/>
+              </a:rPr>
+              <a:t>full-code runs that could use it</a:t>
+            </a:r>
+          </a:p>
+        </p:txBody>
+      </p:sp>
+      <p:sp>
+        <p:nvSpPr>
+          <p:cNvPr id="23" name="Text 21">
+            <a:extLst xmlns:a="http://schemas.openxmlformats.org/drawingml/2006/main">
+              <a:ext uri="{FF2B5EF4-FFF2-40B4-BE49-F238E27FC236}">
+                <a16:creationId xmlns:a16="http://schemas.microsoft.com/office/drawing/2014/main" id="{8F71F11B-4A5E-4195-8084-37F3020BA653}"/>
+              </a:ext>
+            </a:extLst>
+          </p:cNvPr>
+          <p:cNvSpPr>
+            <a:spLocks xmlns:a="http://schemas.openxmlformats.org/drawingml/2006/main" noGrp="1"/>
+          </p:cNvSpPr>
+          <p:nvPr/>
+        </p:nvSpPr>
+        <p:spPr>
+          <a:xfrm xmlns:a="http://schemas.openxmlformats.org/drawingml/2006/main">
+            <a:off x="6571336" y="3218688"/>
+            <a:ext cx="1463040" cy="347472"/>
+          </a:xfrm>
+          <a:prstGeom xmlns:a="http://schemas.openxmlformats.org/drawingml/2006/main" prst="rect">
+            <a:avLst/>
+          </a:prstGeom>
+          <a:noFill xmlns:a="http://schemas.openxmlformats.org/drawingml/2006/main"/>
+        </p:spPr>
+        <p:txBody>
+          <a:bodyPr xmlns:a="http://schemas.openxmlformats.org/drawingml/2006/main" wrap="square" lIns="0" tIns="0" rIns="0" bIns="0" anchor="ctr"/>
+          <a:lstStyle xmlns:a="http://schemas.openxmlformats.org/drawingml/2006/main"/>
+          <a:p xmlns:a="http://schemas.openxmlformats.org/drawingml/2006/main">
+            <a:pPr marL="0" indent="0">
+              <a:buNone/>
+            </a:pPr>
+            <a:r>
+              <a:rPr sz="1700" b="1">
+                <a:solidFill>
+                  <a:srgbClr val="A93B2B"/>
+                </a:solidFill>
+                <a:latin typeface="Cambria"/>
+                <a:ea typeface="Cambria"/>
+                <a:cs typeface="Cambria"/>
+              </a:rPr>
+              <a:t>1 / 4,680</a:t>
+            </a:r>
+          </a:p>
+        </p:txBody>
+      </p:sp>
+      <p:sp>
+        <p:nvSpPr>
+          <p:cNvPr id="24" name="Text 22">
+            <a:extLst xmlns:a="http://schemas.openxmlformats.org/drawingml/2006/main">
+              <a:ext uri="{FF2B5EF4-FFF2-40B4-BE49-F238E27FC236}">
+                <a16:creationId xmlns:a16="http://schemas.microsoft.com/office/drawing/2014/main" id="{41487ECA-A561-4FFC-9B39-603EFDE0749D}"/>
+              </a:ext>
+            </a:extLst>
+          </p:cNvPr>
+          <p:cNvSpPr>
+            <a:spLocks xmlns:a="http://schemas.openxmlformats.org/drawingml/2006/main" noGrp="1"/>
+          </p:cNvSpPr>
+          <p:nvPr/>
+        </p:nvSpPr>
+        <p:spPr>
+          <a:xfrm xmlns:a="http://schemas.openxmlformats.org/drawingml/2006/main">
+            <a:off x="8153248" y="3218688"/>
+            <a:ext cx="3078328" cy="347472"/>
+          </a:xfrm>
+          <a:prstGeom xmlns:a="http://schemas.openxmlformats.org/drawingml/2006/main" prst="rect">
+            <a:avLst/>
+          </a:prstGeom>
+          <a:noFill xmlns:a="http://schemas.openxmlformats.org/drawingml/2006/main"/>
+        </p:spPr>
+        <p:txBody>
+          <a:bodyPr xmlns:a="http://schemas.openxmlformats.org/drawingml/2006/main" wrap="square" lIns="0" tIns="0" rIns="0" bIns="0" anchor="ctr"/>
+          <a:lstStyle xmlns:a="http://schemas.openxmlformats.org/drawingml/2006/main"/>
+          <a:p xmlns:a="http://schemas.openxmlformats.org/drawingml/2006/main">
+            <a:pPr marL="0" indent="0">
+              <a:buNone/>
+            </a:pPr>
+            <a:r>
+              <a:rPr sz="1150">
+                <a:solidFill>
+                  <a:srgbClr val="24354F"/>
+                </a:solidFill>
+                <a:latin typeface="Calibri"/>
+                <a:ea typeface="Calibri"/>
+                <a:cs typeface="Calibri"/>
+              </a:rPr>
+              <a:t>ReAct or plan-and-execute runs</a:t>
+            </a:r>
+          </a:p>
+        </p:txBody>
+      </p:sp>
+      <p:sp>
+        <p:nvSpPr>
+          <p:cNvPr id="25" name="Text 23">
+            <a:extLst xmlns:a="http://schemas.openxmlformats.org/drawingml/2006/main">
+              <a:ext uri="{FF2B5EF4-FFF2-40B4-BE49-F238E27FC236}">
+                <a16:creationId xmlns:a16="http://schemas.microsoft.com/office/drawing/2014/main" id="{7E12A923-8838-46B6-BE65-498B863BD457}"/>
+              </a:ext>
+            </a:extLst>
+          </p:cNvPr>
+          <p:cNvSpPr>
+            <a:spLocks xmlns:a="http://schemas.openxmlformats.org/drawingml/2006/main" noGrp="1"/>
+          </p:cNvSpPr>
+          <p:nvPr/>
+        </p:nvSpPr>
+        <p:spPr>
+          <a:xfrm xmlns:a="http://schemas.openxmlformats.org/drawingml/2006/main">
+            <a:off x="6571336" y="3749040"/>
+            <a:ext cx="4687672" cy="694944"/>
+          </a:xfrm>
+          <a:prstGeom xmlns:a="http://schemas.openxmlformats.org/drawingml/2006/main" prst="rect">
+            <a:avLst/>
+          </a:prstGeom>
+          <a:noFill xmlns:a="http://schemas.openxmlformats.org/drawingml/2006/main"/>
+        </p:spPr>
+        <p:txBody>
+          <a:bodyPr xmlns:a="http://schemas.openxmlformats.org/drawingml/2006/main" wrap="square" lIns="0" tIns="0" rIns="0" bIns="0" anchor="t"/>
+          <a:lstStyle xmlns:a="http://schemas.openxmlformats.org/drawingml/2006/main"/>
+          <a:p xmlns:a="http://schemas.openxmlformats.org/drawingml/2006/main">
+            <a:pPr marL="0" indent="0">
+              <a:lnSpc>
+                <a:spcPct val="108000"/>
+              </a:lnSpc>
+              <a:buNone/>
+            </a:pPr>
+            <a:r>
+              <a:rPr sz="1100">
+                <a:solidFill>
+                  <a:srgbClr val="5C4034"/>
+                </a:solidFill>
+                <a:latin typeface="Calibri"/>
+                <a:ea typeface="Calibri"/>
+                <a:cs typeface="Calibri"/>
+              </a:rPr>
+              <a:t>Admissible, rarely dispatchable: agents that open by reading API documentation almost never reach the compiled path; admitting that read recovers only 2 more.</a:t>
+            </a:r>
+          </a:p>
+        </p:txBody>
+      </p:sp>
+      <p:sp>
+        <p:nvSpPr>
+          <p:cNvPr id="26" name="Shape 24">
+            <a:extLst xmlns:a="http://schemas.openxmlformats.org/drawingml/2006/main">
+              <a:ext uri="{FF2B5EF4-FFF2-40B4-BE49-F238E27FC236}">
+                <a16:creationId xmlns:a16="http://schemas.microsoft.com/office/drawing/2014/main" id="{C0BF981A-9E8F-494A-9AD0-98168DAA843F}"/>
+              </a:ext>
+            </a:extLst>
+          </p:cNvPr>
+          <p:cNvSpPr>
+            <a:spLocks xmlns:a="http://schemas.openxmlformats.org/drawingml/2006/main" noGrp="1"/>
+          </p:cNvSpPr>
+          <p:nvPr/>
+        </p:nvSpPr>
+        <p:spPr>
+          <a:xfrm xmlns:a="http://schemas.openxmlformats.org/drawingml/2006/main">
+            <a:off x="640080" y="4754880"/>
+            <a:ext cx="10911535" cy="1371600"/>
+          </a:xfrm>
+          <a:prstGeom xmlns:a="http://schemas.openxmlformats.org/drawingml/2006/main" prst="roundRect">
+            <a:avLst>
+              <a:gd name="adj" fmla="val 3333"/>
+            </a:avLst>
+          </a:prstGeom>
+          <a:solidFill xmlns:a="http://schemas.openxmlformats.org/drawingml/2006/main">
+            <a:srgbClr val="E8F4F5"/>
+          </a:solidFill>
+          <a:ln xmlns:a="http://schemas.openxmlformats.org/drawingml/2006/main" w="9525">
+            <a:solidFill>
+              <a:srgbClr val="CFE4E7"/>
+            </a:solidFill>
+            <a:prstDash val="solid"/>
+          </a:ln>
+          <a:effectLst xmlns:a="http://schemas.openxmlformats.org/drawingml/2006/main">
+            <a:outerShdw blurRad="114300" dist="17780" dir="5400000" algn="bl" rotWithShape="0">
+              <a:srgbClr val="94A6BC">
+                <a:alpha val="16000"/>
+              </a:srgbClr>
+            </a:outerShdw>
+          </a:effectLst>
+        </p:spPr>
+        <p:txBody>
+          <a:bodyPr xmlns:a="http://schemas.openxmlformats.org/drawingml/2006/main"/>
+          <a:lstStyle xmlns:a="http://schemas.openxmlformats.org/drawingml/2006/main"/>
+          <a:p xmlns:a="http://schemas.openxmlformats.org/drawingml/2006/main"/>
+        </p:txBody>
+      </p:sp>
+      <p:sp>
+        <p:nvSpPr>
+          <p:cNvPr id="27" name="Shape 25">
+            <a:extLst xmlns:a="http://schemas.openxmlformats.org/drawingml/2006/main">
+              <a:ext uri="{FF2B5EF4-FFF2-40B4-BE49-F238E27FC236}">
+                <a16:creationId xmlns:a16="http://schemas.microsoft.com/office/drawing/2014/main" id="{A8D5D3DB-7228-4C64-BB37-2C16FCEA1A88}"/>
+              </a:ext>
+            </a:extLst>
+          </p:cNvPr>
+          <p:cNvSpPr>
+            <a:spLocks xmlns:a="http://schemas.openxmlformats.org/drawingml/2006/main" noGrp="1"/>
+          </p:cNvSpPr>
+          <p:nvPr/>
+        </p:nvSpPr>
+        <p:spPr>
+          <a:xfrm xmlns:a="http://schemas.openxmlformats.org/drawingml/2006/main">
+            <a:off x="914400" y="4956048"/>
+            <a:ext cx="384048" cy="384048"/>
+          </a:xfrm>
+          <a:prstGeom xmlns:a="http://schemas.openxmlformats.org/drawingml/2006/main" prst="ellipse">
+            <a:avLst/>
+          </a:prstGeom>
+          <a:solidFill xmlns:a="http://schemas.openxmlformats.org/drawingml/2006/main">
+            <a:srgbClr val="1F8A99"/>
+          </a:solidFill>
+          <a:ln xmlns:a="http://schemas.openxmlformats.org/drawingml/2006/main" w="6350">
+            <a:solidFill>
+              <a:srgbClr val="1F8A99"/>
+            </a:solidFill>
+            <a:prstDash val="solid"/>
+          </a:ln>
+        </p:spPr>
+        <p:txBody>
+          <a:bodyPr xmlns:a="http://schemas.openxmlformats.org/drawingml/2006/main"/>
+          <a:lstStyle xmlns:a="http://schemas.openxmlformats.org/drawingml/2006/main"/>
+          <a:p xmlns:a="http://schemas.openxmlformats.org/drawingml/2006/main"/>
+        </p:txBody>
+      </p:sp>
+      <p:sp>
+        <p:nvSpPr>
+          <p:cNvPr id="28" name="Text 26">
+            <a:extLst xmlns:a="http://schemas.openxmlformats.org/drawingml/2006/main">
+              <a:ext uri="{FF2B5EF4-FFF2-40B4-BE49-F238E27FC236}">
+                <a16:creationId xmlns:a16="http://schemas.microsoft.com/office/drawing/2014/main" id="{8DBCF72E-4F10-4B08-8087-4D76EC613F69}"/>
+              </a:ext>
+            </a:extLst>
+          </p:cNvPr>
+          <p:cNvSpPr>
+            <a:spLocks xmlns:a="http://schemas.openxmlformats.org/drawingml/2006/main" noGrp="1"/>
+          </p:cNvSpPr>
+          <p:nvPr/>
+        </p:nvSpPr>
+        <p:spPr>
+          <a:xfrm xmlns:a="http://schemas.openxmlformats.org/drawingml/2006/main">
+            <a:off x="914400" y="4956048"/>
+            <a:ext cx="384048" cy="384048"/>
+          </a:xfrm>
+          <a:prstGeom xmlns:a="http://schemas.openxmlformats.org/drawingml/2006/main" prst="rect">
+            <a:avLst/>
+          </a:prstGeom>
+          <a:noFill xmlns:a="http://schemas.openxmlformats.org/drawingml/2006/main"/>
+        </p:spPr>
+        <p:txBody>
+          <a:bodyPr xmlns:a="http://schemas.openxmlformats.org/drawingml/2006/main" wrap="square" lIns="0" tIns="0" rIns="0" bIns="0" anchor="ctr"/>
+          <a:lstStyle xmlns:a="http://schemas.openxmlformats.org/drawingml/2006/main"/>
+          <a:p xmlns:a="http://schemas.openxmlformats.org/drawingml/2006/main">
+            <a:pPr marL="0" indent="0" algn="ctr">
+              <a:buNone/>
+            </a:pPr>
+            <a:r>
+              <a:rPr sz="1300" b="1">
+                <a:solidFill>
+                  <a:srgbClr val="FFFFFF"/>
+                </a:solidFill>
+                <a:latin typeface="Calibri"/>
+                <a:ea typeface="Calibri"/>
+                <a:cs typeface="Calibri"/>
+              </a:rPr>
+              <a:t>→</a:t>
+            </a:r>
+          </a:p>
+        </p:txBody>
+      </p:sp>
+      <p:sp>
+        <p:nvSpPr>
+          <p:cNvPr id="29" name="Text 27">
+            <a:extLst xmlns:a="http://schemas.openxmlformats.org/drawingml/2006/main">
+              <a:ext uri="{FF2B5EF4-FFF2-40B4-BE49-F238E27FC236}">
+                <a16:creationId xmlns:a16="http://schemas.microsoft.com/office/drawing/2014/main" id="{E55FC436-6B16-4308-9F0A-60AB237C51A1}"/>
+              </a:ext>
+            </a:extLst>
+          </p:cNvPr>
+          <p:cNvSpPr>
+            <a:spLocks xmlns:a="http://schemas.openxmlformats.org/drawingml/2006/main" noGrp="1"/>
+          </p:cNvSpPr>
+          <p:nvPr/>
+        </p:nvSpPr>
+        <p:spPr>
+          <a:xfrm xmlns:a="http://schemas.openxmlformats.org/drawingml/2006/main">
+            <a:off x="1463040" y="4919472"/>
+            <a:ext cx="9814255" cy="310896"/>
+          </a:xfrm>
+          <a:prstGeom xmlns:a="http://schemas.openxmlformats.org/drawingml/2006/main" prst="rect">
+            <a:avLst/>
+          </a:prstGeom>
+          <a:noFill xmlns:a="http://schemas.openxmlformats.org/drawingml/2006/main"/>
+        </p:spPr>
+        <p:txBody>
+          <a:bodyPr xmlns:a="http://schemas.openxmlformats.org/drawingml/2006/main" wrap="square" lIns="0" tIns="0" rIns="0" bIns="0" anchor="ctr"/>
+          <a:lstStyle xmlns:a="http://schemas.openxmlformats.org/drawingml/2006/main"/>
+          <a:p xmlns:a="http://schemas.openxmlformats.org/drawingml/2006/main">
+            <a:pPr marL="0" indent="0">
+              <a:buNone/>
+            </a:pPr>
+            <a:r>
+              <a:rPr sz="1400" b="1">
+                <a:solidFill>
+                  <a:srgbClr val="0E1E3A"/>
+                </a:solidFill>
+                <a:latin typeface="Cambria"/>
+                <a:ea typeface="Cambria"/>
+                <a:cs typeface="Cambria"/>
+              </a:rPr>
+              <a:t>No model runs on either benchmark, so neither licenses an efficiency claim</a:t>
+            </a:r>
+          </a:p>
+        </p:txBody>
+      </p:sp>
+      <p:sp>
+        <p:nvSpPr>
+          <p:cNvPr id="30" name="Text 28">
+            <a:extLst xmlns:a="http://schemas.openxmlformats.org/drawingml/2006/main">
+              <a:ext uri="{FF2B5EF4-FFF2-40B4-BE49-F238E27FC236}">
+                <a16:creationId xmlns:a16="http://schemas.microsoft.com/office/drawing/2014/main" id="{C9547E57-0BC7-4666-B445-08D84357BB7A}"/>
+              </a:ext>
+            </a:extLst>
+          </p:cNvPr>
+          <p:cNvSpPr>
+            <a:spLocks xmlns:a="http://schemas.openxmlformats.org/drawingml/2006/main" noGrp="1"/>
+          </p:cNvSpPr>
+          <p:nvPr/>
+        </p:nvSpPr>
+        <p:spPr>
+          <a:xfrm xmlns:a="http://schemas.openxmlformats.org/drawingml/2006/main">
+            <a:off x="1463040" y="5266944"/>
+            <a:ext cx="9722815" cy="749808"/>
+          </a:xfrm>
+          <a:prstGeom xmlns:a="http://schemas.openxmlformats.org/drawingml/2006/main" prst="rect">
+            <a:avLst/>
+          </a:prstGeom>
+          <a:noFill xmlns:a="http://schemas.openxmlformats.org/drawingml/2006/main"/>
+        </p:spPr>
+        <p:txBody>
+          <a:bodyPr xmlns:a="http://schemas.openxmlformats.org/drawingml/2006/main" wrap="square" lIns="0" tIns="0" rIns="0" bIns="0" anchor="ctr"/>
+          <a:lstStyle xmlns:a="http://schemas.openxmlformats.org/drawingml/2006/main"/>
+          <a:p xmlns:a="http://schemas.openxmlformats.org/drawingml/2006/main">
+            <a:pPr marL="0" indent="0">
+              <a:lnSpc>
+                <a:spcPct val="106000"/>
+              </a:lnSpc>
+              <a:buNone/>
+            </a:pPr>
+            <a:r>
+              <a:rPr sz="1150">
+                <a:solidFill>
+                  <a:srgbClr val="24354F"/>
+                </a:solidFill>
+                <a:latin typeface="Calibri"/>
+                <a:ea typeface="Calibri"/>
+                <a:cs typeface="Calibri"/>
+              </a:rPr>
+              <a:t>The floor is a corpus-size fact: it bounds what public trace benchmarks can certify, not what the compiler can do. BIRD, with 146 to 474 questions per database and a live agent, is where the benefit becomes measurable.</a:t>
+            </a:r>
+          </a:p>
+        </p:txBody>
+      </p:sp>
+    </p:spTree>
+    <p:extLst>
+      <p:ext uri="{BB962C8B-B14F-4D97-AF65-F5344CB8AC3E}">
+        <p14:creationId xmlns:p14="http://schemas.microsoft.com/office/powerpoint/2010/main" val="2014152445"/>
       </p:ext>
     </p:extLst>
   </p:cSld>

--- a/paper/slides/compiling-recurrent-agent-workflows-into-guarded-programs-detailed.pptx
+++ b/paper/slides/compiling-recurrent-agent-workflows-into-guarded-programs-detailed.pptx
@@ -3199,7 +3199,7 @@
           <a:lstStyle xmlns:a="http://schemas.openxmlformats.org/drawingml/2006/main"/>
           <a:p xmlns:a="http://schemas.openxmlformats.org/drawingml/2006/main">
             <a:r>
-              <a:t>BIRD is the public benchmark where GAC delivers a measured benefit. A schema-first SQL agent's opening (list the tables, read every schema) compiles on 26 of 31 databases with gpt-5.6-luna and on all five dev databases with gpt-6-luna; on 924 held-out questions there is no detected accuracy loss and model calls fall 45 to 50 percent. A standard agent that picks tables per question is refused everywhere, as is Claude Sonnet, which did not follow the schema-first instruction as a fixed step. Cost savings are modest (11 to 18 percent at uncached prices) because the removed calls are the shortest ones.</a:t>
+              <a:t>BIRD is the public benchmark where GAC delivers a measured benefit. A schema-first SQL agent's opening (list the tables, read every schema) compiles on 26 of 31 databases with gpt-5.6-luna and on all five dev databases with gpt-6-luna; on 930 scheduled held-out questions there is no detected accuracy loss (equivalence is not established) and model calls fall 45 to 50 percent. A standard agent that picks tables per question is refused everywhere, as is Claude Sonnet, which did not follow the schema-first instruction as a fixed step. Cost savings are modest (11 to 18 percent at uncached prices) because the removed calls are the shortest ones.</a:t>
             </a:r>
           </a:p>
         </p:txBody>
@@ -4628,7 +4628,7 @@
                 <a:ea typeface="Calibri"/>
                 <a:cs typeface="Calibri"/>
               </a:rPr>
-              <a:t>of 31 BIRD databases compiled, accuracy held</a:t>
+              <a:t>of 31 BIRD databases compiled; no loss detected</a:t>
             </a:r>
           </a:p>
         </p:txBody>
@@ -17863,7 +17863,7 @@
                 <a:ea typeface="Cambria"/>
                 <a:cs typeface="Cambria"/>
               </a:rPr>
-              <a:t>−45.9%</a:t>
+              <a:t>−45.8%</a:t>
             </a:r>
           </a:p>
         </p:txBody>
@@ -26318,7 +26318,7 @@
                 <a:ea typeface="Calibri"/>
                 <a:cs typeface="Calibri"/>
               </a:rPr>
-              <a:t>Every threshold below 0.14 admits nothing and every one above admits all 92, with zero violations. A pre-registered support-only comparator on four repositories and 240 held-out pairs found the same all-or-none step: still not a risk–coverage frontier.</a:t>
+              <a:t>Every threshold below 0.14 admits nothing and every one above admits all 92. A support-only comparator on 240 held-out pairs found the same step, and an amended 184-group end-to-end issue gate retired with two errors: no risk–coverage frontier.</a:t>
             </a:r>
           </a:p>
         </p:txBody>
@@ -28894,7 +28894,7 @@
                 <a:ea typeface="Cambria"/>
                 <a:cs typeface="Cambria"/>
               </a:rPr>
-              <a:t>−45.9%</a:t>
+              <a:t>−45.8%</a:t>
             </a:r>
           </a:p>
         </p:txBody>
@@ -28939,7 +28939,7 @@
                 <a:ea typeface="Calibri"/>
                 <a:cs typeface="Calibri"/>
               </a:rPr>
-              <a:t>provider requests, 625 held-out questions</a:t>
+              <a:t>provider requests, 629 completed pairs</a:t>
             </a:r>
           </a:p>
         </p:txBody>
@@ -28984,7 +28984,7 @@
                 <a:ea typeface="Cambria"/>
                 <a:cs typeface="Cambria"/>
               </a:rPr>
-              <a:t>−18.1%</a:t>
+              <a:t>402 / 403</a:t>
             </a:r>
           </a:p>
         </p:txBody>
@@ -29029,7 +29029,7 @@
                 <a:ea typeface="Calibri"/>
                 <a:cs typeface="Calibri"/>
               </a:rPr>
-              <a:t>estimated cost (−14.0% at uncached prices)</a:t>
+              <a:t>correct of 630, compiled vs. unchanged</a:t>
             </a:r>
           </a:p>
         </p:txBody>
@@ -29074,7 +29074,7 @@
                 <a:ea typeface="Cambria"/>
                 <a:cs typeface="Cambria"/>
               </a:rPr>
-              <a:t>400 / 401</a:t>
+              <a:t>−3.3 to +3.0</a:t>
             </a:r>
           </a:p>
         </p:txBody>
@@ -29119,7 +29119,7 @@
                 <a:ea typeface="Calibri"/>
                 <a:cs typeface="Calibri"/>
               </a:rPr>
-              <a:t>correct, compiled vs. unchanged agent</a:t>
+              <a:t>accuracy difference, 95% interval (points)</a:t>
             </a:r>
           </a:p>
         </p:txBody>
@@ -29167,7 +29167,7 @@
                 <a:ea typeface="Calibri"/>
                 <a:cs typeface="Calibri"/>
               </a:rPr>
-              <a:t>Every admitted database dispatched on every question. The result replicates on the five dev databases and on gpt-6-luna (−49.9% requests, 93 vs. 91 correct).</a:t>
+              <a:t>Every admitted database dispatched on every completed question. The result replicates on the five dev databases and on gpt-6-luna (−49.6% requests; 93 vs. 91 of 150).</a:t>
             </a:r>
           </a:p>
         </p:txBody>
@@ -29845,7 +29845,7 @@
                 <a:ea typeface="Calibri"/>
                 <a:cs typeface="Calibri"/>
               </a:rPr>
-              <a:t>On 924 held-out questions with a compiled agent (26 databases, two model families), dispatch was complete and no run showed a detected accuracy loss: requests fell 45–50%, latency 29–38%, and cost 11–18% at uncached prices. A hand-written schema prefetch matches the compiled program.</a:t>
+              <a:t>On 930 scheduled held-out questions with a compiled agent (26 databases, two model families), no run showed a detected accuracy loss, though equivalence is not established: requests fell 45–50%, latency 29–38%, and cost 11–18% at uncached prices. A hand-written schema prefetch matches the compiled program.</a:t>
             </a:r>
           </a:p>
         </p:txBody>
